--- a/figures/Fig5_model_anatomy_v2.pptx
+++ b/figures/Fig5_model_anatomy_v2.pptx
@@ -4549,7 +4549,7 @@
           <p:spPr>
             <a:xfrm>
               <a:off x="5968773" y="846892"/>
-              <a:ext cx="501708" cy="911689"/>
+              <a:ext cx="501708" cy="911946"/>
             </a:xfrm>
             <a:prstGeom prst="rect">
               <a:avLst/>
@@ -4574,8 +4574,8 @@
           </p:nvSpPr>
           <p:spPr>
             <a:xfrm>
-              <a:off x="5968773" y="1758582"/>
-              <a:ext cx="501708" cy="1085260"/>
+              <a:off x="5968773" y="1758839"/>
+              <a:ext cx="501708" cy="1085004"/>
             </a:xfrm>
             <a:prstGeom prst="rect">
               <a:avLst/>
@@ -4601,7 +4601,7 @@
           <p:spPr>
             <a:xfrm>
               <a:off x="4296412" y="846892"/>
-              <a:ext cx="501708" cy="1208107"/>
+              <a:ext cx="501708" cy="1208233"/>
             </a:xfrm>
             <a:prstGeom prst="rect">
               <a:avLst/>
@@ -4626,8 +4626,8 @@
           </p:nvSpPr>
           <p:spPr>
             <a:xfrm>
-              <a:off x="4296412" y="2055000"/>
-              <a:ext cx="501708" cy="788843"/>
+              <a:off x="4296412" y="2055126"/>
+              <a:ext cx="501708" cy="788717"/>
             </a:xfrm>
             <a:prstGeom prst="rect">
               <a:avLst/>
@@ -4653,7 +4653,7 @@
           <p:spPr>
             <a:xfrm>
               <a:off x="5132592" y="846892"/>
-              <a:ext cx="501708" cy="844630"/>
+              <a:ext cx="501708" cy="844827"/>
             </a:xfrm>
             <a:prstGeom prst="rect">
               <a:avLst/>
@@ -4678,8 +4678,8 @@
           </p:nvSpPr>
           <p:spPr>
             <a:xfrm>
-              <a:off x="5132592" y="1691523"/>
-              <a:ext cx="501708" cy="1152319"/>
+              <a:off x="5132592" y="1691720"/>
+              <a:ext cx="501708" cy="1152123"/>
             </a:xfrm>
             <a:prstGeom prst="rect">
               <a:avLst/>
@@ -4704,7 +4704,7 @@
           </p:nvSpPr>
           <p:spPr>
             <a:xfrm>
-              <a:off x="6116803" y="1265933"/>
+              <a:off x="6116803" y="1266061"/>
               <a:ext cx="205648" cy="73609"/>
             </a:xfrm>
             <a:prstGeom prst="rect">
@@ -4747,7 +4747,7 @@
           </p:nvSpPr>
           <p:spPr>
             <a:xfrm>
-              <a:off x="6116803" y="2264408"/>
+              <a:off x="6116803" y="2264536"/>
               <a:ext cx="205648" cy="73609"/>
             </a:xfrm>
             <a:prstGeom prst="rect">
@@ -4790,7 +4790,7 @@
           </p:nvSpPr>
           <p:spPr>
             <a:xfrm>
-              <a:off x="4444442" y="1414141"/>
+              <a:off x="4444442" y="1414205"/>
               <a:ext cx="205648" cy="73609"/>
             </a:xfrm>
             <a:prstGeom prst="rect">
@@ -4820,7 +4820,7 @@
                   <a:latin typeface="Arial"/>
                   <a:cs typeface="Arial"/>
                 </a:rPr>
-                <a:t>60%</a:t>
+                <a:t>61%</a:t>
               </a:r>
             </a:p>
           </p:txBody>
@@ -4833,7 +4833,7 @@
           </p:nvSpPr>
           <p:spPr>
             <a:xfrm>
-              <a:off x="4444442" y="2412617"/>
+              <a:off x="4444442" y="2412680"/>
               <a:ext cx="205648" cy="73609"/>
             </a:xfrm>
             <a:prstGeom prst="rect">
@@ -4863,7 +4863,7 @@
                   <a:latin typeface="Arial"/>
                   <a:cs typeface="Arial"/>
                 </a:rPr>
-                <a:t>40%</a:t>
+                <a:t>39%</a:t>
               </a:r>
             </a:p>
           </p:txBody>
@@ -4876,7 +4876,7 @@
           </p:nvSpPr>
           <p:spPr>
             <a:xfrm>
-              <a:off x="5280622" y="1232403"/>
+              <a:off x="5280622" y="1232501"/>
               <a:ext cx="205648" cy="73609"/>
             </a:xfrm>
             <a:prstGeom prst="rect">
@@ -4919,7 +4919,7 @@
           </p:nvSpPr>
           <p:spPr>
             <a:xfrm>
-              <a:off x="5280622" y="2230879"/>
+              <a:off x="5280622" y="2230977"/>
               <a:ext cx="205648" cy="73609"/>
             </a:xfrm>
             <a:prstGeom prst="rect">
@@ -6448,7 +6448,7 @@
           </p:nvSpPr>
           <p:spPr>
             <a:xfrm>
-              <a:off x="701215" y="5767333"/>
+              <a:off x="701215" y="5761946"/>
               <a:ext cx="2225295" cy="0"/>
             </a:xfrm>
             <a:custGeom>
@@ -6491,7 +6491,7 @@
           </p:nvSpPr>
           <p:spPr>
             <a:xfrm>
-              <a:off x="701215" y="5195760"/>
+              <a:off x="701215" y="5193618"/>
               <a:ext cx="2225295" cy="0"/>
             </a:xfrm>
             <a:custGeom>
@@ -6534,7 +6534,7 @@
           </p:nvSpPr>
           <p:spPr>
             <a:xfrm>
-              <a:off x="701215" y="4624187"/>
+              <a:off x="701215" y="4625290"/>
               <a:ext cx="2225295" cy="0"/>
             </a:xfrm>
             <a:custGeom>
@@ -6577,7 +6577,7 @@
           </p:nvSpPr>
           <p:spPr>
             <a:xfrm>
-              <a:off x="701215" y="4052614"/>
+              <a:off x="701215" y="4056962"/>
               <a:ext cx="2225295" cy="0"/>
             </a:xfrm>
             <a:custGeom>
@@ -6620,7 +6620,7 @@
           </p:nvSpPr>
           <p:spPr>
             <a:xfrm>
-              <a:off x="1818775" y="3735091"/>
+              <a:off x="1818692" y="3735091"/>
               <a:ext cx="0" cy="2036889"/>
             </a:xfrm>
             <a:custGeom>
@@ -6663,372 +6663,372 @@
           </p:nvSpPr>
           <p:spPr>
             <a:xfrm>
-              <a:off x="802365" y="3868093"/>
-              <a:ext cx="2022995" cy="1811302"/>
+              <a:off x="802365" y="3849017"/>
+              <a:ext cx="2022995" cy="1830377"/>
             </a:xfrm>
             <a:custGeom>
               <a:avLst/>
               <a:pathLst>
-                <a:path w="2022995" h="1811302">
+                <a:path w="2022995" h="1830377">
                   <a:moveTo>
-                    <a:pt x="0" y="1646196"/>
+                    <a:pt x="0" y="1675068"/>
                   </a:moveTo>
                   <a:lnTo>
-                    <a:pt x="34288" y="1640058"/>
-                  </a:lnTo>
-                  <a:lnTo>
-                    <a:pt x="68576" y="1633748"/>
-                  </a:lnTo>
-                  <a:lnTo>
-                    <a:pt x="102864" y="1627261"/>
-                  </a:lnTo>
-                  <a:lnTo>
-                    <a:pt x="137152" y="1620589"/>
-                  </a:lnTo>
-                  <a:lnTo>
-                    <a:pt x="171440" y="1613723"/>
-                  </a:lnTo>
-                  <a:lnTo>
-                    <a:pt x="205728" y="1606655"/>
-                  </a:lnTo>
-                  <a:lnTo>
-                    <a:pt x="240016" y="1599376"/>
-                  </a:lnTo>
-                  <a:lnTo>
-                    <a:pt x="274304" y="1591876"/>
-                  </a:lnTo>
-                  <a:lnTo>
-                    <a:pt x="308592" y="1584145"/>
-                  </a:lnTo>
-                  <a:lnTo>
-                    <a:pt x="342880" y="1576170"/>
-                  </a:lnTo>
-                  <a:lnTo>
-                    <a:pt x="377168" y="1567938"/>
-                  </a:lnTo>
-                  <a:lnTo>
-                    <a:pt x="411456" y="1559437"/>
-                  </a:lnTo>
-                  <a:lnTo>
-                    <a:pt x="445744" y="1550650"/>
-                  </a:lnTo>
-                  <a:lnTo>
-                    <a:pt x="480032" y="1541561"/>
-                  </a:lnTo>
-                  <a:lnTo>
-                    <a:pt x="514320" y="1532152"/>
-                  </a:lnTo>
-                  <a:lnTo>
-                    <a:pt x="548609" y="1522403"/>
-                  </a:lnTo>
-                  <a:lnTo>
-                    <a:pt x="582897" y="1512291"/>
-                  </a:lnTo>
-                  <a:lnTo>
-                    <a:pt x="617185" y="1501792"/>
-                  </a:lnTo>
-                  <a:lnTo>
-                    <a:pt x="651473" y="1490880"/>
-                  </a:lnTo>
-                  <a:lnTo>
-                    <a:pt x="685761" y="1479524"/>
-                  </a:lnTo>
-                  <a:lnTo>
-                    <a:pt x="720049" y="1467692"/>
-                  </a:lnTo>
-                  <a:lnTo>
-                    <a:pt x="754337" y="1455348"/>
-                  </a:lnTo>
-                  <a:lnTo>
-                    <a:pt x="788625" y="1442453"/>
-                  </a:lnTo>
-                  <a:lnTo>
-                    <a:pt x="822913" y="1428964"/>
-                  </a:lnTo>
-                  <a:lnTo>
-                    <a:pt x="857201" y="1414832"/>
-                  </a:lnTo>
-                  <a:lnTo>
-                    <a:pt x="891489" y="1400007"/>
-                  </a:lnTo>
-                  <a:lnTo>
-                    <a:pt x="925777" y="1384434"/>
-                  </a:lnTo>
-                  <a:lnTo>
-                    <a:pt x="960065" y="1368052"/>
-                  </a:lnTo>
-                  <a:lnTo>
-                    <a:pt x="994353" y="1350797"/>
-                  </a:lnTo>
-                  <a:lnTo>
-                    <a:pt x="1028641" y="1332601"/>
-                  </a:lnTo>
-                  <a:lnTo>
-                    <a:pt x="1062930" y="1313393"/>
-                  </a:lnTo>
-                  <a:lnTo>
-                    <a:pt x="1097218" y="1293098"/>
-                  </a:lnTo>
-                  <a:lnTo>
-                    <a:pt x="1131506" y="1271637"/>
-                  </a:lnTo>
-                  <a:lnTo>
-                    <a:pt x="1165794" y="1248931"/>
-                  </a:lnTo>
-                  <a:lnTo>
-                    <a:pt x="1200082" y="1224897"/>
-                  </a:lnTo>
-                  <a:lnTo>
-                    <a:pt x="1234370" y="1199451"/>
-                  </a:lnTo>
-                  <a:lnTo>
-                    <a:pt x="1268658" y="1172510"/>
-                  </a:lnTo>
-                  <a:lnTo>
-                    <a:pt x="1302946" y="1143985"/>
-                  </a:lnTo>
-                  <a:lnTo>
-                    <a:pt x="1337234" y="1113791"/>
-                  </a:lnTo>
-                  <a:lnTo>
-                    <a:pt x="1371522" y="1081838"/>
-                  </a:lnTo>
-                  <a:lnTo>
-                    <a:pt x="1405810" y="1048037"/>
-                  </a:lnTo>
-                  <a:lnTo>
-                    <a:pt x="1440098" y="1012296"/>
-                  </a:lnTo>
-                  <a:lnTo>
-                    <a:pt x="1474386" y="974521"/>
-                  </a:lnTo>
-                  <a:lnTo>
-                    <a:pt x="1508674" y="934614"/>
-                  </a:lnTo>
-                  <a:lnTo>
-                    <a:pt x="1542962" y="892477"/>
-                  </a:lnTo>
-                  <a:lnTo>
-                    <a:pt x="1577251" y="848005"/>
-                  </a:lnTo>
-                  <a:lnTo>
-                    <a:pt x="1611539" y="801089"/>
-                  </a:lnTo>
-                  <a:lnTo>
-                    <a:pt x="1645827" y="751616"/>
-                  </a:lnTo>
-                  <a:lnTo>
-                    <a:pt x="1680115" y="699467"/>
-                  </a:lnTo>
-                  <a:lnTo>
-                    <a:pt x="1714403" y="644519"/>
-                  </a:lnTo>
-                  <a:lnTo>
-                    <a:pt x="1748691" y="586640"/>
-                  </a:lnTo>
-                  <a:lnTo>
-                    <a:pt x="1782979" y="525693"/>
-                  </a:lnTo>
-                  <a:lnTo>
-                    <a:pt x="1817267" y="461533"/>
-                  </a:lnTo>
-                  <a:lnTo>
-                    <a:pt x="1851555" y="394008"/>
-                  </a:lnTo>
-                  <a:lnTo>
-                    <a:pt x="1885843" y="322958"/>
-                  </a:lnTo>
-                  <a:lnTo>
-                    <a:pt x="1920131" y="248214"/>
-                  </a:lnTo>
-                  <a:lnTo>
-                    <a:pt x="1954419" y="169599"/>
-                  </a:lnTo>
-                  <a:lnTo>
-                    <a:pt x="1988707" y="86926"/>
+                    <a:pt x="34288" y="1669002"/>
+                  </a:lnTo>
+                  <a:lnTo>
+                    <a:pt x="68576" y="1662761"/>
+                  </a:lnTo>
+                  <a:lnTo>
+                    <a:pt x="102864" y="1656336"/>
+                  </a:lnTo>
+                  <a:lnTo>
+                    <a:pt x="137152" y="1649722"/>
+                  </a:lnTo>
+                  <a:lnTo>
+                    <a:pt x="171440" y="1642909"/>
+                  </a:lnTo>
+                  <a:lnTo>
+                    <a:pt x="205728" y="1635888"/>
+                  </a:lnTo>
+                  <a:lnTo>
+                    <a:pt x="240016" y="1628651"/>
+                  </a:lnTo>
+                  <a:lnTo>
+                    <a:pt x="274304" y="1621187"/>
+                  </a:lnTo>
+                  <a:lnTo>
+                    <a:pt x="308592" y="1613485"/>
+                  </a:lnTo>
+                  <a:lnTo>
+                    <a:pt x="342880" y="1605533"/>
+                  </a:lnTo>
+                  <a:lnTo>
+                    <a:pt x="377168" y="1597318"/>
+                  </a:lnTo>
+                  <a:lnTo>
+                    <a:pt x="411456" y="1588826"/>
+                  </a:lnTo>
+                  <a:lnTo>
+                    <a:pt x="445744" y="1580041"/>
+                  </a:lnTo>
+                  <a:lnTo>
+                    <a:pt x="480032" y="1570947"/>
+                  </a:lnTo>
+                  <a:lnTo>
+                    <a:pt x="514320" y="1561526"/>
+                  </a:lnTo>
+                  <a:lnTo>
+                    <a:pt x="548609" y="1551756"/>
+                  </a:lnTo>
+                  <a:lnTo>
+                    <a:pt x="582897" y="1541615"/>
+                  </a:lnTo>
+                  <a:lnTo>
+                    <a:pt x="617185" y="1531079"/>
+                  </a:lnTo>
+                  <a:lnTo>
+                    <a:pt x="651473" y="1520121"/>
+                  </a:lnTo>
+                  <a:lnTo>
+                    <a:pt x="685761" y="1508710"/>
+                  </a:lnTo>
+                  <a:lnTo>
+                    <a:pt x="720049" y="1496815"/>
+                  </a:lnTo>
+                  <a:lnTo>
+                    <a:pt x="754337" y="1484398"/>
+                  </a:lnTo>
+                  <a:lnTo>
+                    <a:pt x="788625" y="1471421"/>
+                  </a:lnTo>
+                  <a:lnTo>
+                    <a:pt x="822913" y="1457839"/>
+                  </a:lnTo>
+                  <a:lnTo>
+                    <a:pt x="857201" y="1443605"/>
+                  </a:lnTo>
+                  <a:lnTo>
+                    <a:pt x="891489" y="1428667"/>
+                  </a:lnTo>
+                  <a:lnTo>
+                    <a:pt x="925777" y="1412969"/>
+                  </a:lnTo>
+                  <a:lnTo>
+                    <a:pt x="960065" y="1396451"/>
+                  </a:lnTo>
+                  <a:lnTo>
+                    <a:pt x="994353" y="1379047"/>
+                  </a:lnTo>
+                  <a:lnTo>
+                    <a:pt x="1028641" y="1360690"/>
+                  </a:lnTo>
+                  <a:lnTo>
+                    <a:pt x="1062930" y="1341306"/>
+                  </a:lnTo>
+                  <a:lnTo>
+                    <a:pt x="1097218" y="1320818"/>
+                  </a:lnTo>
+                  <a:lnTo>
+                    <a:pt x="1131506" y="1299147"/>
+                  </a:lnTo>
+                  <a:lnTo>
+                    <a:pt x="1165794" y="1276211"/>
+                  </a:lnTo>
+                  <a:lnTo>
+                    <a:pt x="1200082" y="1251924"/>
+                  </a:lnTo>
+                  <a:lnTo>
+                    <a:pt x="1234370" y="1226201"/>
+                  </a:lnTo>
+                  <a:lnTo>
+                    <a:pt x="1268658" y="1198953"/>
+                  </a:lnTo>
+                  <a:lnTo>
+                    <a:pt x="1302946" y="1170089"/>
+                  </a:lnTo>
+                  <a:lnTo>
+                    <a:pt x="1337234" y="1139519"/>
+                  </a:lnTo>
+                  <a:lnTo>
+                    <a:pt x="1371522" y="1107149"/>
+                  </a:lnTo>
+                  <a:lnTo>
+                    <a:pt x="1405810" y="1072884"/>
+                  </a:lnTo>
+                  <a:lnTo>
+                    <a:pt x="1440098" y="1036626"/>
+                  </a:lnTo>
+                  <a:lnTo>
+                    <a:pt x="1474386" y="998277"/>
+                  </a:lnTo>
+                  <a:lnTo>
+                    <a:pt x="1508674" y="957732"/>
+                  </a:lnTo>
+                  <a:lnTo>
+                    <a:pt x="1542962" y="914884"/>
+                  </a:lnTo>
+                  <a:lnTo>
+                    <a:pt x="1577251" y="869623"/>
+                  </a:lnTo>
+                  <a:lnTo>
+                    <a:pt x="1611539" y="821832"/>
+                  </a:lnTo>
+                  <a:lnTo>
+                    <a:pt x="1645827" y="771389"/>
+                  </a:lnTo>
+                  <a:lnTo>
+                    <a:pt x="1680115" y="718169"/>
+                  </a:lnTo>
+                  <a:lnTo>
+                    <a:pt x="1714403" y="662036"/>
+                  </a:lnTo>
+                  <a:lnTo>
+                    <a:pt x="1748691" y="602851"/>
+                  </a:lnTo>
+                  <a:lnTo>
+                    <a:pt x="1782979" y="540466"/>
+                  </a:lnTo>
+                  <a:lnTo>
+                    <a:pt x="1817267" y="474725"/>
+                  </a:lnTo>
+                  <a:lnTo>
+                    <a:pt x="1851555" y="405465"/>
+                  </a:lnTo>
+                  <a:lnTo>
+                    <a:pt x="1885843" y="332512"/>
+                  </a:lnTo>
+                  <a:lnTo>
+                    <a:pt x="1920131" y="255686"/>
+                  </a:lnTo>
+                  <a:lnTo>
+                    <a:pt x="1954419" y="174794"/>
+                  </a:lnTo>
+                  <a:lnTo>
+                    <a:pt x="1988707" y="89636"/>
                   </a:lnTo>
                   <a:lnTo>
                     <a:pt x="2022995" y="0"/>
                   </a:lnTo>
                   <a:lnTo>
-                    <a:pt x="2022995" y="1081078"/>
-                  </a:lnTo>
-                  <a:lnTo>
-                    <a:pt x="1988707" y="1101279"/>
-                  </a:lnTo>
-                  <a:lnTo>
-                    <a:pt x="1954419" y="1121111"/>
-                  </a:lnTo>
-                  <a:lnTo>
-                    <a:pt x="1920131" y="1140587"/>
-                  </a:lnTo>
-                  <a:lnTo>
-                    <a:pt x="1885843" y="1159722"/>
-                  </a:lnTo>
-                  <a:lnTo>
-                    <a:pt x="1851555" y="1178527"/>
-                  </a:lnTo>
-                  <a:lnTo>
-                    <a:pt x="1817267" y="1197017"/>
-                  </a:lnTo>
-                  <a:lnTo>
-                    <a:pt x="1782979" y="1215204"/>
-                  </a:lnTo>
-                  <a:lnTo>
-                    <a:pt x="1748691" y="1233101"/>
-                  </a:lnTo>
-                  <a:lnTo>
-                    <a:pt x="1714403" y="1250722"/>
-                  </a:lnTo>
-                  <a:lnTo>
-                    <a:pt x="1680115" y="1268080"/>
-                  </a:lnTo>
-                  <a:lnTo>
-                    <a:pt x="1645827" y="1285187"/>
-                  </a:lnTo>
-                  <a:lnTo>
-                    <a:pt x="1611539" y="1302056"/>
-                  </a:lnTo>
-                  <a:lnTo>
-                    <a:pt x="1577251" y="1318699"/>
-                  </a:lnTo>
-                  <a:lnTo>
-                    <a:pt x="1542962" y="1335126"/>
-                  </a:lnTo>
-                  <a:lnTo>
-                    <a:pt x="1508674" y="1351349"/>
-                  </a:lnTo>
-                  <a:lnTo>
-                    <a:pt x="1474386" y="1367377"/>
-                  </a:lnTo>
-                  <a:lnTo>
-                    <a:pt x="1440098" y="1383218"/>
-                  </a:lnTo>
-                  <a:lnTo>
-                    <a:pt x="1405810" y="1398877"/>
-                  </a:lnTo>
-                  <a:lnTo>
-                    <a:pt x="1371522" y="1414360"/>
-                  </a:lnTo>
-                  <a:lnTo>
-                    <a:pt x="1337234" y="1429668"/>
-                  </a:lnTo>
-                  <a:lnTo>
-                    <a:pt x="1302946" y="1444801"/>
-                  </a:lnTo>
-                  <a:lnTo>
-                    <a:pt x="1268658" y="1459756"/>
-                  </a:lnTo>
-                  <a:lnTo>
-                    <a:pt x="1234370" y="1474527"/>
-                  </a:lnTo>
-                  <a:lnTo>
-                    <a:pt x="1200082" y="1489105"/>
-                  </a:lnTo>
-                  <a:lnTo>
-                    <a:pt x="1165794" y="1503481"/>
-                  </a:lnTo>
-                  <a:lnTo>
-                    <a:pt x="1131506" y="1517640"/>
-                  </a:lnTo>
-                  <a:lnTo>
-                    <a:pt x="1097218" y="1531568"/>
-                  </a:lnTo>
-                  <a:lnTo>
-                    <a:pt x="1062930" y="1545250"/>
-                  </a:lnTo>
-                  <a:lnTo>
-                    <a:pt x="1028641" y="1558669"/>
-                  </a:lnTo>
-                  <a:lnTo>
-                    <a:pt x="994353" y="1571808"/>
-                  </a:lnTo>
-                  <a:lnTo>
-                    <a:pt x="960065" y="1584653"/>
-                  </a:lnTo>
-                  <a:lnTo>
-                    <a:pt x="925777" y="1597188"/>
-                  </a:lnTo>
-                  <a:lnTo>
-                    <a:pt x="891489" y="1609400"/>
-                  </a:lnTo>
-                  <a:lnTo>
-                    <a:pt x="857201" y="1621278"/>
-                  </a:lnTo>
-                  <a:lnTo>
-                    <a:pt x="822913" y="1632814"/>
-                  </a:lnTo>
-                  <a:lnTo>
-                    <a:pt x="788625" y="1644000"/>
-                  </a:lnTo>
-                  <a:lnTo>
-                    <a:pt x="754337" y="1654830"/>
-                  </a:lnTo>
-                  <a:lnTo>
-                    <a:pt x="720049" y="1665304"/>
-                  </a:lnTo>
-                  <a:lnTo>
-                    <a:pt x="685761" y="1675418"/>
-                  </a:lnTo>
-                  <a:lnTo>
-                    <a:pt x="651473" y="1685175"/>
-                  </a:lnTo>
-                  <a:lnTo>
-                    <a:pt x="617185" y="1694578"/>
-                  </a:lnTo>
-                  <a:lnTo>
-                    <a:pt x="582897" y="1703629"/>
-                  </a:lnTo>
-                  <a:lnTo>
-                    <a:pt x="548609" y="1712334"/>
-                  </a:lnTo>
-                  <a:lnTo>
-                    <a:pt x="514320" y="1720700"/>
-                  </a:lnTo>
-                  <a:lnTo>
-                    <a:pt x="480032" y="1728734"/>
-                  </a:lnTo>
-                  <a:lnTo>
-                    <a:pt x="445744" y="1736444"/>
-                  </a:lnTo>
-                  <a:lnTo>
-                    <a:pt x="411456" y="1743837"/>
-                  </a:lnTo>
-                  <a:lnTo>
-                    <a:pt x="377168" y="1750924"/>
-                  </a:lnTo>
-                  <a:lnTo>
-                    <a:pt x="342880" y="1757713"/>
-                  </a:lnTo>
-                  <a:lnTo>
-                    <a:pt x="308592" y="1764213"/>
-                  </a:lnTo>
-                  <a:lnTo>
-                    <a:pt x="274304" y="1770434"/>
-                  </a:lnTo>
-                  <a:lnTo>
-                    <a:pt x="240016" y="1776386"/>
-                  </a:lnTo>
-                  <a:lnTo>
-                    <a:pt x="205728" y="1782079"/>
-                  </a:lnTo>
-                  <a:lnTo>
-                    <a:pt x="171440" y="1787521"/>
-                  </a:lnTo>
-                  <a:lnTo>
-                    <a:pt x="137152" y="1792722"/>
-                  </a:lnTo>
-                  <a:lnTo>
-                    <a:pt x="102864" y="1797692"/>
-                  </a:lnTo>
-                  <a:lnTo>
-                    <a:pt x="68576" y="1802439"/>
-                  </a:lnTo>
-                  <a:lnTo>
-                    <a:pt x="34288" y="1806973"/>
-                  </a:lnTo>
-                  <a:lnTo>
-                    <a:pt x="0" y="1811302"/>
+                    <a:pt x="2022995" y="1088073"/>
+                  </a:lnTo>
+                  <a:lnTo>
+                    <a:pt x="1988707" y="1109430"/>
+                  </a:lnTo>
+                  <a:lnTo>
+                    <a:pt x="1954419" y="1130365"/>
+                  </a:lnTo>
+                  <a:lnTo>
+                    <a:pt x="1920131" y="1150894"/>
+                  </a:lnTo>
+                  <a:lnTo>
+                    <a:pt x="1885843" y="1171032"/>
+                  </a:lnTo>
+                  <a:lnTo>
+                    <a:pt x="1851555" y="1190792"/>
+                  </a:lnTo>
+                  <a:lnTo>
+                    <a:pt x="1817267" y="1210190"/>
+                  </a:lnTo>
+                  <a:lnTo>
+                    <a:pt x="1782979" y="1229239"/>
+                  </a:lnTo>
+                  <a:lnTo>
+                    <a:pt x="1748691" y="1247955"/>
+                  </a:lnTo>
+                  <a:lnTo>
+                    <a:pt x="1714403" y="1266351"/>
+                  </a:lnTo>
+                  <a:lnTo>
+                    <a:pt x="1680115" y="1284441"/>
+                  </a:lnTo>
+                  <a:lnTo>
+                    <a:pt x="1645827" y="1302238"/>
+                  </a:lnTo>
+                  <a:lnTo>
+                    <a:pt x="1611539" y="1319757"/>
+                  </a:lnTo>
+                  <a:lnTo>
+                    <a:pt x="1577251" y="1337009"/>
+                  </a:lnTo>
+                  <a:lnTo>
+                    <a:pt x="1542962" y="1354007"/>
+                  </a:lnTo>
+                  <a:lnTo>
+                    <a:pt x="1508674" y="1370761"/>
+                  </a:lnTo>
+                  <a:lnTo>
+                    <a:pt x="1474386" y="1387281"/>
+                  </a:lnTo>
+                  <a:lnTo>
+                    <a:pt x="1440098" y="1403576"/>
+                  </a:lnTo>
+                  <a:lnTo>
+                    <a:pt x="1405810" y="1419653"/>
+                  </a:lnTo>
+                  <a:lnTo>
+                    <a:pt x="1371522" y="1435516"/>
+                  </a:lnTo>
+                  <a:lnTo>
+                    <a:pt x="1337234" y="1451167"/>
+                  </a:lnTo>
+                  <a:lnTo>
+                    <a:pt x="1302946" y="1466607"/>
+                  </a:lnTo>
+                  <a:lnTo>
+                    <a:pt x="1268658" y="1481834"/>
+                  </a:lnTo>
+                  <a:lnTo>
+                    <a:pt x="1234370" y="1496842"/>
+                  </a:lnTo>
+                  <a:lnTo>
+                    <a:pt x="1200082" y="1511623"/>
+                  </a:lnTo>
+                  <a:lnTo>
+                    <a:pt x="1165794" y="1526168"/>
+                  </a:lnTo>
+                  <a:lnTo>
+                    <a:pt x="1131506" y="1540465"/>
+                  </a:lnTo>
+                  <a:lnTo>
+                    <a:pt x="1097218" y="1554501"/>
+                  </a:lnTo>
+                  <a:lnTo>
+                    <a:pt x="1062930" y="1568260"/>
+                  </a:lnTo>
+                  <a:lnTo>
+                    <a:pt x="1028641" y="1581730"/>
+                  </a:lnTo>
+                  <a:lnTo>
+                    <a:pt x="994353" y="1594893"/>
+                  </a:lnTo>
+                  <a:lnTo>
+                    <a:pt x="960065" y="1607738"/>
+                  </a:lnTo>
+                  <a:lnTo>
+                    <a:pt x="925777" y="1620251"/>
+                  </a:lnTo>
+                  <a:lnTo>
+                    <a:pt x="891489" y="1632420"/>
+                  </a:lnTo>
+                  <a:lnTo>
+                    <a:pt x="857201" y="1644237"/>
+                  </a:lnTo>
+                  <a:lnTo>
+                    <a:pt x="822913" y="1655694"/>
+                  </a:lnTo>
+                  <a:lnTo>
+                    <a:pt x="788625" y="1666786"/>
+                  </a:lnTo>
+                  <a:lnTo>
+                    <a:pt x="754337" y="1677509"/>
+                  </a:lnTo>
+                  <a:lnTo>
+                    <a:pt x="720049" y="1687863"/>
+                  </a:lnTo>
+                  <a:lnTo>
+                    <a:pt x="685761" y="1697848"/>
+                  </a:lnTo>
+                  <a:lnTo>
+                    <a:pt x="651473" y="1707466"/>
+                  </a:lnTo>
+                  <a:lnTo>
+                    <a:pt x="617185" y="1716721"/>
+                  </a:lnTo>
+                  <a:lnTo>
+                    <a:pt x="582897" y="1725618"/>
+                  </a:lnTo>
+                  <a:lnTo>
+                    <a:pt x="548609" y="1734164"/>
+                  </a:lnTo>
+                  <a:lnTo>
+                    <a:pt x="514320" y="1742365"/>
+                  </a:lnTo>
+                  <a:lnTo>
+                    <a:pt x="480032" y="1750230"/>
+                  </a:lnTo>
+                  <a:lnTo>
+                    <a:pt x="445744" y="1757768"/>
+                  </a:lnTo>
+                  <a:lnTo>
+                    <a:pt x="411456" y="1764988"/>
+                  </a:lnTo>
+                  <a:lnTo>
+                    <a:pt x="377168" y="1771899"/>
+                  </a:lnTo>
+                  <a:lnTo>
+                    <a:pt x="342880" y="1778512"/>
+                  </a:lnTo>
+                  <a:lnTo>
+                    <a:pt x="308592" y="1784835"/>
+                  </a:lnTo>
+                  <a:lnTo>
+                    <a:pt x="274304" y="1790879"/>
+                  </a:lnTo>
+                  <a:lnTo>
+                    <a:pt x="240016" y="1796655"/>
+                  </a:lnTo>
+                  <a:lnTo>
+                    <a:pt x="205728" y="1802172"/>
+                  </a:lnTo>
+                  <a:lnTo>
+                    <a:pt x="171440" y="1807440"/>
+                  </a:lnTo>
+                  <a:lnTo>
+                    <a:pt x="137152" y="1812468"/>
+                  </a:lnTo>
+                  <a:lnTo>
+                    <a:pt x="102864" y="1817267"/>
+                  </a:lnTo>
+                  <a:lnTo>
+                    <a:pt x="68576" y="1821846"/>
+                  </a:lnTo>
+                  <a:lnTo>
+                    <a:pt x="34288" y="1826213"/>
+                  </a:lnTo>
+                  <a:lnTo>
+                    <a:pt x="0" y="1830377"/>
                   </a:lnTo>
                   <a:close/>
                 </a:path>
@@ -7054,189 +7054,189 @@
           </p:nvSpPr>
           <p:spPr>
             <a:xfrm>
-              <a:off x="802365" y="3868093"/>
-              <a:ext cx="2022995" cy="1646196"/>
+              <a:off x="802365" y="3849017"/>
+              <a:ext cx="2022995" cy="1675068"/>
             </a:xfrm>
             <a:custGeom>
               <a:avLst/>
               <a:pathLst>
-                <a:path w="2022995" h="1646196">
+                <a:path w="2022995" h="1675068">
                   <a:moveTo>
-                    <a:pt x="0" y="1646196"/>
+                    <a:pt x="0" y="1675068"/>
                   </a:moveTo>
                   <a:lnTo>
-                    <a:pt x="34288" y="1640058"/>
-                  </a:lnTo>
-                  <a:lnTo>
-                    <a:pt x="68576" y="1633748"/>
-                  </a:lnTo>
-                  <a:lnTo>
-                    <a:pt x="102864" y="1627261"/>
-                  </a:lnTo>
-                  <a:lnTo>
-                    <a:pt x="137152" y="1620589"/>
-                  </a:lnTo>
-                  <a:lnTo>
-                    <a:pt x="171440" y="1613723"/>
-                  </a:lnTo>
-                  <a:lnTo>
-                    <a:pt x="205728" y="1606655"/>
-                  </a:lnTo>
-                  <a:lnTo>
-                    <a:pt x="240016" y="1599376"/>
-                  </a:lnTo>
-                  <a:lnTo>
-                    <a:pt x="274304" y="1591876"/>
-                  </a:lnTo>
-                  <a:lnTo>
-                    <a:pt x="308592" y="1584145"/>
-                  </a:lnTo>
-                  <a:lnTo>
-                    <a:pt x="342880" y="1576170"/>
-                  </a:lnTo>
-                  <a:lnTo>
-                    <a:pt x="377168" y="1567938"/>
-                  </a:lnTo>
-                  <a:lnTo>
-                    <a:pt x="411456" y="1559437"/>
-                  </a:lnTo>
-                  <a:lnTo>
-                    <a:pt x="445744" y="1550650"/>
-                  </a:lnTo>
-                  <a:lnTo>
-                    <a:pt x="480032" y="1541561"/>
-                  </a:lnTo>
-                  <a:lnTo>
-                    <a:pt x="514320" y="1532152"/>
-                  </a:lnTo>
-                  <a:lnTo>
-                    <a:pt x="548609" y="1522403"/>
-                  </a:lnTo>
-                  <a:lnTo>
-                    <a:pt x="582897" y="1512291"/>
-                  </a:lnTo>
-                  <a:lnTo>
-                    <a:pt x="617185" y="1501792"/>
-                  </a:lnTo>
-                  <a:lnTo>
-                    <a:pt x="651473" y="1490880"/>
-                  </a:lnTo>
-                  <a:lnTo>
-                    <a:pt x="685761" y="1479524"/>
-                  </a:lnTo>
-                  <a:lnTo>
-                    <a:pt x="720049" y="1467692"/>
-                  </a:lnTo>
-                  <a:lnTo>
-                    <a:pt x="754337" y="1455348"/>
-                  </a:lnTo>
-                  <a:lnTo>
-                    <a:pt x="788625" y="1442453"/>
-                  </a:lnTo>
-                  <a:lnTo>
-                    <a:pt x="822913" y="1428964"/>
-                  </a:lnTo>
-                  <a:lnTo>
-                    <a:pt x="857201" y="1414832"/>
-                  </a:lnTo>
-                  <a:lnTo>
-                    <a:pt x="891489" y="1400007"/>
-                  </a:lnTo>
-                  <a:lnTo>
-                    <a:pt x="925777" y="1384434"/>
-                  </a:lnTo>
-                  <a:lnTo>
-                    <a:pt x="960065" y="1368052"/>
-                  </a:lnTo>
-                  <a:lnTo>
-                    <a:pt x="994353" y="1350797"/>
-                  </a:lnTo>
-                  <a:lnTo>
-                    <a:pt x="1028641" y="1332601"/>
-                  </a:lnTo>
-                  <a:lnTo>
-                    <a:pt x="1062930" y="1313393"/>
-                  </a:lnTo>
-                  <a:lnTo>
-                    <a:pt x="1097218" y="1293098"/>
-                  </a:lnTo>
-                  <a:lnTo>
-                    <a:pt x="1131506" y="1271637"/>
-                  </a:lnTo>
-                  <a:lnTo>
-                    <a:pt x="1165794" y="1248931"/>
-                  </a:lnTo>
-                  <a:lnTo>
-                    <a:pt x="1200082" y="1224897"/>
-                  </a:lnTo>
-                  <a:lnTo>
-                    <a:pt x="1234370" y="1199451"/>
-                  </a:lnTo>
-                  <a:lnTo>
-                    <a:pt x="1268658" y="1172510"/>
-                  </a:lnTo>
-                  <a:lnTo>
-                    <a:pt x="1302946" y="1143985"/>
-                  </a:lnTo>
-                  <a:lnTo>
-                    <a:pt x="1337234" y="1113791"/>
-                  </a:lnTo>
-                  <a:lnTo>
-                    <a:pt x="1371522" y="1081838"/>
-                  </a:lnTo>
-                  <a:lnTo>
-                    <a:pt x="1405810" y="1048037"/>
-                  </a:lnTo>
-                  <a:lnTo>
-                    <a:pt x="1440098" y="1012296"/>
-                  </a:lnTo>
-                  <a:lnTo>
-                    <a:pt x="1474386" y="974521"/>
-                  </a:lnTo>
-                  <a:lnTo>
-                    <a:pt x="1508674" y="934614"/>
-                  </a:lnTo>
-                  <a:lnTo>
-                    <a:pt x="1542962" y="892477"/>
-                  </a:lnTo>
-                  <a:lnTo>
-                    <a:pt x="1577251" y="848005"/>
-                  </a:lnTo>
-                  <a:lnTo>
-                    <a:pt x="1611539" y="801089"/>
-                  </a:lnTo>
-                  <a:lnTo>
-                    <a:pt x="1645827" y="751616"/>
-                  </a:lnTo>
-                  <a:lnTo>
-                    <a:pt x="1680115" y="699467"/>
-                  </a:lnTo>
-                  <a:lnTo>
-                    <a:pt x="1714403" y="644519"/>
-                  </a:lnTo>
-                  <a:lnTo>
-                    <a:pt x="1748691" y="586640"/>
-                  </a:lnTo>
-                  <a:lnTo>
-                    <a:pt x="1782979" y="525693"/>
-                  </a:lnTo>
-                  <a:lnTo>
-                    <a:pt x="1817267" y="461533"/>
-                  </a:lnTo>
-                  <a:lnTo>
-                    <a:pt x="1851555" y="394008"/>
-                  </a:lnTo>
-                  <a:lnTo>
-                    <a:pt x="1885843" y="322958"/>
-                  </a:lnTo>
-                  <a:lnTo>
-                    <a:pt x="1920131" y="248214"/>
-                  </a:lnTo>
-                  <a:lnTo>
-                    <a:pt x="1954419" y="169599"/>
-                  </a:lnTo>
-                  <a:lnTo>
-                    <a:pt x="1988707" y="86926"/>
+                    <a:pt x="34288" y="1669002"/>
+                  </a:lnTo>
+                  <a:lnTo>
+                    <a:pt x="68576" y="1662761"/>
+                  </a:lnTo>
+                  <a:lnTo>
+                    <a:pt x="102864" y="1656336"/>
+                  </a:lnTo>
+                  <a:lnTo>
+                    <a:pt x="137152" y="1649722"/>
+                  </a:lnTo>
+                  <a:lnTo>
+                    <a:pt x="171440" y="1642909"/>
+                  </a:lnTo>
+                  <a:lnTo>
+                    <a:pt x="205728" y="1635888"/>
+                  </a:lnTo>
+                  <a:lnTo>
+                    <a:pt x="240016" y="1628651"/>
+                  </a:lnTo>
+                  <a:lnTo>
+                    <a:pt x="274304" y="1621187"/>
+                  </a:lnTo>
+                  <a:lnTo>
+                    <a:pt x="308592" y="1613485"/>
+                  </a:lnTo>
+                  <a:lnTo>
+                    <a:pt x="342880" y="1605533"/>
+                  </a:lnTo>
+                  <a:lnTo>
+                    <a:pt x="377168" y="1597318"/>
+                  </a:lnTo>
+                  <a:lnTo>
+                    <a:pt x="411456" y="1588826"/>
+                  </a:lnTo>
+                  <a:lnTo>
+                    <a:pt x="445744" y="1580041"/>
+                  </a:lnTo>
+                  <a:lnTo>
+                    <a:pt x="480032" y="1570947"/>
+                  </a:lnTo>
+                  <a:lnTo>
+                    <a:pt x="514320" y="1561526"/>
+                  </a:lnTo>
+                  <a:lnTo>
+                    <a:pt x="548609" y="1551756"/>
+                  </a:lnTo>
+                  <a:lnTo>
+                    <a:pt x="582897" y="1541615"/>
+                  </a:lnTo>
+                  <a:lnTo>
+                    <a:pt x="617185" y="1531079"/>
+                  </a:lnTo>
+                  <a:lnTo>
+                    <a:pt x="651473" y="1520121"/>
+                  </a:lnTo>
+                  <a:lnTo>
+                    <a:pt x="685761" y="1508710"/>
+                  </a:lnTo>
+                  <a:lnTo>
+                    <a:pt x="720049" y="1496815"/>
+                  </a:lnTo>
+                  <a:lnTo>
+                    <a:pt x="754337" y="1484398"/>
+                  </a:lnTo>
+                  <a:lnTo>
+                    <a:pt x="788625" y="1471421"/>
+                  </a:lnTo>
+                  <a:lnTo>
+                    <a:pt x="822913" y="1457839"/>
+                  </a:lnTo>
+                  <a:lnTo>
+                    <a:pt x="857201" y="1443605"/>
+                  </a:lnTo>
+                  <a:lnTo>
+                    <a:pt x="891489" y="1428667"/>
+                  </a:lnTo>
+                  <a:lnTo>
+                    <a:pt x="925777" y="1412969"/>
+                  </a:lnTo>
+                  <a:lnTo>
+                    <a:pt x="960065" y="1396451"/>
+                  </a:lnTo>
+                  <a:lnTo>
+                    <a:pt x="994353" y="1379047"/>
+                  </a:lnTo>
+                  <a:lnTo>
+                    <a:pt x="1028641" y="1360690"/>
+                  </a:lnTo>
+                  <a:lnTo>
+                    <a:pt x="1062930" y="1341306"/>
+                  </a:lnTo>
+                  <a:lnTo>
+                    <a:pt x="1097218" y="1320818"/>
+                  </a:lnTo>
+                  <a:lnTo>
+                    <a:pt x="1131506" y="1299147"/>
+                  </a:lnTo>
+                  <a:lnTo>
+                    <a:pt x="1165794" y="1276211"/>
+                  </a:lnTo>
+                  <a:lnTo>
+                    <a:pt x="1200082" y="1251924"/>
+                  </a:lnTo>
+                  <a:lnTo>
+                    <a:pt x="1234370" y="1226201"/>
+                  </a:lnTo>
+                  <a:lnTo>
+                    <a:pt x="1268658" y="1198953"/>
+                  </a:lnTo>
+                  <a:lnTo>
+                    <a:pt x="1302946" y="1170089"/>
+                  </a:lnTo>
+                  <a:lnTo>
+                    <a:pt x="1337234" y="1139519"/>
+                  </a:lnTo>
+                  <a:lnTo>
+                    <a:pt x="1371522" y="1107149"/>
+                  </a:lnTo>
+                  <a:lnTo>
+                    <a:pt x="1405810" y="1072884"/>
+                  </a:lnTo>
+                  <a:lnTo>
+                    <a:pt x="1440098" y="1036626"/>
+                  </a:lnTo>
+                  <a:lnTo>
+                    <a:pt x="1474386" y="998277"/>
+                  </a:lnTo>
+                  <a:lnTo>
+                    <a:pt x="1508674" y="957732"/>
+                  </a:lnTo>
+                  <a:lnTo>
+                    <a:pt x="1542962" y="914884"/>
+                  </a:lnTo>
+                  <a:lnTo>
+                    <a:pt x="1577251" y="869623"/>
+                  </a:lnTo>
+                  <a:lnTo>
+                    <a:pt x="1611539" y="821832"/>
+                  </a:lnTo>
+                  <a:lnTo>
+                    <a:pt x="1645827" y="771389"/>
+                  </a:lnTo>
+                  <a:lnTo>
+                    <a:pt x="1680115" y="718169"/>
+                  </a:lnTo>
+                  <a:lnTo>
+                    <a:pt x="1714403" y="662036"/>
+                  </a:lnTo>
+                  <a:lnTo>
+                    <a:pt x="1748691" y="602851"/>
+                  </a:lnTo>
+                  <a:lnTo>
+                    <a:pt x="1782979" y="540466"/>
+                  </a:lnTo>
+                  <a:lnTo>
+                    <a:pt x="1817267" y="474725"/>
+                  </a:lnTo>
+                  <a:lnTo>
+                    <a:pt x="1851555" y="405465"/>
+                  </a:lnTo>
+                  <a:lnTo>
+                    <a:pt x="1885843" y="332512"/>
+                  </a:lnTo>
+                  <a:lnTo>
+                    <a:pt x="1920131" y="255686"/>
+                  </a:lnTo>
+                  <a:lnTo>
+                    <a:pt x="1954419" y="174794"/>
+                  </a:lnTo>
+                  <a:lnTo>
+                    <a:pt x="1988707" y="89636"/>
                   </a:lnTo>
                   <a:lnTo>
                     <a:pt x="2022995" y="0"/>
@@ -7259,192 +7259,192 @@
           </p:nvSpPr>
           <p:spPr>
             <a:xfrm>
-              <a:off x="802365" y="4949172"/>
-              <a:ext cx="2022995" cy="730223"/>
+              <a:off x="802365" y="4937091"/>
+              <a:ext cx="2022995" cy="742304"/>
             </a:xfrm>
             <a:custGeom>
               <a:avLst/>
               <a:pathLst>
-                <a:path w="2022995" h="730223">
+                <a:path w="2022995" h="742304">
                   <a:moveTo>
                     <a:pt x="2022995" y="0"/>
                   </a:moveTo>
                   <a:lnTo>
-                    <a:pt x="1988707" y="20200"/>
-                  </a:lnTo>
-                  <a:lnTo>
-                    <a:pt x="1954419" y="40032"/>
-                  </a:lnTo>
-                  <a:lnTo>
-                    <a:pt x="1920131" y="59508"/>
-                  </a:lnTo>
-                  <a:lnTo>
-                    <a:pt x="1885843" y="78643"/>
-                  </a:lnTo>
-                  <a:lnTo>
-                    <a:pt x="1851555" y="97448"/>
-                  </a:lnTo>
-                  <a:lnTo>
-                    <a:pt x="1817267" y="115938"/>
-                  </a:lnTo>
-                  <a:lnTo>
-                    <a:pt x="1782979" y="134125"/>
-                  </a:lnTo>
-                  <a:lnTo>
-                    <a:pt x="1748691" y="152022"/>
-                  </a:lnTo>
-                  <a:lnTo>
-                    <a:pt x="1714403" y="169643"/>
-                  </a:lnTo>
-                  <a:lnTo>
-                    <a:pt x="1680115" y="187001"/>
-                  </a:lnTo>
-                  <a:lnTo>
-                    <a:pt x="1645827" y="204108"/>
-                  </a:lnTo>
-                  <a:lnTo>
-                    <a:pt x="1611539" y="220977"/>
-                  </a:lnTo>
-                  <a:lnTo>
-                    <a:pt x="1577251" y="237620"/>
-                  </a:lnTo>
-                  <a:lnTo>
-                    <a:pt x="1542962" y="254047"/>
-                  </a:lnTo>
-                  <a:lnTo>
-                    <a:pt x="1508674" y="270270"/>
-                  </a:lnTo>
-                  <a:lnTo>
-                    <a:pt x="1474386" y="286298"/>
-                  </a:lnTo>
-                  <a:lnTo>
-                    <a:pt x="1440098" y="302139"/>
-                  </a:lnTo>
-                  <a:lnTo>
-                    <a:pt x="1405810" y="317798"/>
-                  </a:lnTo>
-                  <a:lnTo>
-                    <a:pt x="1371522" y="333281"/>
-                  </a:lnTo>
-                  <a:lnTo>
-                    <a:pt x="1337234" y="348589"/>
-                  </a:lnTo>
-                  <a:lnTo>
-                    <a:pt x="1302946" y="363722"/>
-                  </a:lnTo>
-                  <a:lnTo>
-                    <a:pt x="1268658" y="378677"/>
-                  </a:lnTo>
-                  <a:lnTo>
-                    <a:pt x="1234370" y="393448"/>
-                  </a:lnTo>
-                  <a:lnTo>
-                    <a:pt x="1200082" y="408026"/>
-                  </a:lnTo>
-                  <a:lnTo>
-                    <a:pt x="1165794" y="422402"/>
-                  </a:lnTo>
-                  <a:lnTo>
-                    <a:pt x="1131506" y="436561"/>
-                  </a:lnTo>
-                  <a:lnTo>
-                    <a:pt x="1097218" y="450490"/>
-                  </a:lnTo>
-                  <a:lnTo>
-                    <a:pt x="1062930" y="464171"/>
-                  </a:lnTo>
-                  <a:lnTo>
-                    <a:pt x="1028641" y="477590"/>
-                  </a:lnTo>
-                  <a:lnTo>
-                    <a:pt x="994353" y="490730"/>
-                  </a:lnTo>
-                  <a:lnTo>
-                    <a:pt x="960065" y="503574"/>
-                  </a:lnTo>
-                  <a:lnTo>
-                    <a:pt x="925777" y="516109"/>
-                  </a:lnTo>
-                  <a:lnTo>
-                    <a:pt x="891489" y="528321"/>
-                  </a:lnTo>
-                  <a:lnTo>
-                    <a:pt x="857201" y="540200"/>
-                  </a:lnTo>
-                  <a:lnTo>
-                    <a:pt x="822913" y="551735"/>
-                  </a:lnTo>
-                  <a:lnTo>
-                    <a:pt x="788625" y="562921"/>
-                  </a:lnTo>
-                  <a:lnTo>
-                    <a:pt x="754337" y="573752"/>
-                  </a:lnTo>
-                  <a:lnTo>
-                    <a:pt x="720049" y="584225"/>
-                  </a:lnTo>
-                  <a:lnTo>
-                    <a:pt x="685761" y="594339"/>
-                  </a:lnTo>
-                  <a:lnTo>
-                    <a:pt x="651473" y="604097"/>
-                  </a:lnTo>
-                  <a:lnTo>
-                    <a:pt x="617185" y="613499"/>
-                  </a:lnTo>
-                  <a:lnTo>
-                    <a:pt x="582897" y="622550"/>
-                  </a:lnTo>
-                  <a:lnTo>
-                    <a:pt x="548609" y="631256"/>
-                  </a:lnTo>
-                  <a:lnTo>
-                    <a:pt x="514320" y="639622"/>
-                  </a:lnTo>
-                  <a:lnTo>
-                    <a:pt x="480032" y="647656"/>
-                  </a:lnTo>
-                  <a:lnTo>
-                    <a:pt x="445744" y="655365"/>
-                  </a:lnTo>
-                  <a:lnTo>
-                    <a:pt x="411456" y="662759"/>
-                  </a:lnTo>
-                  <a:lnTo>
-                    <a:pt x="377168" y="669845"/>
-                  </a:lnTo>
-                  <a:lnTo>
-                    <a:pt x="342880" y="676634"/>
-                  </a:lnTo>
-                  <a:lnTo>
-                    <a:pt x="308592" y="683134"/>
-                  </a:lnTo>
-                  <a:lnTo>
-                    <a:pt x="274304" y="689355"/>
-                  </a:lnTo>
-                  <a:lnTo>
-                    <a:pt x="240016" y="695307"/>
-                  </a:lnTo>
-                  <a:lnTo>
-                    <a:pt x="205728" y="701000"/>
-                  </a:lnTo>
-                  <a:lnTo>
-                    <a:pt x="171440" y="706442"/>
-                  </a:lnTo>
-                  <a:lnTo>
-                    <a:pt x="137152" y="711643"/>
-                  </a:lnTo>
-                  <a:lnTo>
-                    <a:pt x="102864" y="716613"/>
-                  </a:lnTo>
-                  <a:lnTo>
-                    <a:pt x="68576" y="721360"/>
-                  </a:lnTo>
-                  <a:lnTo>
-                    <a:pt x="34288" y="725894"/>
-                  </a:lnTo>
-                  <a:lnTo>
-                    <a:pt x="0" y="730223"/>
+                    <a:pt x="1988707" y="21356"/>
+                  </a:lnTo>
+                  <a:lnTo>
+                    <a:pt x="1954419" y="42291"/>
+                  </a:lnTo>
+                  <a:lnTo>
+                    <a:pt x="1920131" y="62820"/>
+                  </a:lnTo>
+                  <a:lnTo>
+                    <a:pt x="1885843" y="82958"/>
+                  </a:lnTo>
+                  <a:lnTo>
+                    <a:pt x="1851555" y="102718"/>
+                  </a:lnTo>
+                  <a:lnTo>
+                    <a:pt x="1817267" y="122116"/>
+                  </a:lnTo>
+                  <a:lnTo>
+                    <a:pt x="1782979" y="141166"/>
+                  </a:lnTo>
+                  <a:lnTo>
+                    <a:pt x="1748691" y="159881"/>
+                  </a:lnTo>
+                  <a:lnTo>
+                    <a:pt x="1714403" y="178277"/>
+                  </a:lnTo>
+                  <a:lnTo>
+                    <a:pt x="1680115" y="196367"/>
+                  </a:lnTo>
+                  <a:lnTo>
+                    <a:pt x="1645827" y="214164"/>
+                  </a:lnTo>
+                  <a:lnTo>
+                    <a:pt x="1611539" y="231683"/>
+                  </a:lnTo>
+                  <a:lnTo>
+                    <a:pt x="1577251" y="248935"/>
+                  </a:lnTo>
+                  <a:lnTo>
+                    <a:pt x="1542962" y="265933"/>
+                  </a:lnTo>
+                  <a:lnTo>
+                    <a:pt x="1508674" y="282687"/>
+                  </a:lnTo>
+                  <a:lnTo>
+                    <a:pt x="1474386" y="299207"/>
+                  </a:lnTo>
+                  <a:lnTo>
+                    <a:pt x="1440098" y="315502"/>
+                  </a:lnTo>
+                  <a:lnTo>
+                    <a:pt x="1405810" y="331579"/>
+                  </a:lnTo>
+                  <a:lnTo>
+                    <a:pt x="1371522" y="347442"/>
+                  </a:lnTo>
+                  <a:lnTo>
+                    <a:pt x="1337234" y="363093"/>
+                  </a:lnTo>
+                  <a:lnTo>
+                    <a:pt x="1302946" y="378533"/>
+                  </a:lnTo>
+                  <a:lnTo>
+                    <a:pt x="1268658" y="393760"/>
+                  </a:lnTo>
+                  <a:lnTo>
+                    <a:pt x="1234370" y="408768"/>
+                  </a:lnTo>
+                  <a:lnTo>
+                    <a:pt x="1200082" y="423549"/>
+                  </a:lnTo>
+                  <a:lnTo>
+                    <a:pt x="1165794" y="438094"/>
+                  </a:lnTo>
+                  <a:lnTo>
+                    <a:pt x="1131506" y="452391"/>
+                  </a:lnTo>
+                  <a:lnTo>
+                    <a:pt x="1097218" y="466427"/>
+                  </a:lnTo>
+                  <a:lnTo>
+                    <a:pt x="1062930" y="480187"/>
+                  </a:lnTo>
+                  <a:lnTo>
+                    <a:pt x="1028641" y="493656"/>
+                  </a:lnTo>
+                  <a:lnTo>
+                    <a:pt x="994353" y="506819"/>
+                  </a:lnTo>
+                  <a:lnTo>
+                    <a:pt x="960065" y="519664"/>
+                  </a:lnTo>
+                  <a:lnTo>
+                    <a:pt x="925777" y="532177"/>
+                  </a:lnTo>
+                  <a:lnTo>
+                    <a:pt x="891489" y="544346"/>
+                  </a:lnTo>
+                  <a:lnTo>
+                    <a:pt x="857201" y="556163"/>
+                  </a:lnTo>
+                  <a:lnTo>
+                    <a:pt x="822913" y="567620"/>
+                  </a:lnTo>
+                  <a:lnTo>
+                    <a:pt x="788625" y="578712"/>
+                  </a:lnTo>
+                  <a:lnTo>
+                    <a:pt x="754337" y="589435"/>
+                  </a:lnTo>
+                  <a:lnTo>
+                    <a:pt x="720049" y="599789"/>
+                  </a:lnTo>
+                  <a:lnTo>
+                    <a:pt x="685761" y="609774"/>
+                  </a:lnTo>
+                  <a:lnTo>
+                    <a:pt x="651473" y="619392"/>
+                  </a:lnTo>
+                  <a:lnTo>
+                    <a:pt x="617185" y="628647"/>
+                  </a:lnTo>
+                  <a:lnTo>
+                    <a:pt x="582897" y="637544"/>
+                  </a:lnTo>
+                  <a:lnTo>
+                    <a:pt x="548609" y="646090"/>
+                  </a:lnTo>
+                  <a:lnTo>
+                    <a:pt x="514320" y="654291"/>
+                  </a:lnTo>
+                  <a:lnTo>
+                    <a:pt x="480032" y="662157"/>
+                  </a:lnTo>
+                  <a:lnTo>
+                    <a:pt x="445744" y="669695"/>
+                  </a:lnTo>
+                  <a:lnTo>
+                    <a:pt x="411456" y="676914"/>
+                  </a:lnTo>
+                  <a:lnTo>
+                    <a:pt x="377168" y="683825"/>
+                  </a:lnTo>
+                  <a:lnTo>
+                    <a:pt x="342880" y="690438"/>
+                  </a:lnTo>
+                  <a:lnTo>
+                    <a:pt x="308592" y="696761"/>
+                  </a:lnTo>
+                  <a:lnTo>
+                    <a:pt x="274304" y="702805"/>
+                  </a:lnTo>
+                  <a:lnTo>
+                    <a:pt x="240016" y="708581"/>
+                  </a:lnTo>
+                  <a:lnTo>
+                    <a:pt x="205728" y="714098"/>
+                  </a:lnTo>
+                  <a:lnTo>
+                    <a:pt x="171440" y="719366"/>
+                  </a:lnTo>
+                  <a:lnTo>
+                    <a:pt x="137152" y="724394"/>
+                  </a:lnTo>
+                  <a:lnTo>
+                    <a:pt x="102864" y="729193"/>
+                  </a:lnTo>
+                  <a:lnTo>
+                    <a:pt x="68576" y="733772"/>
+                  </a:lnTo>
+                  <a:lnTo>
+                    <a:pt x="34288" y="738139"/>
+                  </a:lnTo>
+                  <a:lnTo>
+                    <a:pt x="0" y="742304"/>
                   </a:lnTo>
                 </a:path>
               </a:pathLst>
@@ -7464,372 +7464,372 @@
           </p:nvSpPr>
           <p:spPr>
             <a:xfrm>
-              <a:off x="802365" y="4083969"/>
-              <a:ext cx="2022995" cy="1424576"/>
+              <a:off x="802365" y="4076699"/>
+              <a:ext cx="2022995" cy="1430784"/>
             </a:xfrm>
             <a:custGeom>
               <a:avLst/>
               <a:pathLst>
-                <a:path w="2022995" h="1424576">
+                <a:path w="2022995" h="1430784">
                   <a:moveTo>
-                    <a:pt x="0" y="1193261"/>
+                    <a:pt x="0" y="1201674"/>
                   </a:moveTo>
                   <a:lnTo>
-                    <a:pt x="34288" y="1185693"/>
-                  </a:lnTo>
-                  <a:lnTo>
-                    <a:pt x="68576" y="1177972"/>
-                  </a:lnTo>
-                  <a:lnTo>
-                    <a:pt x="102864" y="1170093"/>
-                  </a:lnTo>
-                  <a:lnTo>
-                    <a:pt x="137152" y="1162050"/>
-                  </a:lnTo>
-                  <a:lnTo>
-                    <a:pt x="171440" y="1153836"/>
-                  </a:lnTo>
-                  <a:lnTo>
-                    <a:pt x="205728" y="1145445"/>
-                  </a:lnTo>
-                  <a:lnTo>
-                    <a:pt x="240016" y="1136869"/>
-                  </a:lnTo>
-                  <a:lnTo>
-                    <a:pt x="274304" y="1128099"/>
-                  </a:lnTo>
-                  <a:lnTo>
-                    <a:pt x="308592" y="1119128"/>
-                  </a:lnTo>
-                  <a:lnTo>
-                    <a:pt x="342880" y="1109945"/>
-                  </a:lnTo>
-                  <a:lnTo>
-                    <a:pt x="377168" y="1100542"/>
-                  </a:lnTo>
-                  <a:lnTo>
-                    <a:pt x="411456" y="1090907"/>
-                  </a:lnTo>
-                  <a:lnTo>
-                    <a:pt x="445744" y="1081029"/>
-                  </a:lnTo>
-                  <a:lnTo>
-                    <a:pt x="480032" y="1070896"/>
-                  </a:lnTo>
-                  <a:lnTo>
-                    <a:pt x="514320" y="1060494"/>
-                  </a:lnTo>
-                  <a:lnTo>
-                    <a:pt x="548609" y="1049809"/>
-                  </a:lnTo>
-                  <a:lnTo>
-                    <a:pt x="582897" y="1038827"/>
-                  </a:lnTo>
-                  <a:lnTo>
-                    <a:pt x="617185" y="1027531"/>
-                  </a:lnTo>
-                  <a:lnTo>
-                    <a:pt x="651473" y="1015903"/>
-                  </a:lnTo>
-                  <a:lnTo>
-                    <a:pt x="685761" y="1003926"/>
-                  </a:lnTo>
-                  <a:lnTo>
-                    <a:pt x="720049" y="991581"/>
-                  </a:lnTo>
-                  <a:lnTo>
-                    <a:pt x="754337" y="978845"/>
-                  </a:lnTo>
-                  <a:lnTo>
-                    <a:pt x="788625" y="965699"/>
-                  </a:lnTo>
-                  <a:lnTo>
-                    <a:pt x="822913" y="952119"/>
-                  </a:lnTo>
-                  <a:lnTo>
-                    <a:pt x="857201" y="938081"/>
-                  </a:lnTo>
-                  <a:lnTo>
-                    <a:pt x="891489" y="923561"/>
-                  </a:lnTo>
-                  <a:lnTo>
-                    <a:pt x="925777" y="908534"/>
-                  </a:lnTo>
-                  <a:lnTo>
-                    <a:pt x="960065" y="892972"/>
-                  </a:lnTo>
-                  <a:lnTo>
-                    <a:pt x="994353" y="876850"/>
-                  </a:lnTo>
-                  <a:lnTo>
-                    <a:pt x="1028641" y="860139"/>
-                  </a:lnTo>
-                  <a:lnTo>
-                    <a:pt x="1062930" y="842813"/>
-                  </a:lnTo>
-                  <a:lnTo>
-                    <a:pt x="1097218" y="824844"/>
-                  </a:lnTo>
-                  <a:lnTo>
-                    <a:pt x="1131506" y="806204"/>
-                  </a:lnTo>
-                  <a:lnTo>
-                    <a:pt x="1165794" y="786865"/>
-                  </a:lnTo>
-                  <a:lnTo>
-                    <a:pt x="1200082" y="766800"/>
-                  </a:lnTo>
-                  <a:lnTo>
-                    <a:pt x="1234370" y="745982"/>
-                  </a:lnTo>
-                  <a:lnTo>
-                    <a:pt x="1268658" y="724385"/>
-                  </a:lnTo>
-                  <a:lnTo>
-                    <a:pt x="1302946" y="701982"/>
-                  </a:lnTo>
-                  <a:lnTo>
-                    <a:pt x="1337234" y="678747"/>
-                  </a:lnTo>
-                  <a:lnTo>
-                    <a:pt x="1371522" y="654655"/>
-                  </a:lnTo>
-                  <a:lnTo>
-                    <a:pt x="1405810" y="629681"/>
-                  </a:lnTo>
-                  <a:lnTo>
-                    <a:pt x="1440098" y="603801"/>
-                  </a:lnTo>
-                  <a:lnTo>
-                    <a:pt x="1474386" y="576988"/>
-                  </a:lnTo>
-                  <a:lnTo>
-                    <a:pt x="1508674" y="549219"/>
-                  </a:lnTo>
-                  <a:lnTo>
-                    <a:pt x="1542962" y="520469"/>
-                  </a:lnTo>
-                  <a:lnTo>
-                    <a:pt x="1577251" y="490713"/>
-                  </a:lnTo>
-                  <a:lnTo>
-                    <a:pt x="1611539" y="459926"/>
-                  </a:lnTo>
-                  <a:lnTo>
-                    <a:pt x="1645827" y="428082"/>
-                  </a:lnTo>
-                  <a:lnTo>
-                    <a:pt x="1680115" y="395154"/>
-                  </a:lnTo>
-                  <a:lnTo>
-                    <a:pt x="1714403" y="361117"/>
-                  </a:lnTo>
-                  <a:lnTo>
-                    <a:pt x="1748691" y="325942"/>
-                  </a:lnTo>
-                  <a:lnTo>
-                    <a:pt x="1782979" y="289601"/>
-                  </a:lnTo>
-                  <a:lnTo>
-                    <a:pt x="1817267" y="252065"/>
-                  </a:lnTo>
-                  <a:lnTo>
-                    <a:pt x="1851555" y="213305"/>
-                  </a:lnTo>
-                  <a:lnTo>
-                    <a:pt x="1885843" y="173288"/>
-                  </a:lnTo>
-                  <a:lnTo>
-                    <a:pt x="1920131" y="131982"/>
-                  </a:lnTo>
-                  <a:lnTo>
-                    <a:pt x="1954419" y="89356"/>
-                  </a:lnTo>
-                  <a:lnTo>
-                    <a:pt x="1988707" y="45373"/>
+                    <a:pt x="34288" y="1194090"/>
+                  </a:lnTo>
+                  <a:lnTo>
+                    <a:pt x="68576" y="1186351"/>
+                  </a:lnTo>
+                  <a:lnTo>
+                    <a:pt x="102864" y="1178453"/>
+                  </a:lnTo>
+                  <a:lnTo>
+                    <a:pt x="137152" y="1170388"/>
+                  </a:lnTo>
+                  <a:lnTo>
+                    <a:pt x="171440" y="1162151"/>
+                  </a:lnTo>
+                  <a:lnTo>
+                    <a:pt x="205728" y="1153735"/>
+                  </a:lnTo>
+                  <a:lnTo>
+                    <a:pt x="240016" y="1145131"/>
+                  </a:lnTo>
+                  <a:lnTo>
+                    <a:pt x="274304" y="1136333"/>
+                  </a:lnTo>
+                  <a:lnTo>
+                    <a:pt x="308592" y="1127330"/>
+                  </a:lnTo>
+                  <a:lnTo>
+                    <a:pt x="342880" y="1118115"/>
+                  </a:lnTo>
+                  <a:lnTo>
+                    <a:pt x="377168" y="1108676"/>
+                  </a:lnTo>
+                  <a:lnTo>
+                    <a:pt x="411456" y="1099004"/>
+                  </a:lnTo>
+                  <a:lnTo>
+                    <a:pt x="445744" y="1089087"/>
+                  </a:lnTo>
+                  <a:lnTo>
+                    <a:pt x="480032" y="1078912"/>
+                  </a:lnTo>
+                  <a:lnTo>
+                    <a:pt x="514320" y="1068466"/>
+                  </a:lnTo>
+                  <a:lnTo>
+                    <a:pt x="548609" y="1057735"/>
+                  </a:lnTo>
+                  <a:lnTo>
+                    <a:pt x="582897" y="1046704"/>
+                  </a:lnTo>
+                  <a:lnTo>
+                    <a:pt x="617185" y="1035356"/>
+                  </a:lnTo>
+                  <a:lnTo>
+                    <a:pt x="651473" y="1023675"/>
+                  </a:lnTo>
+                  <a:lnTo>
+                    <a:pt x="685761" y="1011642"/>
+                  </a:lnTo>
+                  <a:lnTo>
+                    <a:pt x="720049" y="999238"/>
+                  </a:lnTo>
+                  <a:lnTo>
+                    <a:pt x="754337" y="986441"/>
+                  </a:lnTo>
+                  <a:lnTo>
+                    <a:pt x="788625" y="973230"/>
+                  </a:lnTo>
+                  <a:lnTo>
+                    <a:pt x="822913" y="959582"/>
+                  </a:lnTo>
+                  <a:lnTo>
+                    <a:pt x="857201" y="945474"/>
+                  </a:lnTo>
+                  <a:lnTo>
+                    <a:pt x="891489" y="930880"/>
+                  </a:lnTo>
+                  <a:lnTo>
+                    <a:pt x="925777" y="915775"/>
+                  </a:lnTo>
+                  <a:lnTo>
+                    <a:pt x="960065" y="900132"/>
+                  </a:lnTo>
+                  <a:lnTo>
+                    <a:pt x="994353" y="883925"/>
+                  </a:lnTo>
+                  <a:lnTo>
+                    <a:pt x="1028641" y="867125"/>
+                  </a:lnTo>
+                  <a:lnTo>
+                    <a:pt x="1062930" y="849705"/>
+                  </a:lnTo>
+                  <a:lnTo>
+                    <a:pt x="1097218" y="831637"/>
+                  </a:lnTo>
+                  <a:lnTo>
+                    <a:pt x="1131506" y="812893"/>
+                  </a:lnTo>
+                  <a:lnTo>
+                    <a:pt x="1165794" y="793444"/>
+                  </a:lnTo>
+                  <a:lnTo>
+                    <a:pt x="1200082" y="773264"/>
+                  </a:lnTo>
+                  <a:lnTo>
+                    <a:pt x="1234370" y="752323"/>
+                  </a:lnTo>
+                  <a:lnTo>
+                    <a:pt x="1268658" y="730596"/>
+                  </a:lnTo>
+                  <a:lnTo>
+                    <a:pt x="1302946" y="708055"/>
+                  </a:lnTo>
+                  <a:lnTo>
+                    <a:pt x="1337234" y="684673"/>
+                  </a:lnTo>
+                  <a:lnTo>
+                    <a:pt x="1371522" y="660426"/>
+                  </a:lnTo>
+                  <a:lnTo>
+                    <a:pt x="1405810" y="635287"/>
+                  </a:lnTo>
+                  <a:lnTo>
+                    <a:pt x="1440098" y="609230"/>
+                  </a:lnTo>
+                  <a:lnTo>
+                    <a:pt x="1474386" y="582230"/>
+                  </a:lnTo>
+                  <a:lnTo>
+                    <a:pt x="1508674" y="554261"/>
+                  </a:lnTo>
+                  <a:lnTo>
+                    <a:pt x="1542962" y="525299"/>
+                  </a:lnTo>
+                  <a:lnTo>
+                    <a:pt x="1577251" y="495316"/>
+                  </a:lnTo>
+                  <a:lnTo>
+                    <a:pt x="1611539" y="464288"/>
+                  </a:lnTo>
+                  <a:lnTo>
+                    <a:pt x="1645827" y="432187"/>
+                  </a:lnTo>
+                  <a:lnTo>
+                    <a:pt x="1680115" y="398987"/>
+                  </a:lnTo>
+                  <a:lnTo>
+                    <a:pt x="1714403" y="364660"/>
+                  </a:lnTo>
+                  <a:lnTo>
+                    <a:pt x="1748691" y="329177"/>
+                  </a:lnTo>
+                  <a:lnTo>
+                    <a:pt x="1782979" y="292509"/>
+                  </a:lnTo>
+                  <a:lnTo>
+                    <a:pt x="1817267" y="254626"/>
+                  </a:lnTo>
+                  <a:lnTo>
+                    <a:pt x="1851555" y="215498"/>
+                  </a:lnTo>
+                  <a:lnTo>
+                    <a:pt x="1885843" y="175091"/>
+                  </a:lnTo>
+                  <a:lnTo>
+                    <a:pt x="1920131" y="133372"/>
+                  </a:lnTo>
+                  <a:lnTo>
+                    <a:pt x="1954419" y="90308"/>
+                  </a:lnTo>
+                  <a:lnTo>
+                    <a:pt x="1988707" y="45863"/>
                   </a:lnTo>
                   <a:lnTo>
                     <a:pt x="2022995" y="0"/>
                   </a:lnTo>
                   <a:lnTo>
-                    <a:pt x="2022995" y="715286"/>
-                  </a:lnTo>
-                  <a:lnTo>
-                    <a:pt x="1988707" y="730558"/>
-                  </a:lnTo>
-                  <a:lnTo>
-                    <a:pt x="1954419" y="745690"/>
-                  </a:lnTo>
-                  <a:lnTo>
-                    <a:pt x="1920131" y="760689"/>
-                  </a:lnTo>
-                  <a:lnTo>
-                    <a:pt x="1885843" y="775559"/>
-                  </a:lnTo>
-                  <a:lnTo>
-                    <a:pt x="1851555" y="790306"/>
-                  </a:lnTo>
-                  <a:lnTo>
-                    <a:pt x="1817267" y="804936"/>
-                  </a:lnTo>
-                  <a:lnTo>
-                    <a:pt x="1782979" y="819454"/>
-                  </a:lnTo>
-                  <a:lnTo>
-                    <a:pt x="1748691" y="833866"/>
-                  </a:lnTo>
-                  <a:lnTo>
-                    <a:pt x="1714403" y="848177"/>
-                  </a:lnTo>
-                  <a:lnTo>
-                    <a:pt x="1680115" y="862393"/>
-                  </a:lnTo>
-                  <a:lnTo>
-                    <a:pt x="1645827" y="876519"/>
-                  </a:lnTo>
-                  <a:lnTo>
-                    <a:pt x="1611539" y="890560"/>
-                  </a:lnTo>
-                  <a:lnTo>
-                    <a:pt x="1577251" y="904521"/>
-                  </a:lnTo>
-                  <a:lnTo>
-                    <a:pt x="1542962" y="918407"/>
-                  </a:lnTo>
-                  <a:lnTo>
-                    <a:pt x="1508674" y="932221"/>
-                  </a:lnTo>
-                  <a:lnTo>
-                    <a:pt x="1474386" y="945967"/>
-                  </a:lnTo>
-                  <a:lnTo>
-                    <a:pt x="1440098" y="959648"/>
-                  </a:lnTo>
-                  <a:lnTo>
-                    <a:pt x="1405810" y="973267"/>
-                  </a:lnTo>
-                  <a:lnTo>
-                    <a:pt x="1371522" y="986825"/>
-                  </a:lnTo>
-                  <a:lnTo>
-                    <a:pt x="1337234" y="1000322"/>
-                  </a:lnTo>
-                  <a:lnTo>
-                    <a:pt x="1302946" y="1013759"/>
-                  </a:lnTo>
-                  <a:lnTo>
-                    <a:pt x="1268658" y="1027134"/>
-                  </a:lnTo>
-                  <a:lnTo>
-                    <a:pt x="1234370" y="1040444"/>
-                  </a:lnTo>
-                  <a:lnTo>
-                    <a:pt x="1200082" y="1053687"/>
-                  </a:lnTo>
-                  <a:lnTo>
-                    <a:pt x="1165794" y="1066858"/>
-                  </a:lnTo>
-                  <a:lnTo>
-                    <a:pt x="1131506" y="1079952"/>
-                  </a:lnTo>
-                  <a:lnTo>
-                    <a:pt x="1097218" y="1092962"/>
-                  </a:lnTo>
-                  <a:lnTo>
-                    <a:pt x="1062930" y="1105881"/>
-                  </a:lnTo>
-                  <a:lnTo>
-                    <a:pt x="1028641" y="1118702"/>
-                  </a:lnTo>
-                  <a:lnTo>
-                    <a:pt x="994353" y="1131415"/>
-                  </a:lnTo>
-                  <a:lnTo>
-                    <a:pt x="960065" y="1144013"/>
-                  </a:lnTo>
-                  <a:lnTo>
-                    <a:pt x="925777" y="1156486"/>
-                  </a:lnTo>
-                  <a:lnTo>
-                    <a:pt x="891489" y="1168826"/>
-                  </a:lnTo>
-                  <a:lnTo>
-                    <a:pt x="857201" y="1181023"/>
-                  </a:lnTo>
-                  <a:lnTo>
-                    <a:pt x="822913" y="1193068"/>
-                  </a:lnTo>
-                  <a:lnTo>
-                    <a:pt x="788625" y="1204954"/>
-                  </a:lnTo>
-                  <a:lnTo>
-                    <a:pt x="754337" y="1216673"/>
-                  </a:lnTo>
-                  <a:lnTo>
-                    <a:pt x="720049" y="1228217"/>
-                  </a:lnTo>
-                  <a:lnTo>
-                    <a:pt x="685761" y="1239580"/>
-                  </a:lnTo>
-                  <a:lnTo>
-                    <a:pt x="651473" y="1250757"/>
-                  </a:lnTo>
-                  <a:lnTo>
-                    <a:pt x="617185" y="1261741"/>
-                  </a:lnTo>
-                  <a:lnTo>
-                    <a:pt x="582897" y="1272528"/>
-                  </a:lnTo>
-                  <a:lnTo>
-                    <a:pt x="548609" y="1283115"/>
-                  </a:lnTo>
-                  <a:lnTo>
-                    <a:pt x="514320" y="1293500"/>
-                  </a:lnTo>
-                  <a:lnTo>
-                    <a:pt x="480032" y="1303678"/>
-                  </a:lnTo>
-                  <a:lnTo>
-                    <a:pt x="445744" y="1313649"/>
-                  </a:lnTo>
-                  <a:lnTo>
-                    <a:pt x="411456" y="1323413"/>
-                  </a:lnTo>
-                  <a:lnTo>
-                    <a:pt x="377168" y="1332967"/>
-                  </a:lnTo>
-                  <a:lnTo>
-                    <a:pt x="342880" y="1342312"/>
-                  </a:lnTo>
-                  <a:lnTo>
-                    <a:pt x="308592" y="1351449"/>
-                  </a:lnTo>
-                  <a:lnTo>
-                    <a:pt x="274304" y="1360379"/>
-                  </a:lnTo>
-                  <a:lnTo>
-                    <a:pt x="240016" y="1369103"/>
-                  </a:lnTo>
-                  <a:lnTo>
-                    <a:pt x="205728" y="1377623"/>
-                  </a:lnTo>
-                  <a:lnTo>
-                    <a:pt x="171440" y="1385940"/>
-                  </a:lnTo>
-                  <a:lnTo>
-                    <a:pt x="137152" y="1394057"/>
-                  </a:lnTo>
-                  <a:lnTo>
-                    <a:pt x="102864" y="1401976"/>
-                  </a:lnTo>
-                  <a:lnTo>
-                    <a:pt x="68576" y="1409701"/>
-                  </a:lnTo>
-                  <a:lnTo>
-                    <a:pt x="34288" y="1417233"/>
-                  </a:lnTo>
-                  <a:lnTo>
-                    <a:pt x="0" y="1424576"/>
+                    <a:pt x="2022995" y="717904"/>
+                  </a:lnTo>
+                  <a:lnTo>
+                    <a:pt x="1988707" y="733403"/>
+                  </a:lnTo>
+                  <a:lnTo>
+                    <a:pt x="1954419" y="748755"/>
+                  </a:lnTo>
+                  <a:lnTo>
+                    <a:pt x="1920131" y="763967"/>
+                  </a:lnTo>
+                  <a:lnTo>
+                    <a:pt x="1885843" y="779044"/>
+                  </a:lnTo>
+                  <a:lnTo>
+                    <a:pt x="1851555" y="793992"/>
+                  </a:lnTo>
+                  <a:lnTo>
+                    <a:pt x="1817267" y="808816"/>
+                  </a:lnTo>
+                  <a:lnTo>
+                    <a:pt x="1782979" y="823522"/>
+                  </a:lnTo>
+                  <a:lnTo>
+                    <a:pt x="1748691" y="838116"/>
+                  </a:lnTo>
+                  <a:lnTo>
+                    <a:pt x="1714403" y="852603"/>
+                  </a:lnTo>
+                  <a:lnTo>
+                    <a:pt x="1680115" y="866988"/>
+                  </a:lnTo>
+                  <a:lnTo>
+                    <a:pt x="1645827" y="881277"/>
+                  </a:lnTo>
+                  <a:lnTo>
+                    <a:pt x="1611539" y="895476"/>
+                  </a:lnTo>
+                  <a:lnTo>
+                    <a:pt x="1577251" y="909588"/>
+                  </a:lnTo>
+                  <a:lnTo>
+                    <a:pt x="1542962" y="923619"/>
+                  </a:lnTo>
+                  <a:lnTo>
+                    <a:pt x="1508674" y="937572"/>
+                  </a:lnTo>
+                  <a:lnTo>
+                    <a:pt x="1474386" y="951451"/>
+                  </a:lnTo>
+                  <a:lnTo>
+                    <a:pt x="1440098" y="965259"/>
+                  </a:lnTo>
+                  <a:lnTo>
+                    <a:pt x="1405810" y="978998"/>
+                  </a:lnTo>
+                  <a:lnTo>
+                    <a:pt x="1371522" y="992670"/>
+                  </a:lnTo>
+                  <a:lnTo>
+                    <a:pt x="1337234" y="1006276"/>
+                  </a:lnTo>
+                  <a:lnTo>
+                    <a:pt x="1302946" y="1019815"/>
+                  </a:lnTo>
+                  <a:lnTo>
+                    <a:pt x="1268658" y="1033285"/>
+                  </a:lnTo>
+                  <a:lnTo>
+                    <a:pt x="1234370" y="1046685"/>
+                  </a:lnTo>
+                  <a:lnTo>
+                    <a:pt x="1200082" y="1060010"/>
+                  </a:lnTo>
+                  <a:lnTo>
+                    <a:pt x="1165794" y="1073258"/>
+                  </a:lnTo>
+                  <a:lnTo>
+                    <a:pt x="1131506" y="1086422"/>
+                  </a:lnTo>
+                  <a:lnTo>
+                    <a:pt x="1097218" y="1099495"/>
+                  </a:lnTo>
+                  <a:lnTo>
+                    <a:pt x="1062930" y="1112472"/>
+                  </a:lnTo>
+                  <a:lnTo>
+                    <a:pt x="1028641" y="1125344"/>
+                  </a:lnTo>
+                  <a:lnTo>
+                    <a:pt x="994353" y="1138103"/>
+                  </a:lnTo>
+                  <a:lnTo>
+                    <a:pt x="960065" y="1150740"/>
+                  </a:lnTo>
+                  <a:lnTo>
+                    <a:pt x="925777" y="1163247"/>
+                  </a:lnTo>
+                  <a:lnTo>
+                    <a:pt x="891489" y="1175614"/>
+                  </a:lnTo>
+                  <a:lnTo>
+                    <a:pt x="857201" y="1187834"/>
+                  </a:lnTo>
+                  <a:lnTo>
+                    <a:pt x="822913" y="1199896"/>
+                  </a:lnTo>
+                  <a:lnTo>
+                    <a:pt x="788625" y="1211795"/>
+                  </a:lnTo>
+                  <a:lnTo>
+                    <a:pt x="754337" y="1223521"/>
+                  </a:lnTo>
+                  <a:lnTo>
+                    <a:pt x="720049" y="1235068"/>
+                  </a:lnTo>
+                  <a:lnTo>
+                    <a:pt x="685761" y="1246429"/>
+                  </a:lnTo>
+                  <a:lnTo>
+                    <a:pt x="651473" y="1257600"/>
+                  </a:lnTo>
+                  <a:lnTo>
+                    <a:pt x="617185" y="1268574"/>
+                  </a:lnTo>
+                  <a:lnTo>
+                    <a:pt x="582897" y="1279348"/>
+                  </a:lnTo>
+                  <a:lnTo>
+                    <a:pt x="548609" y="1289919"/>
+                  </a:lnTo>
+                  <a:lnTo>
+                    <a:pt x="514320" y="1300283"/>
+                  </a:lnTo>
+                  <a:lnTo>
+                    <a:pt x="480032" y="1310438"/>
+                  </a:lnTo>
+                  <a:lnTo>
+                    <a:pt x="445744" y="1320383"/>
+                  </a:lnTo>
+                  <a:lnTo>
+                    <a:pt x="411456" y="1330118"/>
+                  </a:lnTo>
+                  <a:lnTo>
+                    <a:pt x="377168" y="1339641"/>
+                  </a:lnTo>
+                  <a:lnTo>
+                    <a:pt x="342880" y="1348952"/>
+                  </a:lnTo>
+                  <a:lnTo>
+                    <a:pt x="308592" y="1358054"/>
+                  </a:lnTo>
+                  <a:lnTo>
+                    <a:pt x="274304" y="1366946"/>
+                  </a:lnTo>
+                  <a:lnTo>
+                    <a:pt x="240016" y="1375630"/>
+                  </a:lnTo>
+                  <a:lnTo>
+                    <a:pt x="205728" y="1384108"/>
+                  </a:lnTo>
+                  <a:lnTo>
+                    <a:pt x="171440" y="1392382"/>
+                  </a:lnTo>
+                  <a:lnTo>
+                    <a:pt x="137152" y="1400454"/>
+                  </a:lnTo>
+                  <a:lnTo>
+                    <a:pt x="102864" y="1408328"/>
+                  </a:lnTo>
+                  <a:lnTo>
+                    <a:pt x="68576" y="1416006"/>
+                  </a:lnTo>
+                  <a:lnTo>
+                    <a:pt x="34288" y="1423490"/>
+                  </a:lnTo>
+                  <a:lnTo>
+                    <a:pt x="0" y="1430784"/>
                   </a:lnTo>
                   <a:close/>
                 </a:path>
@@ -7855,189 +7855,189 @@
           </p:nvSpPr>
           <p:spPr>
             <a:xfrm>
-              <a:off x="802365" y="4083969"/>
-              <a:ext cx="2022995" cy="1193261"/>
+              <a:off x="802365" y="4076699"/>
+              <a:ext cx="2022995" cy="1201674"/>
             </a:xfrm>
             <a:custGeom>
               <a:avLst/>
               <a:pathLst>
-                <a:path w="2022995" h="1193261">
+                <a:path w="2022995" h="1201674">
                   <a:moveTo>
-                    <a:pt x="0" y="1193261"/>
+                    <a:pt x="0" y="1201674"/>
                   </a:moveTo>
                   <a:lnTo>
-                    <a:pt x="34288" y="1185693"/>
-                  </a:lnTo>
-                  <a:lnTo>
-                    <a:pt x="68576" y="1177972"/>
-                  </a:lnTo>
-                  <a:lnTo>
-                    <a:pt x="102864" y="1170093"/>
-                  </a:lnTo>
-                  <a:lnTo>
-                    <a:pt x="137152" y="1162050"/>
-                  </a:lnTo>
-                  <a:lnTo>
-                    <a:pt x="171440" y="1153836"/>
-                  </a:lnTo>
-                  <a:lnTo>
-                    <a:pt x="205728" y="1145445"/>
-                  </a:lnTo>
-                  <a:lnTo>
-                    <a:pt x="240016" y="1136869"/>
-                  </a:lnTo>
-                  <a:lnTo>
-                    <a:pt x="274304" y="1128099"/>
-                  </a:lnTo>
-                  <a:lnTo>
-                    <a:pt x="308592" y="1119128"/>
-                  </a:lnTo>
-                  <a:lnTo>
-                    <a:pt x="342880" y="1109945"/>
-                  </a:lnTo>
-                  <a:lnTo>
-                    <a:pt x="377168" y="1100542"/>
-                  </a:lnTo>
-                  <a:lnTo>
-                    <a:pt x="411456" y="1090907"/>
-                  </a:lnTo>
-                  <a:lnTo>
-                    <a:pt x="445744" y="1081029"/>
-                  </a:lnTo>
-                  <a:lnTo>
-                    <a:pt x="480032" y="1070896"/>
-                  </a:lnTo>
-                  <a:lnTo>
-                    <a:pt x="514320" y="1060494"/>
-                  </a:lnTo>
-                  <a:lnTo>
-                    <a:pt x="548609" y="1049809"/>
-                  </a:lnTo>
-                  <a:lnTo>
-                    <a:pt x="582897" y="1038827"/>
-                  </a:lnTo>
-                  <a:lnTo>
-                    <a:pt x="617185" y="1027531"/>
-                  </a:lnTo>
-                  <a:lnTo>
-                    <a:pt x="651473" y="1015903"/>
-                  </a:lnTo>
-                  <a:lnTo>
-                    <a:pt x="685761" y="1003926"/>
-                  </a:lnTo>
-                  <a:lnTo>
-                    <a:pt x="720049" y="991581"/>
-                  </a:lnTo>
-                  <a:lnTo>
-                    <a:pt x="754337" y="978845"/>
-                  </a:lnTo>
-                  <a:lnTo>
-                    <a:pt x="788625" y="965699"/>
-                  </a:lnTo>
-                  <a:lnTo>
-                    <a:pt x="822913" y="952119"/>
-                  </a:lnTo>
-                  <a:lnTo>
-                    <a:pt x="857201" y="938081"/>
-                  </a:lnTo>
-                  <a:lnTo>
-                    <a:pt x="891489" y="923561"/>
-                  </a:lnTo>
-                  <a:lnTo>
-                    <a:pt x="925777" y="908534"/>
-                  </a:lnTo>
-                  <a:lnTo>
-                    <a:pt x="960065" y="892972"/>
-                  </a:lnTo>
-                  <a:lnTo>
-                    <a:pt x="994353" y="876850"/>
-                  </a:lnTo>
-                  <a:lnTo>
-                    <a:pt x="1028641" y="860139"/>
-                  </a:lnTo>
-                  <a:lnTo>
-                    <a:pt x="1062930" y="842813"/>
-                  </a:lnTo>
-                  <a:lnTo>
-                    <a:pt x="1097218" y="824844"/>
-                  </a:lnTo>
-                  <a:lnTo>
-                    <a:pt x="1131506" y="806204"/>
-                  </a:lnTo>
-                  <a:lnTo>
-                    <a:pt x="1165794" y="786865"/>
-                  </a:lnTo>
-                  <a:lnTo>
-                    <a:pt x="1200082" y="766800"/>
-                  </a:lnTo>
-                  <a:lnTo>
-                    <a:pt x="1234370" y="745982"/>
-                  </a:lnTo>
-                  <a:lnTo>
-                    <a:pt x="1268658" y="724385"/>
-                  </a:lnTo>
-                  <a:lnTo>
-                    <a:pt x="1302946" y="701982"/>
-                  </a:lnTo>
-                  <a:lnTo>
-                    <a:pt x="1337234" y="678747"/>
-                  </a:lnTo>
-                  <a:lnTo>
-                    <a:pt x="1371522" y="654655"/>
-                  </a:lnTo>
-                  <a:lnTo>
-                    <a:pt x="1405810" y="629681"/>
-                  </a:lnTo>
-                  <a:lnTo>
-                    <a:pt x="1440098" y="603801"/>
-                  </a:lnTo>
-                  <a:lnTo>
-                    <a:pt x="1474386" y="576988"/>
-                  </a:lnTo>
-                  <a:lnTo>
-                    <a:pt x="1508674" y="549219"/>
-                  </a:lnTo>
-                  <a:lnTo>
-                    <a:pt x="1542962" y="520469"/>
-                  </a:lnTo>
-                  <a:lnTo>
-                    <a:pt x="1577251" y="490713"/>
-                  </a:lnTo>
-                  <a:lnTo>
-                    <a:pt x="1611539" y="459926"/>
-                  </a:lnTo>
-                  <a:lnTo>
-                    <a:pt x="1645827" y="428082"/>
-                  </a:lnTo>
-                  <a:lnTo>
-                    <a:pt x="1680115" y="395154"/>
-                  </a:lnTo>
-                  <a:lnTo>
-                    <a:pt x="1714403" y="361117"/>
-                  </a:lnTo>
-                  <a:lnTo>
-                    <a:pt x="1748691" y="325942"/>
-                  </a:lnTo>
-                  <a:lnTo>
-                    <a:pt x="1782979" y="289601"/>
-                  </a:lnTo>
-                  <a:lnTo>
-                    <a:pt x="1817267" y="252065"/>
-                  </a:lnTo>
-                  <a:lnTo>
-                    <a:pt x="1851555" y="213305"/>
-                  </a:lnTo>
-                  <a:lnTo>
-                    <a:pt x="1885843" y="173288"/>
-                  </a:lnTo>
-                  <a:lnTo>
-                    <a:pt x="1920131" y="131982"/>
-                  </a:lnTo>
-                  <a:lnTo>
-                    <a:pt x="1954419" y="89356"/>
-                  </a:lnTo>
-                  <a:lnTo>
-                    <a:pt x="1988707" y="45373"/>
+                    <a:pt x="34288" y="1194090"/>
+                  </a:lnTo>
+                  <a:lnTo>
+                    <a:pt x="68576" y="1186351"/>
+                  </a:lnTo>
+                  <a:lnTo>
+                    <a:pt x="102864" y="1178453"/>
+                  </a:lnTo>
+                  <a:lnTo>
+                    <a:pt x="137152" y="1170388"/>
+                  </a:lnTo>
+                  <a:lnTo>
+                    <a:pt x="171440" y="1162151"/>
+                  </a:lnTo>
+                  <a:lnTo>
+                    <a:pt x="205728" y="1153735"/>
+                  </a:lnTo>
+                  <a:lnTo>
+                    <a:pt x="240016" y="1145131"/>
+                  </a:lnTo>
+                  <a:lnTo>
+                    <a:pt x="274304" y="1136333"/>
+                  </a:lnTo>
+                  <a:lnTo>
+                    <a:pt x="308592" y="1127330"/>
+                  </a:lnTo>
+                  <a:lnTo>
+                    <a:pt x="342880" y="1118115"/>
+                  </a:lnTo>
+                  <a:lnTo>
+                    <a:pt x="377168" y="1108676"/>
+                  </a:lnTo>
+                  <a:lnTo>
+                    <a:pt x="411456" y="1099004"/>
+                  </a:lnTo>
+                  <a:lnTo>
+                    <a:pt x="445744" y="1089087"/>
+                  </a:lnTo>
+                  <a:lnTo>
+                    <a:pt x="480032" y="1078912"/>
+                  </a:lnTo>
+                  <a:lnTo>
+                    <a:pt x="514320" y="1068466"/>
+                  </a:lnTo>
+                  <a:lnTo>
+                    <a:pt x="548609" y="1057735"/>
+                  </a:lnTo>
+                  <a:lnTo>
+                    <a:pt x="582897" y="1046704"/>
+                  </a:lnTo>
+                  <a:lnTo>
+                    <a:pt x="617185" y="1035356"/>
+                  </a:lnTo>
+                  <a:lnTo>
+                    <a:pt x="651473" y="1023675"/>
+                  </a:lnTo>
+                  <a:lnTo>
+                    <a:pt x="685761" y="1011642"/>
+                  </a:lnTo>
+                  <a:lnTo>
+                    <a:pt x="720049" y="999238"/>
+                  </a:lnTo>
+                  <a:lnTo>
+                    <a:pt x="754337" y="986441"/>
+                  </a:lnTo>
+                  <a:lnTo>
+                    <a:pt x="788625" y="973230"/>
+                  </a:lnTo>
+                  <a:lnTo>
+                    <a:pt x="822913" y="959582"/>
+                  </a:lnTo>
+                  <a:lnTo>
+                    <a:pt x="857201" y="945474"/>
+                  </a:lnTo>
+                  <a:lnTo>
+                    <a:pt x="891489" y="930880"/>
+                  </a:lnTo>
+                  <a:lnTo>
+                    <a:pt x="925777" y="915775"/>
+                  </a:lnTo>
+                  <a:lnTo>
+                    <a:pt x="960065" y="900132"/>
+                  </a:lnTo>
+                  <a:lnTo>
+                    <a:pt x="994353" y="883925"/>
+                  </a:lnTo>
+                  <a:lnTo>
+                    <a:pt x="1028641" y="867125"/>
+                  </a:lnTo>
+                  <a:lnTo>
+                    <a:pt x="1062930" y="849705"/>
+                  </a:lnTo>
+                  <a:lnTo>
+                    <a:pt x="1097218" y="831637"/>
+                  </a:lnTo>
+                  <a:lnTo>
+                    <a:pt x="1131506" y="812893"/>
+                  </a:lnTo>
+                  <a:lnTo>
+                    <a:pt x="1165794" y="793444"/>
+                  </a:lnTo>
+                  <a:lnTo>
+                    <a:pt x="1200082" y="773264"/>
+                  </a:lnTo>
+                  <a:lnTo>
+                    <a:pt x="1234370" y="752323"/>
+                  </a:lnTo>
+                  <a:lnTo>
+                    <a:pt x="1268658" y="730596"/>
+                  </a:lnTo>
+                  <a:lnTo>
+                    <a:pt x="1302946" y="708055"/>
+                  </a:lnTo>
+                  <a:lnTo>
+                    <a:pt x="1337234" y="684673"/>
+                  </a:lnTo>
+                  <a:lnTo>
+                    <a:pt x="1371522" y="660426"/>
+                  </a:lnTo>
+                  <a:lnTo>
+                    <a:pt x="1405810" y="635287"/>
+                  </a:lnTo>
+                  <a:lnTo>
+                    <a:pt x="1440098" y="609230"/>
+                  </a:lnTo>
+                  <a:lnTo>
+                    <a:pt x="1474386" y="582230"/>
+                  </a:lnTo>
+                  <a:lnTo>
+                    <a:pt x="1508674" y="554261"/>
+                  </a:lnTo>
+                  <a:lnTo>
+                    <a:pt x="1542962" y="525299"/>
+                  </a:lnTo>
+                  <a:lnTo>
+                    <a:pt x="1577251" y="495316"/>
+                  </a:lnTo>
+                  <a:lnTo>
+                    <a:pt x="1611539" y="464288"/>
+                  </a:lnTo>
+                  <a:lnTo>
+                    <a:pt x="1645827" y="432187"/>
+                  </a:lnTo>
+                  <a:lnTo>
+                    <a:pt x="1680115" y="398987"/>
+                  </a:lnTo>
+                  <a:lnTo>
+                    <a:pt x="1714403" y="364660"/>
+                  </a:lnTo>
+                  <a:lnTo>
+                    <a:pt x="1748691" y="329177"/>
+                  </a:lnTo>
+                  <a:lnTo>
+                    <a:pt x="1782979" y="292509"/>
+                  </a:lnTo>
+                  <a:lnTo>
+                    <a:pt x="1817267" y="254626"/>
+                  </a:lnTo>
+                  <a:lnTo>
+                    <a:pt x="1851555" y="215498"/>
+                  </a:lnTo>
+                  <a:lnTo>
+                    <a:pt x="1885843" y="175091"/>
+                  </a:lnTo>
+                  <a:lnTo>
+                    <a:pt x="1920131" y="133372"/>
+                  </a:lnTo>
+                  <a:lnTo>
+                    <a:pt x="1954419" y="90308"/>
+                  </a:lnTo>
+                  <a:lnTo>
+                    <a:pt x="1988707" y="45863"/>
                   </a:lnTo>
                   <a:lnTo>
                     <a:pt x="2022995" y="0"/>
@@ -8060,192 +8060,192 @@
           </p:nvSpPr>
           <p:spPr>
             <a:xfrm>
-              <a:off x="802365" y="4799256"/>
-              <a:ext cx="2022995" cy="709290"/>
+              <a:off x="802365" y="4794604"/>
+              <a:ext cx="2022995" cy="712879"/>
             </a:xfrm>
             <a:custGeom>
               <a:avLst/>
               <a:pathLst>
-                <a:path w="2022995" h="709290">
+                <a:path w="2022995" h="712879">
                   <a:moveTo>
                     <a:pt x="2022995" y="0"/>
                   </a:moveTo>
                   <a:lnTo>
-                    <a:pt x="1988707" y="15271"/>
-                  </a:lnTo>
-                  <a:lnTo>
-                    <a:pt x="1954419" y="30404"/>
-                  </a:lnTo>
-                  <a:lnTo>
-                    <a:pt x="1920131" y="45402"/>
-                  </a:lnTo>
-                  <a:lnTo>
-                    <a:pt x="1885843" y="60272"/>
-                  </a:lnTo>
-                  <a:lnTo>
-                    <a:pt x="1851555" y="75019"/>
-                  </a:lnTo>
-                  <a:lnTo>
-                    <a:pt x="1817267" y="89649"/>
-                  </a:lnTo>
-                  <a:lnTo>
-                    <a:pt x="1782979" y="104167"/>
-                  </a:lnTo>
-                  <a:lnTo>
-                    <a:pt x="1748691" y="118579"/>
-                  </a:lnTo>
-                  <a:lnTo>
-                    <a:pt x="1714403" y="132891"/>
-                  </a:lnTo>
-                  <a:lnTo>
-                    <a:pt x="1680115" y="147106"/>
-                  </a:lnTo>
-                  <a:lnTo>
-                    <a:pt x="1645827" y="161232"/>
-                  </a:lnTo>
-                  <a:lnTo>
-                    <a:pt x="1611539" y="175274"/>
-                  </a:lnTo>
-                  <a:lnTo>
-                    <a:pt x="1577251" y="189235"/>
-                  </a:lnTo>
-                  <a:lnTo>
-                    <a:pt x="1542962" y="203120"/>
-                  </a:lnTo>
-                  <a:lnTo>
-                    <a:pt x="1508674" y="216934"/>
-                  </a:lnTo>
-                  <a:lnTo>
-                    <a:pt x="1474386" y="230680"/>
-                  </a:lnTo>
-                  <a:lnTo>
-                    <a:pt x="1440098" y="244362"/>
-                  </a:lnTo>
-                  <a:lnTo>
-                    <a:pt x="1405810" y="257981"/>
-                  </a:lnTo>
-                  <a:lnTo>
-                    <a:pt x="1371522" y="271538"/>
-                  </a:lnTo>
-                  <a:lnTo>
-                    <a:pt x="1337234" y="285036"/>
-                  </a:lnTo>
-                  <a:lnTo>
-                    <a:pt x="1302946" y="298472"/>
-                  </a:lnTo>
-                  <a:lnTo>
-                    <a:pt x="1268658" y="311847"/>
-                  </a:lnTo>
-                  <a:lnTo>
-                    <a:pt x="1234370" y="325158"/>
-                  </a:lnTo>
-                  <a:lnTo>
-                    <a:pt x="1200082" y="338401"/>
-                  </a:lnTo>
-                  <a:lnTo>
-                    <a:pt x="1165794" y="351572"/>
-                  </a:lnTo>
-                  <a:lnTo>
-                    <a:pt x="1131506" y="364665"/>
-                  </a:lnTo>
-                  <a:lnTo>
-                    <a:pt x="1097218" y="377675"/>
-                  </a:lnTo>
-                  <a:lnTo>
-                    <a:pt x="1062930" y="390595"/>
-                  </a:lnTo>
-                  <a:lnTo>
-                    <a:pt x="1028641" y="403415"/>
-                  </a:lnTo>
-                  <a:lnTo>
-                    <a:pt x="994353" y="416129"/>
-                  </a:lnTo>
-                  <a:lnTo>
-                    <a:pt x="960065" y="428726"/>
-                  </a:lnTo>
-                  <a:lnTo>
-                    <a:pt x="925777" y="441200"/>
-                  </a:lnTo>
-                  <a:lnTo>
-                    <a:pt x="891489" y="453539"/>
-                  </a:lnTo>
-                  <a:lnTo>
-                    <a:pt x="857201" y="465736"/>
-                  </a:lnTo>
-                  <a:lnTo>
-                    <a:pt x="822913" y="477781"/>
-                  </a:lnTo>
-                  <a:lnTo>
-                    <a:pt x="788625" y="489668"/>
-                  </a:lnTo>
-                  <a:lnTo>
-                    <a:pt x="754337" y="501386"/>
-                  </a:lnTo>
-                  <a:lnTo>
-                    <a:pt x="720049" y="512930"/>
-                  </a:lnTo>
-                  <a:lnTo>
-                    <a:pt x="685761" y="524294"/>
-                  </a:lnTo>
-                  <a:lnTo>
-                    <a:pt x="651473" y="535470"/>
-                  </a:lnTo>
-                  <a:lnTo>
-                    <a:pt x="617185" y="546454"/>
-                  </a:lnTo>
-                  <a:lnTo>
-                    <a:pt x="582897" y="557241"/>
-                  </a:lnTo>
-                  <a:lnTo>
-                    <a:pt x="548609" y="567829"/>
-                  </a:lnTo>
-                  <a:lnTo>
-                    <a:pt x="514320" y="578213"/>
-                  </a:lnTo>
-                  <a:lnTo>
-                    <a:pt x="480032" y="588391"/>
-                  </a:lnTo>
-                  <a:lnTo>
-                    <a:pt x="445744" y="598363"/>
-                  </a:lnTo>
-                  <a:lnTo>
-                    <a:pt x="411456" y="608126"/>
-                  </a:lnTo>
-                  <a:lnTo>
-                    <a:pt x="377168" y="617680"/>
-                  </a:lnTo>
-                  <a:lnTo>
-                    <a:pt x="342880" y="627026"/>
-                  </a:lnTo>
-                  <a:lnTo>
-                    <a:pt x="308592" y="636163"/>
-                  </a:lnTo>
-                  <a:lnTo>
-                    <a:pt x="274304" y="645093"/>
-                  </a:lnTo>
-                  <a:lnTo>
-                    <a:pt x="240016" y="653816"/>
-                  </a:lnTo>
-                  <a:lnTo>
-                    <a:pt x="205728" y="662336"/>
-                  </a:lnTo>
-                  <a:lnTo>
-                    <a:pt x="171440" y="670653"/>
-                  </a:lnTo>
-                  <a:lnTo>
-                    <a:pt x="137152" y="678770"/>
-                  </a:lnTo>
-                  <a:lnTo>
-                    <a:pt x="102864" y="686689"/>
-                  </a:lnTo>
-                  <a:lnTo>
-                    <a:pt x="68576" y="694414"/>
-                  </a:lnTo>
-                  <a:lnTo>
-                    <a:pt x="34288" y="701946"/>
-                  </a:lnTo>
-                  <a:lnTo>
-                    <a:pt x="0" y="709290"/>
+                    <a:pt x="1988707" y="15498"/>
+                  </a:lnTo>
+                  <a:lnTo>
+                    <a:pt x="1954419" y="30850"/>
+                  </a:lnTo>
+                  <a:lnTo>
+                    <a:pt x="1920131" y="46062"/>
+                  </a:lnTo>
+                  <a:lnTo>
+                    <a:pt x="1885843" y="61139"/>
+                  </a:lnTo>
+                  <a:lnTo>
+                    <a:pt x="1851555" y="76087"/>
+                  </a:lnTo>
+                  <a:lnTo>
+                    <a:pt x="1817267" y="90911"/>
+                  </a:lnTo>
+                  <a:lnTo>
+                    <a:pt x="1782979" y="105617"/>
+                  </a:lnTo>
+                  <a:lnTo>
+                    <a:pt x="1748691" y="120211"/>
+                  </a:lnTo>
+                  <a:lnTo>
+                    <a:pt x="1714403" y="134698"/>
+                  </a:lnTo>
+                  <a:lnTo>
+                    <a:pt x="1680115" y="149083"/>
+                  </a:lnTo>
+                  <a:lnTo>
+                    <a:pt x="1645827" y="163373"/>
+                  </a:lnTo>
+                  <a:lnTo>
+                    <a:pt x="1611539" y="177571"/>
+                  </a:lnTo>
+                  <a:lnTo>
+                    <a:pt x="1577251" y="191683"/>
+                  </a:lnTo>
+                  <a:lnTo>
+                    <a:pt x="1542962" y="205714"/>
+                  </a:lnTo>
+                  <a:lnTo>
+                    <a:pt x="1508674" y="219667"/>
+                  </a:lnTo>
+                  <a:lnTo>
+                    <a:pt x="1474386" y="233546"/>
+                  </a:lnTo>
+                  <a:lnTo>
+                    <a:pt x="1440098" y="247354"/>
+                  </a:lnTo>
+                  <a:lnTo>
+                    <a:pt x="1405810" y="261094"/>
+                  </a:lnTo>
+                  <a:lnTo>
+                    <a:pt x="1371522" y="274766"/>
+                  </a:lnTo>
+                  <a:lnTo>
+                    <a:pt x="1337234" y="288371"/>
+                  </a:lnTo>
+                  <a:lnTo>
+                    <a:pt x="1302946" y="301910"/>
+                  </a:lnTo>
+                  <a:lnTo>
+                    <a:pt x="1268658" y="315380"/>
+                  </a:lnTo>
+                  <a:lnTo>
+                    <a:pt x="1234370" y="328780"/>
+                  </a:lnTo>
+                  <a:lnTo>
+                    <a:pt x="1200082" y="342106"/>
+                  </a:lnTo>
+                  <a:lnTo>
+                    <a:pt x="1165794" y="355353"/>
+                  </a:lnTo>
+                  <a:lnTo>
+                    <a:pt x="1131506" y="368517"/>
+                  </a:lnTo>
+                  <a:lnTo>
+                    <a:pt x="1097218" y="381591"/>
+                  </a:lnTo>
+                  <a:lnTo>
+                    <a:pt x="1062930" y="394567"/>
+                  </a:lnTo>
+                  <a:lnTo>
+                    <a:pt x="1028641" y="407439"/>
+                  </a:lnTo>
+                  <a:lnTo>
+                    <a:pt x="994353" y="420198"/>
+                  </a:lnTo>
+                  <a:lnTo>
+                    <a:pt x="960065" y="432835"/>
+                  </a:lnTo>
+                  <a:lnTo>
+                    <a:pt x="925777" y="445342"/>
+                  </a:lnTo>
+                  <a:lnTo>
+                    <a:pt x="891489" y="457709"/>
+                  </a:lnTo>
+                  <a:lnTo>
+                    <a:pt x="857201" y="469929"/>
+                  </a:lnTo>
+                  <a:lnTo>
+                    <a:pt x="822913" y="481992"/>
+                  </a:lnTo>
+                  <a:lnTo>
+                    <a:pt x="788625" y="493890"/>
+                  </a:lnTo>
+                  <a:lnTo>
+                    <a:pt x="754337" y="505616"/>
+                  </a:lnTo>
+                  <a:lnTo>
+                    <a:pt x="720049" y="517163"/>
+                  </a:lnTo>
+                  <a:lnTo>
+                    <a:pt x="685761" y="528525"/>
+                  </a:lnTo>
+                  <a:lnTo>
+                    <a:pt x="651473" y="539695"/>
+                  </a:lnTo>
+                  <a:lnTo>
+                    <a:pt x="617185" y="550669"/>
+                  </a:lnTo>
+                  <a:lnTo>
+                    <a:pt x="582897" y="561444"/>
+                  </a:lnTo>
+                  <a:lnTo>
+                    <a:pt x="548609" y="572014"/>
+                  </a:lnTo>
+                  <a:lnTo>
+                    <a:pt x="514320" y="582378"/>
+                  </a:lnTo>
+                  <a:lnTo>
+                    <a:pt x="480032" y="592533"/>
+                  </a:lnTo>
+                  <a:lnTo>
+                    <a:pt x="445744" y="602479"/>
+                  </a:lnTo>
+                  <a:lnTo>
+                    <a:pt x="411456" y="612213"/>
+                  </a:lnTo>
+                  <a:lnTo>
+                    <a:pt x="377168" y="621736"/>
+                  </a:lnTo>
+                  <a:lnTo>
+                    <a:pt x="342880" y="631047"/>
+                  </a:lnTo>
+                  <a:lnTo>
+                    <a:pt x="308592" y="640149"/>
+                  </a:lnTo>
+                  <a:lnTo>
+                    <a:pt x="274304" y="649041"/>
+                  </a:lnTo>
+                  <a:lnTo>
+                    <a:pt x="240016" y="657725"/>
+                  </a:lnTo>
+                  <a:lnTo>
+                    <a:pt x="205728" y="666203"/>
+                  </a:lnTo>
+                  <a:lnTo>
+                    <a:pt x="171440" y="674477"/>
+                  </a:lnTo>
+                  <a:lnTo>
+                    <a:pt x="137152" y="682550"/>
+                  </a:lnTo>
+                  <a:lnTo>
+                    <a:pt x="102864" y="690423"/>
+                  </a:lnTo>
+                  <a:lnTo>
+                    <a:pt x="68576" y="698101"/>
+                  </a:lnTo>
+                  <a:lnTo>
+                    <a:pt x="34288" y="705585"/>
+                  </a:lnTo>
+                  <a:lnTo>
+                    <a:pt x="0" y="712879"/>
                   </a:lnTo>
                 </a:path>
               </a:pathLst>
@@ -8266,371 +8266,371 @@
           <p:spPr>
             <a:xfrm>
               <a:off x="802365" y="3827677"/>
-              <a:ext cx="2022995" cy="1349754"/>
+              <a:ext cx="2022995" cy="1303410"/>
             </a:xfrm>
             <a:custGeom>
               <a:avLst/>
               <a:pathLst>
-                <a:path w="2022995" h="1349754">
+                <a:path w="2022995" h="1303410">
                   <a:moveTo>
-                    <a:pt x="0" y="482522"/>
+                    <a:pt x="0" y="368785"/>
                   </a:moveTo>
                   <a:lnTo>
-                    <a:pt x="34288" y="488516"/>
-                  </a:lnTo>
-                  <a:lnTo>
-                    <a:pt x="68576" y="494352"/>
-                  </a:lnTo>
-                  <a:lnTo>
-                    <a:pt x="102864" y="500024"/>
-                  </a:lnTo>
-                  <a:lnTo>
-                    <a:pt x="137152" y="505524"/>
-                  </a:lnTo>
-                  <a:lnTo>
-                    <a:pt x="171440" y="510842"/>
-                  </a:lnTo>
-                  <a:lnTo>
-                    <a:pt x="205728" y="515969"/>
-                  </a:lnTo>
-                  <a:lnTo>
-                    <a:pt x="240016" y="520894"/>
-                  </a:lnTo>
-                  <a:lnTo>
-                    <a:pt x="274304" y="525605"/>
-                  </a:lnTo>
-                  <a:lnTo>
-                    <a:pt x="308592" y="530089"/>
-                  </a:lnTo>
-                  <a:lnTo>
-                    <a:pt x="342880" y="534333"/>
-                  </a:lnTo>
-                  <a:lnTo>
-                    <a:pt x="377168" y="538321"/>
-                  </a:lnTo>
-                  <a:lnTo>
-                    <a:pt x="411456" y="542037"/>
-                  </a:lnTo>
-                  <a:lnTo>
-                    <a:pt x="445744" y="545464"/>
-                  </a:lnTo>
-                  <a:lnTo>
-                    <a:pt x="480032" y="548580"/>
-                  </a:lnTo>
-                  <a:lnTo>
-                    <a:pt x="514320" y="551366"/>
-                  </a:lnTo>
-                  <a:lnTo>
-                    <a:pt x="548609" y="553798"/>
-                  </a:lnTo>
-                  <a:lnTo>
-                    <a:pt x="582897" y="555853"/>
-                  </a:lnTo>
-                  <a:lnTo>
-                    <a:pt x="617185" y="557503"/>
-                  </a:lnTo>
-                  <a:lnTo>
-                    <a:pt x="651473" y="558720"/>
-                  </a:lnTo>
-                  <a:lnTo>
-                    <a:pt x="685761" y="559475"/>
-                  </a:lnTo>
-                  <a:lnTo>
-                    <a:pt x="720049" y="559737"/>
-                  </a:lnTo>
-                  <a:lnTo>
-                    <a:pt x="754337" y="559471"/>
-                  </a:lnTo>
-                  <a:lnTo>
-                    <a:pt x="788625" y="558643"/>
-                  </a:lnTo>
-                  <a:lnTo>
-                    <a:pt x="822913" y="557219"/>
-                  </a:lnTo>
-                  <a:lnTo>
-                    <a:pt x="857201" y="555162"/>
-                  </a:lnTo>
-                  <a:lnTo>
-                    <a:pt x="891489" y="552437"/>
-                  </a:lnTo>
-                  <a:lnTo>
-                    <a:pt x="925777" y="549008"/>
-                  </a:lnTo>
-                  <a:lnTo>
-                    <a:pt x="960065" y="544840"/>
-                  </a:lnTo>
-                  <a:lnTo>
-                    <a:pt x="994353" y="539902"/>
-                  </a:lnTo>
-                  <a:lnTo>
-                    <a:pt x="1028641" y="534162"/>
-                  </a:lnTo>
-                  <a:lnTo>
-                    <a:pt x="1062930" y="527593"/>
-                  </a:lnTo>
-                  <a:lnTo>
-                    <a:pt x="1097218" y="520173"/>
-                  </a:lnTo>
-                  <a:lnTo>
-                    <a:pt x="1131506" y="511881"/>
-                  </a:lnTo>
-                  <a:lnTo>
-                    <a:pt x="1165794" y="502703"/>
-                  </a:lnTo>
-                  <a:lnTo>
-                    <a:pt x="1200082" y="492628"/>
-                  </a:lnTo>
-                  <a:lnTo>
-                    <a:pt x="1234370" y="481649"/>
-                  </a:lnTo>
-                  <a:lnTo>
-                    <a:pt x="1268658" y="469765"/>
-                  </a:lnTo>
-                  <a:lnTo>
-                    <a:pt x="1302946" y="456979"/>
-                  </a:lnTo>
-                  <a:lnTo>
-                    <a:pt x="1337234" y="443295"/>
-                  </a:lnTo>
-                  <a:lnTo>
-                    <a:pt x="1371522" y="428722"/>
-                  </a:lnTo>
-                  <a:lnTo>
-                    <a:pt x="1405810" y="413272"/>
-                  </a:lnTo>
-                  <a:lnTo>
-                    <a:pt x="1440098" y="396957"/>
-                  </a:lnTo>
-                  <a:lnTo>
-                    <a:pt x="1474386" y="379791"/>
-                  </a:lnTo>
-                  <a:lnTo>
-                    <a:pt x="1508674" y="361789"/>
-                  </a:lnTo>
-                  <a:lnTo>
-                    <a:pt x="1542962" y="342965"/>
-                  </a:lnTo>
-                  <a:lnTo>
-                    <a:pt x="1577251" y="323336"/>
-                  </a:lnTo>
-                  <a:lnTo>
-                    <a:pt x="1611539" y="302914"/>
-                  </a:lnTo>
-                  <a:lnTo>
-                    <a:pt x="1645827" y="281715"/>
-                  </a:lnTo>
-                  <a:lnTo>
-                    <a:pt x="1680115" y="259750"/>
-                  </a:lnTo>
-                  <a:lnTo>
-                    <a:pt x="1714403" y="237031"/>
-                  </a:lnTo>
-                  <a:lnTo>
-                    <a:pt x="1748691" y="213569"/>
-                  </a:lnTo>
-                  <a:lnTo>
-                    <a:pt x="1782979" y="189374"/>
-                  </a:lnTo>
-                  <a:lnTo>
-                    <a:pt x="1817267" y="164453"/>
-                  </a:lnTo>
-                  <a:lnTo>
-                    <a:pt x="1851555" y="138813"/>
-                  </a:lnTo>
-                  <a:lnTo>
-                    <a:pt x="1885843" y="112461"/>
-                  </a:lnTo>
-                  <a:lnTo>
-                    <a:pt x="1920131" y="85401"/>
-                  </a:lnTo>
-                  <a:lnTo>
-                    <a:pt x="1954419" y="57636"/>
-                  </a:lnTo>
-                  <a:lnTo>
-                    <a:pt x="1988707" y="29168"/>
+                    <a:pt x="34288" y="377377"/>
+                  </a:lnTo>
+                  <a:lnTo>
+                    <a:pt x="68576" y="385778"/>
+                  </a:lnTo>
+                  <a:lnTo>
+                    <a:pt x="102864" y="393981"/>
+                  </a:lnTo>
+                  <a:lnTo>
+                    <a:pt x="137152" y="401977"/>
+                  </a:lnTo>
+                  <a:lnTo>
+                    <a:pt x="171440" y="409757"/>
+                  </a:lnTo>
+                  <a:lnTo>
+                    <a:pt x="205728" y="417311"/>
+                  </a:lnTo>
+                  <a:lnTo>
+                    <a:pt x="240016" y="424629"/>
+                  </a:lnTo>
+                  <a:lnTo>
+                    <a:pt x="274304" y="431699"/>
+                  </a:lnTo>
+                  <a:lnTo>
+                    <a:pt x="308592" y="438508"/>
+                  </a:lnTo>
+                  <a:lnTo>
+                    <a:pt x="342880" y="445042"/>
+                  </a:lnTo>
+                  <a:lnTo>
+                    <a:pt x="377168" y="451286"/>
+                  </a:lnTo>
+                  <a:lnTo>
+                    <a:pt x="411456" y="457222"/>
+                  </a:lnTo>
+                  <a:lnTo>
+                    <a:pt x="445744" y="462833"/>
+                  </a:lnTo>
+                  <a:lnTo>
+                    <a:pt x="480032" y="468100"/>
+                  </a:lnTo>
+                  <a:lnTo>
+                    <a:pt x="514320" y="473000"/>
+                  </a:lnTo>
+                  <a:lnTo>
+                    <a:pt x="548609" y="477512"/>
+                  </a:lnTo>
+                  <a:lnTo>
+                    <a:pt x="582897" y="481609"/>
+                  </a:lnTo>
+                  <a:lnTo>
+                    <a:pt x="617185" y="485266"/>
+                  </a:lnTo>
+                  <a:lnTo>
+                    <a:pt x="651473" y="488454"/>
+                  </a:lnTo>
+                  <a:lnTo>
+                    <a:pt x="685761" y="491143"/>
+                  </a:lnTo>
+                  <a:lnTo>
+                    <a:pt x="720049" y="493302"/>
+                  </a:lnTo>
+                  <a:lnTo>
+                    <a:pt x="754337" y="494898"/>
+                  </a:lnTo>
+                  <a:lnTo>
+                    <a:pt x="788625" y="495897"/>
+                  </a:lnTo>
+                  <a:lnTo>
+                    <a:pt x="822913" y="496263"/>
+                  </a:lnTo>
+                  <a:lnTo>
+                    <a:pt x="857201" y="495963"/>
+                  </a:lnTo>
+                  <a:lnTo>
+                    <a:pt x="891489" y="494959"/>
+                  </a:lnTo>
+                  <a:lnTo>
+                    <a:pt x="925777" y="493219"/>
+                  </a:lnTo>
+                  <a:lnTo>
+                    <a:pt x="960065" y="490710"/>
+                  </a:lnTo>
+                  <a:lnTo>
+                    <a:pt x="994353" y="487401"/>
+                  </a:lnTo>
+                  <a:lnTo>
+                    <a:pt x="1028641" y="483263"/>
+                  </a:lnTo>
+                  <a:lnTo>
+                    <a:pt x="1062930" y="478273"/>
+                  </a:lnTo>
+                  <a:lnTo>
+                    <a:pt x="1097218" y="472410"/>
+                  </a:lnTo>
+                  <a:lnTo>
+                    <a:pt x="1131506" y="465657"/>
+                  </a:lnTo>
+                  <a:lnTo>
+                    <a:pt x="1165794" y="458004"/>
+                  </a:lnTo>
+                  <a:lnTo>
+                    <a:pt x="1200082" y="449443"/>
+                  </a:lnTo>
+                  <a:lnTo>
+                    <a:pt x="1234370" y="439973"/>
+                  </a:lnTo>
+                  <a:lnTo>
+                    <a:pt x="1268658" y="429595"/>
+                  </a:lnTo>
+                  <a:lnTo>
+                    <a:pt x="1302946" y="418317"/>
+                  </a:lnTo>
+                  <a:lnTo>
+                    <a:pt x="1337234" y="406147"/>
+                  </a:lnTo>
+                  <a:lnTo>
+                    <a:pt x="1371522" y="393100"/>
+                  </a:lnTo>
+                  <a:lnTo>
+                    <a:pt x="1405810" y="379190"/>
+                  </a:lnTo>
+                  <a:lnTo>
+                    <a:pt x="1440098" y="364433"/>
+                  </a:lnTo>
+                  <a:lnTo>
+                    <a:pt x="1474386" y="348848"/>
+                  </a:lnTo>
+                  <a:lnTo>
+                    <a:pt x="1508674" y="332452"/>
+                  </a:lnTo>
+                  <a:lnTo>
+                    <a:pt x="1542962" y="315266"/>
+                  </a:lnTo>
+                  <a:lnTo>
+                    <a:pt x="1577251" y="297306"/>
+                  </a:lnTo>
+                  <a:lnTo>
+                    <a:pt x="1611539" y="278590"/>
+                  </a:lnTo>
+                  <a:lnTo>
+                    <a:pt x="1645827" y="259136"/>
+                  </a:lnTo>
+                  <a:lnTo>
+                    <a:pt x="1680115" y="238959"/>
+                  </a:lnTo>
+                  <a:lnTo>
+                    <a:pt x="1714403" y="218073"/>
+                  </a:lnTo>
+                  <a:lnTo>
+                    <a:pt x="1748691" y="196492"/>
+                  </a:lnTo>
+                  <a:lnTo>
+                    <a:pt x="1782979" y="174228"/>
+                  </a:lnTo>
+                  <a:lnTo>
+                    <a:pt x="1817267" y="151292"/>
+                  </a:lnTo>
+                  <a:lnTo>
+                    <a:pt x="1851555" y="127692"/>
+                  </a:lnTo>
+                  <a:lnTo>
+                    <a:pt x="1885843" y="103439"/>
+                  </a:lnTo>
+                  <a:lnTo>
+                    <a:pt x="1920131" y="78537"/>
+                  </a:lnTo>
+                  <a:lnTo>
+                    <a:pt x="1954419" y="52994"/>
+                  </a:lnTo>
+                  <a:lnTo>
+                    <a:pt x="1988707" y="26813"/>
                   </a:lnTo>
                   <a:lnTo>
                     <a:pt x="2022995" y="0"/>
                   </a:lnTo>
                   <a:lnTo>
-                    <a:pt x="2022995" y="1054707"/>
-                  </a:lnTo>
-                  <a:lnTo>
-                    <a:pt x="1988707" y="1051646"/>
-                  </a:lnTo>
-                  <a:lnTo>
-                    <a:pt x="1954419" y="1048700"/>
-                  </a:lnTo>
-                  <a:lnTo>
-                    <a:pt x="1920131" y="1045879"/>
-                  </a:lnTo>
-                  <a:lnTo>
-                    <a:pt x="1885843" y="1043194"/>
-                  </a:lnTo>
-                  <a:lnTo>
-                    <a:pt x="1851555" y="1040659"/>
-                  </a:lnTo>
-                  <a:lnTo>
-                    <a:pt x="1817267" y="1038287"/>
-                  </a:lnTo>
-                  <a:lnTo>
-                    <a:pt x="1782979" y="1036092"/>
-                  </a:lnTo>
-                  <a:lnTo>
-                    <a:pt x="1748691" y="1034090"/>
-                  </a:lnTo>
-                  <a:lnTo>
-                    <a:pt x="1714403" y="1032296"/>
-                  </a:lnTo>
-                  <a:lnTo>
-                    <a:pt x="1680115" y="1030730"/>
-                  </a:lnTo>
-                  <a:lnTo>
-                    <a:pt x="1645827" y="1029409"/>
-                  </a:lnTo>
-                  <a:lnTo>
-                    <a:pt x="1611539" y="1028353"/>
-                  </a:lnTo>
-                  <a:lnTo>
-                    <a:pt x="1577251" y="1027583"/>
-                  </a:lnTo>
-                  <a:lnTo>
-                    <a:pt x="1542962" y="1027120"/>
-                  </a:lnTo>
-                  <a:lnTo>
-                    <a:pt x="1508674" y="1026987"/>
-                  </a:lnTo>
-                  <a:lnTo>
-                    <a:pt x="1474386" y="1027204"/>
-                  </a:lnTo>
-                  <a:lnTo>
-                    <a:pt x="1440098" y="1027796"/>
-                  </a:lnTo>
-                  <a:lnTo>
-                    <a:pt x="1405810" y="1028783"/>
-                  </a:lnTo>
-                  <a:lnTo>
-                    <a:pt x="1371522" y="1030186"/>
-                  </a:lnTo>
-                  <a:lnTo>
-                    <a:pt x="1337234" y="1032026"/>
-                  </a:lnTo>
-                  <a:lnTo>
-                    <a:pt x="1302946" y="1034320"/>
-                  </a:lnTo>
-                  <a:lnTo>
-                    <a:pt x="1268658" y="1037083"/>
-                  </a:lnTo>
-                  <a:lnTo>
-                    <a:pt x="1234370" y="1040328"/>
-                  </a:lnTo>
-                  <a:lnTo>
-                    <a:pt x="1200082" y="1044062"/>
-                  </a:lnTo>
-                  <a:lnTo>
-                    <a:pt x="1165794" y="1048291"/>
-                  </a:lnTo>
-                  <a:lnTo>
-                    <a:pt x="1131506" y="1053014"/>
-                  </a:lnTo>
-                  <a:lnTo>
-                    <a:pt x="1097218" y="1058228"/>
-                  </a:lnTo>
-                  <a:lnTo>
-                    <a:pt x="1062930" y="1063922"/>
-                  </a:lnTo>
-                  <a:lnTo>
-                    <a:pt x="1028641" y="1070084"/>
-                  </a:lnTo>
-                  <a:lnTo>
-                    <a:pt x="994353" y="1076694"/>
-                  </a:lnTo>
-                  <a:lnTo>
-                    <a:pt x="960065" y="1083733"/>
-                  </a:lnTo>
-                  <a:lnTo>
-                    <a:pt x="925777" y="1091175"/>
-                  </a:lnTo>
-                  <a:lnTo>
-                    <a:pt x="891489" y="1098993"/>
-                  </a:lnTo>
-                  <a:lnTo>
-                    <a:pt x="857201" y="1107158"/>
-                  </a:lnTo>
-                  <a:lnTo>
-                    <a:pt x="822913" y="1115639"/>
-                  </a:lnTo>
-                  <a:lnTo>
-                    <a:pt x="788625" y="1124407"/>
-                  </a:lnTo>
-                  <a:lnTo>
-                    <a:pt x="754337" y="1133429"/>
-                  </a:lnTo>
-                  <a:lnTo>
-                    <a:pt x="720049" y="1142676"/>
-                  </a:lnTo>
-                  <a:lnTo>
-                    <a:pt x="685761" y="1152119"/>
-                  </a:lnTo>
-                  <a:lnTo>
-                    <a:pt x="651473" y="1161728"/>
-                  </a:lnTo>
-                  <a:lnTo>
-                    <a:pt x="617185" y="1171477"/>
-                  </a:lnTo>
-                  <a:lnTo>
-                    <a:pt x="582897" y="1181342"/>
-                  </a:lnTo>
-                  <a:lnTo>
-                    <a:pt x="548609" y="1191297"/>
-                  </a:lnTo>
-                  <a:lnTo>
-                    <a:pt x="514320" y="1201321"/>
-                  </a:lnTo>
-                  <a:lnTo>
-                    <a:pt x="480032" y="1211395"/>
-                  </a:lnTo>
-                  <a:lnTo>
-                    <a:pt x="445744" y="1221498"/>
-                  </a:lnTo>
-                  <a:lnTo>
-                    <a:pt x="411456" y="1231616"/>
-                  </a:lnTo>
-                  <a:lnTo>
-                    <a:pt x="377168" y="1241731"/>
-                  </a:lnTo>
-                  <a:lnTo>
-                    <a:pt x="342880" y="1251831"/>
-                  </a:lnTo>
-                  <a:lnTo>
-                    <a:pt x="308592" y="1261902"/>
-                  </a:lnTo>
-                  <a:lnTo>
-                    <a:pt x="274304" y="1271934"/>
-                  </a:lnTo>
-                  <a:lnTo>
-                    <a:pt x="240016" y="1281916"/>
-                  </a:lnTo>
-                  <a:lnTo>
-                    <a:pt x="205728" y="1291839"/>
-                  </a:lnTo>
-                  <a:lnTo>
-                    <a:pt x="171440" y="1301696"/>
-                  </a:lnTo>
-                  <a:lnTo>
-                    <a:pt x="137152" y="1311478"/>
-                  </a:lnTo>
-                  <a:lnTo>
-                    <a:pt x="102864" y="1321180"/>
-                  </a:lnTo>
-                  <a:lnTo>
-                    <a:pt x="68576" y="1330797"/>
-                  </a:lnTo>
-                  <a:lnTo>
-                    <a:pt x="34288" y="1340323"/>
-                  </a:lnTo>
-                  <a:lnTo>
-                    <a:pt x="0" y="1349754"/>
+                    <a:pt x="2022995" y="1060044"/>
+                  </a:lnTo>
+                  <a:lnTo>
+                    <a:pt x="1988707" y="1055780"/>
+                  </a:lnTo>
+                  <a:lnTo>
+                    <a:pt x="1954419" y="1051618"/>
+                  </a:lnTo>
+                  <a:lnTo>
+                    <a:pt x="1920131" y="1047571"/>
+                  </a:lnTo>
+                  <a:lnTo>
+                    <a:pt x="1885843" y="1043649"/>
+                  </a:lnTo>
+                  <a:lnTo>
+                    <a:pt x="1851555" y="1039866"/>
+                  </a:lnTo>
+                  <a:lnTo>
+                    <a:pt x="1817267" y="1036235"/>
+                  </a:lnTo>
+                  <a:lnTo>
+                    <a:pt x="1782979" y="1032772"/>
+                  </a:lnTo>
+                  <a:lnTo>
+                    <a:pt x="1748691" y="1029493"/>
+                  </a:lnTo>
+                  <a:lnTo>
+                    <a:pt x="1714403" y="1026416"/>
+                  </a:lnTo>
+                  <a:lnTo>
+                    <a:pt x="1680115" y="1023558"/>
+                  </a:lnTo>
+                  <a:lnTo>
+                    <a:pt x="1645827" y="1020940"/>
+                  </a:lnTo>
+                  <a:lnTo>
+                    <a:pt x="1611539" y="1018582"/>
+                  </a:lnTo>
+                  <a:lnTo>
+                    <a:pt x="1577251" y="1016506"/>
+                  </a:lnTo>
+                  <a:lnTo>
+                    <a:pt x="1542962" y="1014735"/>
+                  </a:lnTo>
+                  <a:lnTo>
+                    <a:pt x="1508674" y="1013294"/>
+                  </a:lnTo>
+                  <a:lnTo>
+                    <a:pt x="1474386" y="1012205"/>
+                  </a:lnTo>
+                  <a:lnTo>
+                    <a:pt x="1440098" y="1011493"/>
+                  </a:lnTo>
+                  <a:lnTo>
+                    <a:pt x="1405810" y="1011182"/>
+                  </a:lnTo>
+                  <a:lnTo>
+                    <a:pt x="1371522" y="1011295"/>
+                  </a:lnTo>
+                  <a:lnTo>
+                    <a:pt x="1337234" y="1011856"/>
+                  </a:lnTo>
+                  <a:lnTo>
+                    <a:pt x="1302946" y="1012884"/>
+                  </a:lnTo>
+                  <a:lnTo>
+                    <a:pt x="1268658" y="1014396"/>
+                  </a:lnTo>
+                  <a:lnTo>
+                    <a:pt x="1234370" y="1016409"/>
+                  </a:lnTo>
+                  <a:lnTo>
+                    <a:pt x="1200082" y="1018934"/>
+                  </a:lnTo>
+                  <a:lnTo>
+                    <a:pt x="1165794" y="1021978"/>
+                  </a:lnTo>
+                  <a:lnTo>
+                    <a:pt x="1131506" y="1025543"/>
+                  </a:lnTo>
+                  <a:lnTo>
+                    <a:pt x="1097218" y="1029628"/>
+                  </a:lnTo>
+                  <a:lnTo>
+                    <a:pt x="1062930" y="1034227"/>
+                  </a:lnTo>
+                  <a:lnTo>
+                    <a:pt x="1028641" y="1039327"/>
+                  </a:lnTo>
+                  <a:lnTo>
+                    <a:pt x="994353" y="1044912"/>
+                  </a:lnTo>
+                  <a:lnTo>
+                    <a:pt x="960065" y="1050963"/>
+                  </a:lnTo>
+                  <a:lnTo>
+                    <a:pt x="925777" y="1057456"/>
+                  </a:lnTo>
+                  <a:lnTo>
+                    <a:pt x="891489" y="1064364"/>
+                  </a:lnTo>
+                  <a:lnTo>
+                    <a:pt x="857201" y="1071659"/>
+                  </a:lnTo>
+                  <a:lnTo>
+                    <a:pt x="822913" y="1079311"/>
+                  </a:lnTo>
+                  <a:lnTo>
+                    <a:pt x="788625" y="1087289"/>
+                  </a:lnTo>
+                  <a:lnTo>
+                    <a:pt x="754337" y="1095561"/>
+                  </a:lnTo>
+                  <a:lnTo>
+                    <a:pt x="720049" y="1104097"/>
+                  </a:lnTo>
+                  <a:lnTo>
+                    <a:pt x="685761" y="1112866"/>
+                  </a:lnTo>
+                  <a:lnTo>
+                    <a:pt x="651473" y="1121839"/>
+                  </a:lnTo>
+                  <a:lnTo>
+                    <a:pt x="617185" y="1130988"/>
+                  </a:lnTo>
+                  <a:lnTo>
+                    <a:pt x="582897" y="1140287"/>
+                  </a:lnTo>
+                  <a:lnTo>
+                    <a:pt x="548609" y="1149711"/>
+                  </a:lnTo>
+                  <a:lnTo>
+                    <a:pt x="514320" y="1159238"/>
+                  </a:lnTo>
+                  <a:lnTo>
+                    <a:pt x="480032" y="1168845"/>
+                  </a:lnTo>
+                  <a:lnTo>
+                    <a:pt x="445744" y="1178513"/>
+                  </a:lnTo>
+                  <a:lnTo>
+                    <a:pt x="411456" y="1188223"/>
+                  </a:lnTo>
+                  <a:lnTo>
+                    <a:pt x="377168" y="1197961"/>
+                  </a:lnTo>
+                  <a:lnTo>
+                    <a:pt x="342880" y="1207710"/>
+                  </a:lnTo>
+                  <a:lnTo>
+                    <a:pt x="308592" y="1217456"/>
+                  </a:lnTo>
+                  <a:lnTo>
+                    <a:pt x="274304" y="1227188"/>
+                  </a:lnTo>
+                  <a:lnTo>
+                    <a:pt x="240016" y="1236895"/>
+                  </a:lnTo>
+                  <a:lnTo>
+                    <a:pt x="205728" y="1246566"/>
+                  </a:lnTo>
+                  <a:lnTo>
+                    <a:pt x="171440" y="1256193"/>
+                  </a:lnTo>
+                  <a:lnTo>
+                    <a:pt x="137152" y="1265768"/>
+                  </a:lnTo>
+                  <a:lnTo>
+                    <a:pt x="102864" y="1275283"/>
+                  </a:lnTo>
+                  <a:lnTo>
+                    <a:pt x="68576" y="1284732"/>
+                  </a:lnTo>
+                  <a:lnTo>
+                    <a:pt x="34288" y="1294109"/>
+                  </a:lnTo>
+                  <a:lnTo>
+                    <a:pt x="0" y="1303410"/>
                   </a:lnTo>
                   <a:close/>
                 </a:path>
@@ -8657,188 +8657,188 @@
           <p:spPr>
             <a:xfrm>
               <a:off x="802365" y="3827677"/>
-              <a:ext cx="2022995" cy="559737"/>
+              <a:ext cx="2022995" cy="496263"/>
             </a:xfrm>
             <a:custGeom>
               <a:avLst/>
               <a:pathLst>
-                <a:path w="2022995" h="559737">
+                <a:path w="2022995" h="496263">
                   <a:moveTo>
-                    <a:pt x="0" y="482522"/>
+                    <a:pt x="0" y="368785"/>
                   </a:moveTo>
                   <a:lnTo>
-                    <a:pt x="34288" y="488516"/>
-                  </a:lnTo>
-                  <a:lnTo>
-                    <a:pt x="68576" y="494352"/>
-                  </a:lnTo>
-                  <a:lnTo>
-                    <a:pt x="102864" y="500024"/>
-                  </a:lnTo>
-                  <a:lnTo>
-                    <a:pt x="137152" y="505524"/>
-                  </a:lnTo>
-                  <a:lnTo>
-                    <a:pt x="171440" y="510842"/>
-                  </a:lnTo>
-                  <a:lnTo>
-                    <a:pt x="205728" y="515969"/>
-                  </a:lnTo>
-                  <a:lnTo>
-                    <a:pt x="240016" y="520894"/>
-                  </a:lnTo>
-                  <a:lnTo>
-                    <a:pt x="274304" y="525605"/>
-                  </a:lnTo>
-                  <a:lnTo>
-                    <a:pt x="308592" y="530089"/>
-                  </a:lnTo>
-                  <a:lnTo>
-                    <a:pt x="342880" y="534333"/>
-                  </a:lnTo>
-                  <a:lnTo>
-                    <a:pt x="377168" y="538321"/>
-                  </a:lnTo>
-                  <a:lnTo>
-                    <a:pt x="411456" y="542037"/>
-                  </a:lnTo>
-                  <a:lnTo>
-                    <a:pt x="445744" y="545464"/>
-                  </a:lnTo>
-                  <a:lnTo>
-                    <a:pt x="480032" y="548580"/>
-                  </a:lnTo>
-                  <a:lnTo>
-                    <a:pt x="514320" y="551366"/>
-                  </a:lnTo>
-                  <a:lnTo>
-                    <a:pt x="548609" y="553798"/>
-                  </a:lnTo>
-                  <a:lnTo>
-                    <a:pt x="582897" y="555853"/>
-                  </a:lnTo>
-                  <a:lnTo>
-                    <a:pt x="617185" y="557503"/>
-                  </a:lnTo>
-                  <a:lnTo>
-                    <a:pt x="651473" y="558720"/>
-                  </a:lnTo>
-                  <a:lnTo>
-                    <a:pt x="685761" y="559475"/>
-                  </a:lnTo>
-                  <a:lnTo>
-                    <a:pt x="720049" y="559737"/>
-                  </a:lnTo>
-                  <a:lnTo>
-                    <a:pt x="754337" y="559471"/>
-                  </a:lnTo>
-                  <a:lnTo>
-                    <a:pt x="788625" y="558643"/>
-                  </a:lnTo>
-                  <a:lnTo>
-                    <a:pt x="822913" y="557219"/>
-                  </a:lnTo>
-                  <a:lnTo>
-                    <a:pt x="857201" y="555162"/>
-                  </a:lnTo>
-                  <a:lnTo>
-                    <a:pt x="891489" y="552437"/>
-                  </a:lnTo>
-                  <a:lnTo>
-                    <a:pt x="925777" y="549008"/>
-                  </a:lnTo>
-                  <a:lnTo>
-                    <a:pt x="960065" y="544840"/>
-                  </a:lnTo>
-                  <a:lnTo>
-                    <a:pt x="994353" y="539902"/>
-                  </a:lnTo>
-                  <a:lnTo>
-                    <a:pt x="1028641" y="534162"/>
-                  </a:lnTo>
-                  <a:lnTo>
-                    <a:pt x="1062930" y="527593"/>
-                  </a:lnTo>
-                  <a:lnTo>
-                    <a:pt x="1097218" y="520173"/>
-                  </a:lnTo>
-                  <a:lnTo>
-                    <a:pt x="1131506" y="511881"/>
-                  </a:lnTo>
-                  <a:lnTo>
-                    <a:pt x="1165794" y="502703"/>
-                  </a:lnTo>
-                  <a:lnTo>
-                    <a:pt x="1200082" y="492628"/>
-                  </a:lnTo>
-                  <a:lnTo>
-                    <a:pt x="1234370" y="481649"/>
-                  </a:lnTo>
-                  <a:lnTo>
-                    <a:pt x="1268658" y="469765"/>
-                  </a:lnTo>
-                  <a:lnTo>
-                    <a:pt x="1302946" y="456979"/>
-                  </a:lnTo>
-                  <a:lnTo>
-                    <a:pt x="1337234" y="443295"/>
-                  </a:lnTo>
-                  <a:lnTo>
-                    <a:pt x="1371522" y="428722"/>
-                  </a:lnTo>
-                  <a:lnTo>
-                    <a:pt x="1405810" y="413272"/>
-                  </a:lnTo>
-                  <a:lnTo>
-                    <a:pt x="1440098" y="396957"/>
-                  </a:lnTo>
-                  <a:lnTo>
-                    <a:pt x="1474386" y="379791"/>
-                  </a:lnTo>
-                  <a:lnTo>
-                    <a:pt x="1508674" y="361789"/>
-                  </a:lnTo>
-                  <a:lnTo>
-                    <a:pt x="1542962" y="342965"/>
-                  </a:lnTo>
-                  <a:lnTo>
-                    <a:pt x="1577251" y="323336"/>
-                  </a:lnTo>
-                  <a:lnTo>
-                    <a:pt x="1611539" y="302914"/>
-                  </a:lnTo>
-                  <a:lnTo>
-                    <a:pt x="1645827" y="281715"/>
-                  </a:lnTo>
-                  <a:lnTo>
-                    <a:pt x="1680115" y="259750"/>
-                  </a:lnTo>
-                  <a:lnTo>
-                    <a:pt x="1714403" y="237031"/>
-                  </a:lnTo>
-                  <a:lnTo>
-                    <a:pt x="1748691" y="213569"/>
-                  </a:lnTo>
-                  <a:lnTo>
-                    <a:pt x="1782979" y="189374"/>
-                  </a:lnTo>
-                  <a:lnTo>
-                    <a:pt x="1817267" y="164453"/>
-                  </a:lnTo>
-                  <a:lnTo>
-                    <a:pt x="1851555" y="138813"/>
-                  </a:lnTo>
-                  <a:lnTo>
-                    <a:pt x="1885843" y="112461"/>
-                  </a:lnTo>
-                  <a:lnTo>
-                    <a:pt x="1920131" y="85401"/>
-                  </a:lnTo>
-                  <a:lnTo>
-                    <a:pt x="1954419" y="57636"/>
-                  </a:lnTo>
-                  <a:lnTo>
-                    <a:pt x="1988707" y="29168"/>
+                    <a:pt x="34288" y="377377"/>
+                  </a:lnTo>
+                  <a:lnTo>
+                    <a:pt x="68576" y="385778"/>
+                  </a:lnTo>
+                  <a:lnTo>
+                    <a:pt x="102864" y="393981"/>
+                  </a:lnTo>
+                  <a:lnTo>
+                    <a:pt x="137152" y="401977"/>
+                  </a:lnTo>
+                  <a:lnTo>
+                    <a:pt x="171440" y="409757"/>
+                  </a:lnTo>
+                  <a:lnTo>
+                    <a:pt x="205728" y="417311"/>
+                  </a:lnTo>
+                  <a:lnTo>
+                    <a:pt x="240016" y="424629"/>
+                  </a:lnTo>
+                  <a:lnTo>
+                    <a:pt x="274304" y="431699"/>
+                  </a:lnTo>
+                  <a:lnTo>
+                    <a:pt x="308592" y="438508"/>
+                  </a:lnTo>
+                  <a:lnTo>
+                    <a:pt x="342880" y="445042"/>
+                  </a:lnTo>
+                  <a:lnTo>
+                    <a:pt x="377168" y="451286"/>
+                  </a:lnTo>
+                  <a:lnTo>
+                    <a:pt x="411456" y="457222"/>
+                  </a:lnTo>
+                  <a:lnTo>
+                    <a:pt x="445744" y="462833"/>
+                  </a:lnTo>
+                  <a:lnTo>
+                    <a:pt x="480032" y="468100"/>
+                  </a:lnTo>
+                  <a:lnTo>
+                    <a:pt x="514320" y="473000"/>
+                  </a:lnTo>
+                  <a:lnTo>
+                    <a:pt x="548609" y="477512"/>
+                  </a:lnTo>
+                  <a:lnTo>
+                    <a:pt x="582897" y="481609"/>
+                  </a:lnTo>
+                  <a:lnTo>
+                    <a:pt x="617185" y="485266"/>
+                  </a:lnTo>
+                  <a:lnTo>
+                    <a:pt x="651473" y="488454"/>
+                  </a:lnTo>
+                  <a:lnTo>
+                    <a:pt x="685761" y="491143"/>
+                  </a:lnTo>
+                  <a:lnTo>
+                    <a:pt x="720049" y="493302"/>
+                  </a:lnTo>
+                  <a:lnTo>
+                    <a:pt x="754337" y="494898"/>
+                  </a:lnTo>
+                  <a:lnTo>
+                    <a:pt x="788625" y="495897"/>
+                  </a:lnTo>
+                  <a:lnTo>
+                    <a:pt x="822913" y="496263"/>
+                  </a:lnTo>
+                  <a:lnTo>
+                    <a:pt x="857201" y="495963"/>
+                  </a:lnTo>
+                  <a:lnTo>
+                    <a:pt x="891489" y="494959"/>
+                  </a:lnTo>
+                  <a:lnTo>
+                    <a:pt x="925777" y="493219"/>
+                  </a:lnTo>
+                  <a:lnTo>
+                    <a:pt x="960065" y="490710"/>
+                  </a:lnTo>
+                  <a:lnTo>
+                    <a:pt x="994353" y="487401"/>
+                  </a:lnTo>
+                  <a:lnTo>
+                    <a:pt x="1028641" y="483263"/>
+                  </a:lnTo>
+                  <a:lnTo>
+                    <a:pt x="1062930" y="478273"/>
+                  </a:lnTo>
+                  <a:lnTo>
+                    <a:pt x="1097218" y="472410"/>
+                  </a:lnTo>
+                  <a:lnTo>
+                    <a:pt x="1131506" y="465657"/>
+                  </a:lnTo>
+                  <a:lnTo>
+                    <a:pt x="1165794" y="458004"/>
+                  </a:lnTo>
+                  <a:lnTo>
+                    <a:pt x="1200082" y="449443"/>
+                  </a:lnTo>
+                  <a:lnTo>
+                    <a:pt x="1234370" y="439973"/>
+                  </a:lnTo>
+                  <a:lnTo>
+                    <a:pt x="1268658" y="429595"/>
+                  </a:lnTo>
+                  <a:lnTo>
+                    <a:pt x="1302946" y="418317"/>
+                  </a:lnTo>
+                  <a:lnTo>
+                    <a:pt x="1337234" y="406147"/>
+                  </a:lnTo>
+                  <a:lnTo>
+                    <a:pt x="1371522" y="393100"/>
+                  </a:lnTo>
+                  <a:lnTo>
+                    <a:pt x="1405810" y="379190"/>
+                  </a:lnTo>
+                  <a:lnTo>
+                    <a:pt x="1440098" y="364433"/>
+                  </a:lnTo>
+                  <a:lnTo>
+                    <a:pt x="1474386" y="348848"/>
+                  </a:lnTo>
+                  <a:lnTo>
+                    <a:pt x="1508674" y="332452"/>
+                  </a:lnTo>
+                  <a:lnTo>
+                    <a:pt x="1542962" y="315266"/>
+                  </a:lnTo>
+                  <a:lnTo>
+                    <a:pt x="1577251" y="297306"/>
+                  </a:lnTo>
+                  <a:lnTo>
+                    <a:pt x="1611539" y="278590"/>
+                  </a:lnTo>
+                  <a:lnTo>
+                    <a:pt x="1645827" y="259136"/>
+                  </a:lnTo>
+                  <a:lnTo>
+                    <a:pt x="1680115" y="238959"/>
+                  </a:lnTo>
+                  <a:lnTo>
+                    <a:pt x="1714403" y="218073"/>
+                  </a:lnTo>
+                  <a:lnTo>
+                    <a:pt x="1748691" y="196492"/>
+                  </a:lnTo>
+                  <a:lnTo>
+                    <a:pt x="1782979" y="174228"/>
+                  </a:lnTo>
+                  <a:lnTo>
+                    <a:pt x="1817267" y="151292"/>
+                  </a:lnTo>
+                  <a:lnTo>
+                    <a:pt x="1851555" y="127692"/>
+                  </a:lnTo>
+                  <a:lnTo>
+                    <a:pt x="1885843" y="103439"/>
+                  </a:lnTo>
+                  <a:lnTo>
+                    <a:pt x="1920131" y="78537"/>
+                  </a:lnTo>
+                  <a:lnTo>
+                    <a:pt x="1954419" y="52994"/>
+                  </a:lnTo>
+                  <a:lnTo>
+                    <a:pt x="1988707" y="26813"/>
                   </a:lnTo>
                   <a:lnTo>
                     <a:pt x="2022995" y="0"/>
@@ -8861,192 +8861,192 @@
           </p:nvSpPr>
           <p:spPr>
             <a:xfrm>
-              <a:off x="802365" y="4854664"/>
-              <a:ext cx="2022995" cy="322766"/>
+              <a:off x="802365" y="4838859"/>
+              <a:ext cx="2022995" cy="292228"/>
             </a:xfrm>
             <a:custGeom>
               <a:avLst/>
               <a:pathLst>
-                <a:path w="2022995" h="322766">
+                <a:path w="2022995" h="292228">
                   <a:moveTo>
-                    <a:pt x="2022995" y="27720"/>
+                    <a:pt x="2022995" y="48862"/>
                   </a:moveTo>
                   <a:lnTo>
-                    <a:pt x="1988707" y="24659"/>
-                  </a:lnTo>
-                  <a:lnTo>
-                    <a:pt x="1954419" y="21712"/>
-                  </a:lnTo>
-                  <a:lnTo>
-                    <a:pt x="1920131" y="18891"/>
-                  </a:lnTo>
-                  <a:lnTo>
-                    <a:pt x="1885843" y="16207"/>
-                  </a:lnTo>
-                  <a:lnTo>
-                    <a:pt x="1851555" y="13672"/>
-                  </a:lnTo>
-                  <a:lnTo>
-                    <a:pt x="1817267" y="11300"/>
-                  </a:lnTo>
-                  <a:lnTo>
-                    <a:pt x="1782979" y="9105"/>
-                  </a:lnTo>
-                  <a:lnTo>
-                    <a:pt x="1748691" y="7102"/>
-                  </a:lnTo>
-                  <a:lnTo>
-                    <a:pt x="1714403" y="5309"/>
-                  </a:lnTo>
-                  <a:lnTo>
-                    <a:pt x="1680115" y="3743"/>
-                  </a:lnTo>
-                  <a:lnTo>
-                    <a:pt x="1645827" y="2422"/>
-                  </a:lnTo>
-                  <a:lnTo>
-                    <a:pt x="1611539" y="1366"/>
-                  </a:lnTo>
-                  <a:lnTo>
-                    <a:pt x="1577251" y="596"/>
-                  </a:lnTo>
-                  <a:lnTo>
-                    <a:pt x="1542962" y="133"/>
-                  </a:lnTo>
-                  <a:lnTo>
-                    <a:pt x="1508674" y="0"/>
-                  </a:lnTo>
-                  <a:lnTo>
-                    <a:pt x="1474386" y="217"/>
-                  </a:lnTo>
-                  <a:lnTo>
-                    <a:pt x="1440098" y="809"/>
-                  </a:lnTo>
-                  <a:lnTo>
-                    <a:pt x="1405810" y="1796"/>
-                  </a:lnTo>
-                  <a:lnTo>
-                    <a:pt x="1371522" y="3199"/>
-                  </a:lnTo>
-                  <a:lnTo>
-                    <a:pt x="1337234" y="5039"/>
-                  </a:lnTo>
-                  <a:lnTo>
-                    <a:pt x="1302946" y="7333"/>
-                  </a:lnTo>
-                  <a:lnTo>
-                    <a:pt x="1268658" y="10096"/>
-                  </a:lnTo>
-                  <a:lnTo>
-                    <a:pt x="1234370" y="13340"/>
-                  </a:lnTo>
-                  <a:lnTo>
-                    <a:pt x="1200082" y="17075"/>
-                  </a:lnTo>
-                  <a:lnTo>
-                    <a:pt x="1165794" y="21304"/>
-                  </a:lnTo>
-                  <a:lnTo>
-                    <a:pt x="1131506" y="26027"/>
-                  </a:lnTo>
-                  <a:lnTo>
-                    <a:pt x="1097218" y="31241"/>
-                  </a:lnTo>
-                  <a:lnTo>
-                    <a:pt x="1062930" y="36935"/>
-                  </a:lnTo>
-                  <a:lnTo>
-                    <a:pt x="1028641" y="43096"/>
-                  </a:lnTo>
-                  <a:lnTo>
-                    <a:pt x="994353" y="49707"/>
-                  </a:lnTo>
-                  <a:lnTo>
-                    <a:pt x="960065" y="56746"/>
-                  </a:lnTo>
-                  <a:lnTo>
-                    <a:pt x="925777" y="64188"/>
-                  </a:lnTo>
-                  <a:lnTo>
-                    <a:pt x="891489" y="72006"/>
-                  </a:lnTo>
-                  <a:lnTo>
-                    <a:pt x="857201" y="80171"/>
-                  </a:lnTo>
-                  <a:lnTo>
-                    <a:pt x="822913" y="88652"/>
-                  </a:lnTo>
-                  <a:lnTo>
-                    <a:pt x="788625" y="97420"/>
-                  </a:lnTo>
-                  <a:lnTo>
-                    <a:pt x="754337" y="106442"/>
-                  </a:lnTo>
-                  <a:lnTo>
-                    <a:pt x="720049" y="115689"/>
-                  </a:lnTo>
-                  <a:lnTo>
-                    <a:pt x="685761" y="125132"/>
-                  </a:lnTo>
-                  <a:lnTo>
-                    <a:pt x="651473" y="134741"/>
-                  </a:lnTo>
-                  <a:lnTo>
-                    <a:pt x="617185" y="144490"/>
-                  </a:lnTo>
-                  <a:lnTo>
-                    <a:pt x="582897" y="154354"/>
-                  </a:lnTo>
-                  <a:lnTo>
-                    <a:pt x="548609" y="164310"/>
-                  </a:lnTo>
-                  <a:lnTo>
-                    <a:pt x="514320" y="174334"/>
-                  </a:lnTo>
-                  <a:lnTo>
-                    <a:pt x="480032" y="184408"/>
-                  </a:lnTo>
-                  <a:lnTo>
-                    <a:pt x="445744" y="194511"/>
-                  </a:lnTo>
-                  <a:lnTo>
-                    <a:pt x="411456" y="204629"/>
-                  </a:lnTo>
-                  <a:lnTo>
-                    <a:pt x="377168" y="214744"/>
-                  </a:lnTo>
-                  <a:lnTo>
-                    <a:pt x="342880" y="224844"/>
-                  </a:lnTo>
-                  <a:lnTo>
-                    <a:pt x="308592" y="234915"/>
-                  </a:lnTo>
-                  <a:lnTo>
-                    <a:pt x="274304" y="244947"/>
-                  </a:lnTo>
-                  <a:lnTo>
-                    <a:pt x="240016" y="254929"/>
-                  </a:lnTo>
-                  <a:lnTo>
-                    <a:pt x="205728" y="264852"/>
-                  </a:lnTo>
-                  <a:lnTo>
-                    <a:pt x="171440" y="274708"/>
-                  </a:lnTo>
-                  <a:lnTo>
-                    <a:pt x="137152" y="284491"/>
-                  </a:lnTo>
-                  <a:lnTo>
-                    <a:pt x="102864" y="294193"/>
-                  </a:lnTo>
-                  <a:lnTo>
-                    <a:pt x="68576" y="303810"/>
-                  </a:lnTo>
-                  <a:lnTo>
-                    <a:pt x="34288" y="313335"/>
-                  </a:lnTo>
-                  <a:lnTo>
-                    <a:pt x="0" y="322766"/>
+                    <a:pt x="1988707" y="44597"/>
+                  </a:lnTo>
+                  <a:lnTo>
+                    <a:pt x="1954419" y="40436"/>
+                  </a:lnTo>
+                  <a:lnTo>
+                    <a:pt x="1920131" y="36388"/>
+                  </a:lnTo>
+                  <a:lnTo>
+                    <a:pt x="1885843" y="32466"/>
+                  </a:lnTo>
+                  <a:lnTo>
+                    <a:pt x="1851555" y="28683"/>
+                  </a:lnTo>
+                  <a:lnTo>
+                    <a:pt x="1817267" y="25053"/>
+                  </a:lnTo>
+                  <a:lnTo>
+                    <a:pt x="1782979" y="21590"/>
+                  </a:lnTo>
+                  <a:lnTo>
+                    <a:pt x="1748691" y="18311"/>
+                  </a:lnTo>
+                  <a:lnTo>
+                    <a:pt x="1714403" y="15233"/>
+                  </a:lnTo>
+                  <a:lnTo>
+                    <a:pt x="1680115" y="12376"/>
+                  </a:lnTo>
+                  <a:lnTo>
+                    <a:pt x="1645827" y="9757"/>
+                  </a:lnTo>
+                  <a:lnTo>
+                    <a:pt x="1611539" y="7399"/>
+                  </a:lnTo>
+                  <a:lnTo>
+                    <a:pt x="1577251" y="5324"/>
+                  </a:lnTo>
+                  <a:lnTo>
+                    <a:pt x="1542962" y="3553"/>
+                  </a:lnTo>
+                  <a:lnTo>
+                    <a:pt x="1508674" y="2111"/>
+                  </a:lnTo>
+                  <a:lnTo>
+                    <a:pt x="1474386" y="1022"/>
+                  </a:lnTo>
+                  <a:lnTo>
+                    <a:pt x="1440098" y="310"/>
+                  </a:lnTo>
+                  <a:lnTo>
+                    <a:pt x="1405810" y="0"/>
+                  </a:lnTo>
+                  <a:lnTo>
+                    <a:pt x="1371522" y="113"/>
+                  </a:lnTo>
+                  <a:lnTo>
+                    <a:pt x="1337234" y="674"/>
+                  </a:lnTo>
+                  <a:lnTo>
+                    <a:pt x="1302946" y="1701"/>
+                  </a:lnTo>
+                  <a:lnTo>
+                    <a:pt x="1268658" y="3214"/>
+                  </a:lnTo>
+                  <a:lnTo>
+                    <a:pt x="1234370" y="5227"/>
+                  </a:lnTo>
+                  <a:lnTo>
+                    <a:pt x="1200082" y="7752"/>
+                  </a:lnTo>
+                  <a:lnTo>
+                    <a:pt x="1165794" y="10795"/>
+                  </a:lnTo>
+                  <a:lnTo>
+                    <a:pt x="1131506" y="14361"/>
+                  </a:lnTo>
+                  <a:lnTo>
+                    <a:pt x="1097218" y="18446"/>
+                  </a:lnTo>
+                  <a:lnTo>
+                    <a:pt x="1062930" y="23044"/>
+                  </a:lnTo>
+                  <a:lnTo>
+                    <a:pt x="1028641" y="28144"/>
+                  </a:lnTo>
+                  <a:lnTo>
+                    <a:pt x="994353" y="33730"/>
+                  </a:lnTo>
+                  <a:lnTo>
+                    <a:pt x="960065" y="39781"/>
+                  </a:lnTo>
+                  <a:lnTo>
+                    <a:pt x="925777" y="46273"/>
+                  </a:lnTo>
+                  <a:lnTo>
+                    <a:pt x="891489" y="53182"/>
+                  </a:lnTo>
+                  <a:lnTo>
+                    <a:pt x="857201" y="60477"/>
+                  </a:lnTo>
+                  <a:lnTo>
+                    <a:pt x="822913" y="68129"/>
+                  </a:lnTo>
+                  <a:lnTo>
+                    <a:pt x="788625" y="76106"/>
+                  </a:lnTo>
+                  <a:lnTo>
+                    <a:pt x="754337" y="84379"/>
+                  </a:lnTo>
+                  <a:lnTo>
+                    <a:pt x="720049" y="92914"/>
+                  </a:lnTo>
+                  <a:lnTo>
+                    <a:pt x="685761" y="101683"/>
+                  </a:lnTo>
+                  <a:lnTo>
+                    <a:pt x="651473" y="110656"/>
+                  </a:lnTo>
+                  <a:lnTo>
+                    <a:pt x="617185" y="119806"/>
+                  </a:lnTo>
+                  <a:lnTo>
+                    <a:pt x="582897" y="129105"/>
+                  </a:lnTo>
+                  <a:lnTo>
+                    <a:pt x="548609" y="138529"/>
+                  </a:lnTo>
+                  <a:lnTo>
+                    <a:pt x="514320" y="148055"/>
+                  </a:lnTo>
+                  <a:lnTo>
+                    <a:pt x="480032" y="157662"/>
+                  </a:lnTo>
+                  <a:lnTo>
+                    <a:pt x="445744" y="167330"/>
+                  </a:lnTo>
+                  <a:lnTo>
+                    <a:pt x="411456" y="177041"/>
+                  </a:lnTo>
+                  <a:lnTo>
+                    <a:pt x="377168" y="186778"/>
+                  </a:lnTo>
+                  <a:lnTo>
+                    <a:pt x="342880" y="196527"/>
+                  </a:lnTo>
+                  <a:lnTo>
+                    <a:pt x="308592" y="206274"/>
+                  </a:lnTo>
+                  <a:lnTo>
+                    <a:pt x="274304" y="216006"/>
+                  </a:lnTo>
+                  <a:lnTo>
+                    <a:pt x="240016" y="225713"/>
+                  </a:lnTo>
+                  <a:lnTo>
+                    <a:pt x="205728" y="235384"/>
+                  </a:lnTo>
+                  <a:lnTo>
+                    <a:pt x="171440" y="245011"/>
+                  </a:lnTo>
+                  <a:lnTo>
+                    <a:pt x="137152" y="254585"/>
+                  </a:lnTo>
+                  <a:lnTo>
+                    <a:pt x="102864" y="264100"/>
+                  </a:lnTo>
+                  <a:lnTo>
+                    <a:pt x="68576" y="273549"/>
+                  </a:lnTo>
+                  <a:lnTo>
+                    <a:pt x="34288" y="282927"/>
+                  </a:lnTo>
+                  <a:lnTo>
+                    <a:pt x="0" y="292228"/>
                   </a:lnTo>
                 </a:path>
               </a:pathLst>
@@ -9066,189 +9066,189 @@
           </p:nvSpPr>
           <p:spPr>
             <a:xfrm>
-              <a:off x="802365" y="4520538"/>
-              <a:ext cx="2022995" cy="1097617"/>
+              <a:off x="802365" y="4505555"/>
+              <a:ext cx="2022995" cy="1116259"/>
             </a:xfrm>
             <a:custGeom>
               <a:avLst/>
               <a:pathLst>
-                <a:path w="2022995" h="1097617">
+                <a:path w="2022995" h="1116259">
                   <a:moveTo>
-                    <a:pt x="0" y="1097617"/>
+                    <a:pt x="0" y="1116259"/>
                   </a:moveTo>
                   <a:lnTo>
-                    <a:pt x="34288" y="1092148"/>
-                  </a:lnTo>
-                  <a:lnTo>
-                    <a:pt x="68576" y="1086477"/>
-                  </a:lnTo>
-                  <a:lnTo>
-                    <a:pt x="102864" y="1080599"/>
-                  </a:lnTo>
-                  <a:lnTo>
-                    <a:pt x="137152" y="1074506"/>
-                  </a:lnTo>
-                  <a:lnTo>
-                    <a:pt x="171440" y="1068189"/>
-                  </a:lnTo>
-                  <a:lnTo>
-                    <a:pt x="205728" y="1061641"/>
-                  </a:lnTo>
-                  <a:lnTo>
-                    <a:pt x="240016" y="1054853"/>
-                  </a:lnTo>
-                  <a:lnTo>
-                    <a:pt x="274304" y="1047815"/>
-                  </a:lnTo>
-                  <a:lnTo>
-                    <a:pt x="308592" y="1040520"/>
-                  </a:lnTo>
-                  <a:lnTo>
-                    <a:pt x="342880" y="1032958"/>
-                  </a:lnTo>
-                  <a:lnTo>
-                    <a:pt x="377168" y="1025118"/>
-                  </a:lnTo>
-                  <a:lnTo>
-                    <a:pt x="411456" y="1016992"/>
-                  </a:lnTo>
-                  <a:lnTo>
-                    <a:pt x="445744" y="1008567"/>
-                  </a:lnTo>
-                  <a:lnTo>
-                    <a:pt x="480032" y="999834"/>
-                  </a:lnTo>
-                  <a:lnTo>
-                    <a:pt x="514320" y="990780"/>
-                  </a:lnTo>
-                  <a:lnTo>
-                    <a:pt x="548609" y="981395"/>
-                  </a:lnTo>
-                  <a:lnTo>
-                    <a:pt x="582897" y="971666"/>
-                  </a:lnTo>
-                  <a:lnTo>
-                    <a:pt x="617185" y="961581"/>
-                  </a:lnTo>
-                  <a:lnTo>
-                    <a:pt x="651473" y="951126"/>
-                  </a:lnTo>
-                  <a:lnTo>
-                    <a:pt x="685761" y="940288"/>
-                  </a:lnTo>
-                  <a:lnTo>
-                    <a:pt x="720049" y="929053"/>
-                  </a:lnTo>
-                  <a:lnTo>
-                    <a:pt x="754337" y="917406"/>
-                  </a:lnTo>
-                  <a:lnTo>
-                    <a:pt x="788625" y="905333"/>
-                  </a:lnTo>
-                  <a:lnTo>
-                    <a:pt x="822913" y="892817"/>
-                  </a:lnTo>
-                  <a:lnTo>
-                    <a:pt x="857201" y="879843"/>
-                  </a:lnTo>
-                  <a:lnTo>
-                    <a:pt x="891489" y="866394"/>
-                  </a:lnTo>
-                  <a:lnTo>
-                    <a:pt x="925777" y="852452"/>
-                  </a:lnTo>
-                  <a:lnTo>
-                    <a:pt x="960065" y="838000"/>
-                  </a:lnTo>
-                  <a:lnTo>
-                    <a:pt x="994353" y="823018"/>
-                  </a:lnTo>
-                  <a:lnTo>
-                    <a:pt x="1028641" y="807488"/>
-                  </a:lnTo>
-                  <a:lnTo>
-                    <a:pt x="1062930" y="791389"/>
-                  </a:lnTo>
-                  <a:lnTo>
-                    <a:pt x="1097218" y="774701"/>
-                  </a:lnTo>
-                  <a:lnTo>
-                    <a:pt x="1131506" y="757401"/>
-                  </a:lnTo>
-                  <a:lnTo>
-                    <a:pt x="1165794" y="739469"/>
-                  </a:lnTo>
-                  <a:lnTo>
-                    <a:pt x="1200082" y="720879"/>
-                  </a:lnTo>
-                  <a:lnTo>
-                    <a:pt x="1234370" y="701609"/>
-                  </a:lnTo>
-                  <a:lnTo>
-                    <a:pt x="1268658" y="681634"/>
-                  </a:lnTo>
-                  <a:lnTo>
-                    <a:pt x="1302946" y="660928"/>
-                  </a:lnTo>
-                  <a:lnTo>
-                    <a:pt x="1337234" y="639464"/>
-                  </a:lnTo>
-                  <a:lnTo>
-                    <a:pt x="1371522" y="617214"/>
-                  </a:lnTo>
-                  <a:lnTo>
-                    <a:pt x="1405810" y="594150"/>
-                  </a:lnTo>
-                  <a:lnTo>
-                    <a:pt x="1440098" y="570243"/>
-                  </a:lnTo>
-                  <a:lnTo>
-                    <a:pt x="1474386" y="545460"/>
-                  </a:lnTo>
-                  <a:lnTo>
-                    <a:pt x="1508674" y="519771"/>
-                  </a:lnTo>
-                  <a:lnTo>
-                    <a:pt x="1542962" y="493142"/>
-                  </a:lnTo>
-                  <a:lnTo>
-                    <a:pt x="1577251" y="465540"/>
-                  </a:lnTo>
-                  <a:lnTo>
-                    <a:pt x="1611539" y="436927"/>
-                  </a:lnTo>
-                  <a:lnTo>
-                    <a:pt x="1645827" y="407269"/>
-                  </a:lnTo>
-                  <a:lnTo>
-                    <a:pt x="1680115" y="376525"/>
-                  </a:lnTo>
-                  <a:lnTo>
-                    <a:pt x="1714403" y="344658"/>
-                  </a:lnTo>
-                  <a:lnTo>
-                    <a:pt x="1748691" y="311626"/>
-                  </a:lnTo>
-                  <a:lnTo>
-                    <a:pt x="1782979" y="277387"/>
-                  </a:lnTo>
-                  <a:lnTo>
-                    <a:pt x="1817267" y="241896"/>
-                  </a:lnTo>
-                  <a:lnTo>
-                    <a:pt x="1851555" y="205108"/>
-                  </a:lnTo>
-                  <a:lnTo>
-                    <a:pt x="1885843" y="166976"/>
-                  </a:lnTo>
-                  <a:lnTo>
-                    <a:pt x="1920131" y="127450"/>
-                  </a:lnTo>
-                  <a:lnTo>
-                    <a:pt x="1954419" y="86481"/>
-                  </a:lnTo>
-                  <a:lnTo>
-                    <a:pt x="1988707" y="44016"/>
+                    <a:pt x="34288" y="1110947"/>
+                  </a:lnTo>
+                  <a:lnTo>
+                    <a:pt x="68576" y="1105435"/>
+                  </a:lnTo>
+                  <a:lnTo>
+                    <a:pt x="102864" y="1099714"/>
+                  </a:lnTo>
+                  <a:lnTo>
+                    <a:pt x="137152" y="1093776"/>
+                  </a:lnTo>
+                  <a:lnTo>
+                    <a:pt x="171440" y="1087613"/>
+                  </a:lnTo>
+                  <a:lnTo>
+                    <a:pt x="205728" y="1081216"/>
+                  </a:lnTo>
+                  <a:lnTo>
+                    <a:pt x="240016" y="1074577"/>
+                  </a:lnTo>
+                  <a:lnTo>
+                    <a:pt x="274304" y="1067687"/>
+                  </a:lnTo>
+                  <a:lnTo>
+                    <a:pt x="308592" y="1060535"/>
+                  </a:lnTo>
+                  <a:lnTo>
+                    <a:pt x="342880" y="1053113"/>
+                  </a:lnTo>
+                  <a:lnTo>
+                    <a:pt x="377168" y="1045410"/>
+                  </a:lnTo>
+                  <a:lnTo>
+                    <a:pt x="411456" y="1037414"/>
+                  </a:lnTo>
+                  <a:lnTo>
+                    <a:pt x="445744" y="1029116"/>
+                  </a:lnTo>
+                  <a:lnTo>
+                    <a:pt x="480032" y="1020503"/>
+                  </a:lnTo>
+                  <a:lnTo>
+                    <a:pt x="514320" y="1011564"/>
+                  </a:lnTo>
+                  <a:lnTo>
+                    <a:pt x="548609" y="1002287"/>
+                  </a:lnTo>
+                  <a:lnTo>
+                    <a:pt x="582897" y="992658"/>
+                  </a:lnTo>
+                  <a:lnTo>
+                    <a:pt x="617185" y="982665"/>
+                  </a:lnTo>
+                  <a:lnTo>
+                    <a:pt x="651473" y="972293"/>
+                  </a:lnTo>
+                  <a:lnTo>
+                    <a:pt x="685761" y="961528"/>
+                  </a:lnTo>
+                  <a:lnTo>
+                    <a:pt x="720049" y="950356"/>
+                  </a:lnTo>
+                  <a:lnTo>
+                    <a:pt x="754337" y="938760"/>
+                  </a:lnTo>
+                  <a:lnTo>
+                    <a:pt x="788625" y="926725"/>
+                  </a:lnTo>
+                  <a:lnTo>
+                    <a:pt x="822913" y="914235"/>
+                  </a:lnTo>
+                  <a:lnTo>
+                    <a:pt x="857201" y="901272"/>
+                  </a:lnTo>
+                  <a:lnTo>
+                    <a:pt x="891489" y="887818"/>
+                  </a:lnTo>
+                  <a:lnTo>
+                    <a:pt x="925777" y="873854"/>
+                  </a:lnTo>
+                  <a:lnTo>
+                    <a:pt x="960065" y="859362"/>
+                  </a:lnTo>
+                  <a:lnTo>
+                    <a:pt x="994353" y="844321"/>
+                  </a:lnTo>
+                  <a:lnTo>
+                    <a:pt x="1028641" y="828711"/>
+                  </a:lnTo>
+                  <a:lnTo>
+                    <a:pt x="1062930" y="812510"/>
+                  </a:lnTo>
+                  <a:lnTo>
+                    <a:pt x="1097218" y="795696"/>
+                  </a:lnTo>
+                  <a:lnTo>
+                    <a:pt x="1131506" y="778245"/>
+                  </a:lnTo>
+                  <a:lnTo>
+                    <a:pt x="1165794" y="760134"/>
+                  </a:lnTo>
+                  <a:lnTo>
+                    <a:pt x="1200082" y="741338"/>
+                  </a:lnTo>
+                  <a:lnTo>
+                    <a:pt x="1234370" y="721830"/>
+                  </a:lnTo>
+                  <a:lnTo>
+                    <a:pt x="1268658" y="701584"/>
+                  </a:lnTo>
+                  <a:lnTo>
+                    <a:pt x="1302946" y="680572"/>
+                  </a:lnTo>
+                  <a:lnTo>
+                    <a:pt x="1337234" y="658766"/>
+                  </a:lnTo>
+                  <a:lnTo>
+                    <a:pt x="1371522" y="636134"/>
+                  </a:lnTo>
+                  <a:lnTo>
+                    <a:pt x="1405810" y="612646"/>
+                  </a:lnTo>
+                  <a:lnTo>
+                    <a:pt x="1440098" y="588270"/>
+                  </a:lnTo>
+                  <a:lnTo>
+                    <a:pt x="1474386" y="562972"/>
+                  </a:lnTo>
+                  <a:lnTo>
+                    <a:pt x="1508674" y="536717"/>
+                  </a:lnTo>
+                  <a:lnTo>
+                    <a:pt x="1542962" y="509469"/>
+                  </a:lnTo>
+                  <a:lnTo>
+                    <a:pt x="1577251" y="481192"/>
+                  </a:lnTo>
+                  <a:lnTo>
+                    <a:pt x="1611539" y="451845"/>
+                  </a:lnTo>
+                  <a:lnTo>
+                    <a:pt x="1645827" y="421389"/>
+                  </a:lnTo>
+                  <a:lnTo>
+                    <a:pt x="1680115" y="389782"/>
+                  </a:lnTo>
+                  <a:lnTo>
+                    <a:pt x="1714403" y="356980"/>
+                  </a:lnTo>
+                  <a:lnTo>
+                    <a:pt x="1748691" y="322938"/>
+                  </a:lnTo>
+                  <a:lnTo>
+                    <a:pt x="1782979" y="287611"/>
+                  </a:lnTo>
+                  <a:lnTo>
+                    <a:pt x="1817267" y="250949"/>
+                  </a:lnTo>
+                  <a:lnTo>
+                    <a:pt x="1851555" y="212902"/>
+                  </a:lnTo>
+                  <a:lnTo>
+                    <a:pt x="1885843" y="173418"/>
+                  </a:lnTo>
+                  <a:lnTo>
+                    <a:pt x="1920131" y="132442"/>
+                  </a:lnTo>
+                  <a:lnTo>
+                    <a:pt x="1954419" y="89920"/>
+                  </a:lnTo>
+                  <a:lnTo>
+                    <a:pt x="1988707" y="45793"/>
                   </a:lnTo>
                   <a:lnTo>
                     <a:pt x="2022995" y="0"/>
@@ -9280,189 +9280,189 @@
           </p:nvSpPr>
           <p:spPr>
             <a:xfrm>
-              <a:off x="802365" y="4490654"/>
-              <a:ext cx="2022995" cy="920532"/>
+              <a:off x="802365" y="4485037"/>
+              <a:ext cx="2022995" cy="926111"/>
             </a:xfrm>
             <a:custGeom>
               <a:avLst/>
               <a:pathLst>
-                <a:path w="2022995" h="920532">
+                <a:path w="2022995" h="926111">
                   <a:moveTo>
-                    <a:pt x="0" y="920532"/>
+                    <a:pt x="0" y="926111"/>
                   </a:moveTo>
                   <a:lnTo>
-                    <a:pt x="34288" y="912736"/>
-                  </a:lnTo>
-                  <a:lnTo>
-                    <a:pt x="68576" y="904770"/>
-                  </a:lnTo>
-                  <a:lnTo>
-                    <a:pt x="102864" y="896630"/>
-                  </a:lnTo>
-                  <a:lnTo>
-                    <a:pt x="137152" y="888312"/>
-                  </a:lnTo>
-                  <a:lnTo>
-                    <a:pt x="171440" y="879811"/>
-                  </a:lnTo>
-                  <a:lnTo>
-                    <a:pt x="205728" y="871125"/>
-                  </a:lnTo>
-                  <a:lnTo>
-                    <a:pt x="240016" y="862249"/>
-                  </a:lnTo>
-                  <a:lnTo>
-                    <a:pt x="274304" y="853179"/>
-                  </a:lnTo>
-                  <a:lnTo>
-                    <a:pt x="308592" y="843910"/>
-                  </a:lnTo>
-                  <a:lnTo>
-                    <a:pt x="342880" y="834439"/>
-                  </a:lnTo>
-                  <a:lnTo>
-                    <a:pt x="377168" y="824761"/>
-                  </a:lnTo>
-                  <a:lnTo>
-                    <a:pt x="411456" y="814871"/>
-                  </a:lnTo>
-                  <a:lnTo>
-                    <a:pt x="445744" y="804764"/>
-                  </a:lnTo>
-                  <a:lnTo>
-                    <a:pt x="480032" y="794437"/>
-                  </a:lnTo>
-                  <a:lnTo>
-                    <a:pt x="514320" y="783884"/>
-                  </a:lnTo>
-                  <a:lnTo>
-                    <a:pt x="548609" y="773100"/>
-                  </a:lnTo>
-                  <a:lnTo>
-                    <a:pt x="582897" y="762081"/>
-                  </a:lnTo>
-                  <a:lnTo>
-                    <a:pt x="617185" y="750820"/>
-                  </a:lnTo>
-                  <a:lnTo>
-                    <a:pt x="651473" y="739313"/>
-                  </a:lnTo>
-                  <a:lnTo>
-                    <a:pt x="685761" y="727555"/>
-                  </a:lnTo>
-                  <a:lnTo>
-                    <a:pt x="720049" y="715540"/>
-                  </a:lnTo>
-                  <a:lnTo>
-                    <a:pt x="754337" y="703262"/>
-                  </a:lnTo>
-                  <a:lnTo>
-                    <a:pt x="788625" y="690716"/>
-                  </a:lnTo>
-                  <a:lnTo>
-                    <a:pt x="822913" y="677895"/>
-                  </a:lnTo>
-                  <a:lnTo>
-                    <a:pt x="857201" y="664795"/>
-                  </a:lnTo>
-                  <a:lnTo>
-                    <a:pt x="891489" y="651408"/>
-                  </a:lnTo>
-                  <a:lnTo>
-                    <a:pt x="925777" y="637728"/>
-                  </a:lnTo>
-                  <a:lnTo>
-                    <a:pt x="960065" y="623749"/>
-                  </a:lnTo>
-                  <a:lnTo>
-                    <a:pt x="994353" y="609466"/>
-                  </a:lnTo>
-                  <a:lnTo>
-                    <a:pt x="1028641" y="594869"/>
-                  </a:lnTo>
-                  <a:lnTo>
-                    <a:pt x="1062930" y="579954"/>
-                  </a:lnTo>
-                  <a:lnTo>
-                    <a:pt x="1097218" y="564714"/>
-                  </a:lnTo>
-                  <a:lnTo>
-                    <a:pt x="1131506" y="549140"/>
-                  </a:lnTo>
-                  <a:lnTo>
-                    <a:pt x="1165794" y="533226"/>
-                  </a:lnTo>
-                  <a:lnTo>
-                    <a:pt x="1200082" y="516964"/>
-                  </a:lnTo>
-                  <a:lnTo>
-                    <a:pt x="1234370" y="500347"/>
-                  </a:lnTo>
-                  <a:lnTo>
-                    <a:pt x="1268658" y="483367"/>
-                  </a:lnTo>
-                  <a:lnTo>
-                    <a:pt x="1302946" y="466017"/>
-                  </a:lnTo>
-                  <a:lnTo>
-                    <a:pt x="1337234" y="448287"/>
-                  </a:lnTo>
-                  <a:lnTo>
-                    <a:pt x="1371522" y="430170"/>
-                  </a:lnTo>
-                  <a:lnTo>
-                    <a:pt x="1405810" y="411658"/>
-                  </a:lnTo>
-                  <a:lnTo>
-                    <a:pt x="1440098" y="392741"/>
-                  </a:lnTo>
-                  <a:lnTo>
-                    <a:pt x="1474386" y="373412"/>
-                  </a:lnTo>
-                  <a:lnTo>
-                    <a:pt x="1508674" y="353660"/>
-                  </a:lnTo>
-                  <a:lnTo>
-                    <a:pt x="1542962" y="333477"/>
-                  </a:lnTo>
-                  <a:lnTo>
-                    <a:pt x="1577251" y="312854"/>
-                  </a:lnTo>
-                  <a:lnTo>
-                    <a:pt x="1611539" y="291780"/>
-                  </a:lnTo>
-                  <a:lnTo>
-                    <a:pt x="1645827" y="270246"/>
-                  </a:lnTo>
-                  <a:lnTo>
-                    <a:pt x="1680115" y="248243"/>
-                  </a:lnTo>
-                  <a:lnTo>
-                    <a:pt x="1714403" y="225759"/>
-                  </a:lnTo>
-                  <a:lnTo>
-                    <a:pt x="1748691" y="202785"/>
-                  </a:lnTo>
-                  <a:lnTo>
-                    <a:pt x="1782979" y="179309"/>
-                  </a:lnTo>
-                  <a:lnTo>
-                    <a:pt x="1817267" y="155322"/>
-                  </a:lnTo>
-                  <a:lnTo>
-                    <a:pt x="1851555" y="130811"/>
-                  </a:lnTo>
-                  <a:lnTo>
-                    <a:pt x="1885843" y="105765"/>
-                  </a:lnTo>
-                  <a:lnTo>
-                    <a:pt x="1920131" y="80173"/>
-                  </a:lnTo>
-                  <a:lnTo>
-                    <a:pt x="1954419" y="54023"/>
-                  </a:lnTo>
-                  <a:lnTo>
-                    <a:pt x="1988707" y="27303"/>
+                    <a:pt x="34288" y="918339"/>
+                  </a:lnTo>
+                  <a:lnTo>
+                    <a:pt x="68576" y="910396"/>
+                  </a:lnTo>
+                  <a:lnTo>
+                    <a:pt x="102864" y="902276"/>
+                  </a:lnTo>
+                  <a:lnTo>
+                    <a:pt x="137152" y="893977"/>
+                  </a:lnTo>
+                  <a:lnTo>
+                    <a:pt x="171440" y="885494"/>
+                  </a:lnTo>
+                  <a:lnTo>
+                    <a:pt x="205728" y="876823"/>
+                  </a:lnTo>
+                  <a:lnTo>
+                    <a:pt x="240016" y="867961"/>
+                  </a:lnTo>
+                  <a:lnTo>
+                    <a:pt x="274304" y="858902"/>
+                  </a:lnTo>
+                  <a:lnTo>
+                    <a:pt x="308592" y="849643"/>
+                  </a:lnTo>
+                  <a:lnTo>
+                    <a:pt x="342880" y="840178"/>
+                  </a:lnTo>
+                  <a:lnTo>
+                    <a:pt x="377168" y="830504"/>
+                  </a:lnTo>
+                  <a:lnTo>
+                    <a:pt x="411456" y="820616"/>
+                  </a:lnTo>
+                  <a:lnTo>
+                    <a:pt x="445744" y="810510"/>
+                  </a:lnTo>
+                  <a:lnTo>
+                    <a:pt x="480032" y="800179"/>
+                  </a:lnTo>
+                  <a:lnTo>
+                    <a:pt x="514320" y="789620"/>
+                  </a:lnTo>
+                  <a:lnTo>
+                    <a:pt x="548609" y="778828"/>
+                  </a:lnTo>
+                  <a:lnTo>
+                    <a:pt x="582897" y="767796"/>
+                  </a:lnTo>
+                  <a:lnTo>
+                    <a:pt x="617185" y="756520"/>
+                  </a:lnTo>
+                  <a:lnTo>
+                    <a:pt x="651473" y="744995"/>
+                  </a:lnTo>
+                  <a:lnTo>
+                    <a:pt x="685761" y="733215"/>
+                  </a:lnTo>
+                  <a:lnTo>
+                    <a:pt x="720049" y="721174"/>
+                  </a:lnTo>
+                  <a:lnTo>
+                    <a:pt x="754337" y="708867"/>
+                  </a:lnTo>
+                  <a:lnTo>
+                    <a:pt x="788625" y="696288"/>
+                  </a:lnTo>
+                  <a:lnTo>
+                    <a:pt x="822913" y="683430"/>
+                  </a:lnTo>
+                  <a:lnTo>
+                    <a:pt x="857201" y="670288"/>
+                  </a:lnTo>
+                  <a:lnTo>
+                    <a:pt x="891489" y="656855"/>
+                  </a:lnTo>
+                  <a:lnTo>
+                    <a:pt x="925777" y="643125"/>
+                  </a:lnTo>
+                  <a:lnTo>
+                    <a:pt x="960065" y="629092"/>
+                  </a:lnTo>
+                  <a:lnTo>
+                    <a:pt x="994353" y="614748"/>
+                  </a:lnTo>
+                  <a:lnTo>
+                    <a:pt x="1028641" y="600086"/>
+                  </a:lnTo>
+                  <a:lnTo>
+                    <a:pt x="1062930" y="585101"/>
+                  </a:lnTo>
+                  <a:lnTo>
+                    <a:pt x="1097218" y="569784"/>
+                  </a:lnTo>
+                  <a:lnTo>
+                    <a:pt x="1131506" y="554129"/>
+                  </a:lnTo>
+                  <a:lnTo>
+                    <a:pt x="1165794" y="538127"/>
+                  </a:lnTo>
+                  <a:lnTo>
+                    <a:pt x="1200082" y="521771"/>
+                  </a:lnTo>
+                  <a:lnTo>
+                    <a:pt x="1234370" y="505054"/>
+                  </a:lnTo>
+                  <a:lnTo>
+                    <a:pt x="1268658" y="487968"/>
+                  </a:lnTo>
+                  <a:lnTo>
+                    <a:pt x="1302946" y="470503"/>
+                  </a:lnTo>
+                  <a:lnTo>
+                    <a:pt x="1337234" y="452653"/>
+                  </a:lnTo>
+                  <a:lnTo>
+                    <a:pt x="1371522" y="434408"/>
+                  </a:lnTo>
+                  <a:lnTo>
+                    <a:pt x="1405810" y="415760"/>
+                  </a:lnTo>
+                  <a:lnTo>
+                    <a:pt x="1440098" y="396700"/>
+                  </a:lnTo>
+                  <a:lnTo>
+                    <a:pt x="1474386" y="377218"/>
+                  </a:lnTo>
+                  <a:lnTo>
+                    <a:pt x="1508674" y="357306"/>
+                  </a:lnTo>
+                  <a:lnTo>
+                    <a:pt x="1542962" y="336954"/>
+                  </a:lnTo>
+                  <a:lnTo>
+                    <a:pt x="1577251" y="316153"/>
+                  </a:lnTo>
+                  <a:lnTo>
+                    <a:pt x="1611539" y="294891"/>
+                  </a:lnTo>
+                  <a:lnTo>
+                    <a:pt x="1645827" y="273161"/>
+                  </a:lnTo>
+                  <a:lnTo>
+                    <a:pt x="1680115" y="250950"/>
+                  </a:lnTo>
+                  <a:lnTo>
+                    <a:pt x="1714403" y="228249"/>
+                  </a:lnTo>
+                  <a:lnTo>
+                    <a:pt x="1748691" y="205046"/>
+                  </a:lnTo>
+                  <a:lnTo>
+                    <a:pt x="1782979" y="181331"/>
+                  </a:lnTo>
+                  <a:lnTo>
+                    <a:pt x="1817267" y="157092"/>
+                  </a:lnTo>
+                  <a:lnTo>
+                    <a:pt x="1851555" y="132318"/>
+                  </a:lnTo>
+                  <a:lnTo>
+                    <a:pt x="1885843" y="106997"/>
+                  </a:lnTo>
+                  <a:lnTo>
+                    <a:pt x="1920131" y="81117"/>
+                  </a:lnTo>
+                  <a:lnTo>
+                    <a:pt x="1954419" y="54666"/>
+                  </a:lnTo>
+                  <a:lnTo>
+                    <a:pt x="1988707" y="27631"/>
                   </a:lnTo>
                   <a:lnTo>
                     <a:pt x="2022995" y="0"/>
@@ -9494,189 +9494,189 @@
           </p:nvSpPr>
           <p:spPr>
             <a:xfrm>
-              <a:off x="802365" y="4456946"/>
-              <a:ext cx="2022995" cy="383102"/>
+              <a:off x="802365" y="4461328"/>
+              <a:ext cx="2022995" cy="306654"/>
             </a:xfrm>
             <a:custGeom>
               <a:avLst/>
               <a:pathLst>
-                <a:path w="2022995" h="383102">
+                <a:path w="2022995" h="306654">
                   <a:moveTo>
-                    <a:pt x="0" y="383102"/>
+                    <a:pt x="0" y="306654"/>
                   </a:moveTo>
                   <a:lnTo>
-                    <a:pt x="34288" y="377649"/>
-                  </a:lnTo>
-                  <a:lnTo>
-                    <a:pt x="68576" y="372164"/>
-                  </a:lnTo>
-                  <a:lnTo>
-                    <a:pt x="102864" y="366647"/>
-                  </a:lnTo>
-                  <a:lnTo>
-                    <a:pt x="137152" y="361098"/>
-                  </a:lnTo>
-                  <a:lnTo>
-                    <a:pt x="171440" y="355516"/>
-                  </a:lnTo>
-                  <a:lnTo>
-                    <a:pt x="205728" y="349901"/>
-                  </a:lnTo>
-                  <a:lnTo>
-                    <a:pt x="240016" y="344253"/>
-                  </a:lnTo>
-                  <a:lnTo>
-                    <a:pt x="274304" y="338573"/>
-                  </a:lnTo>
-                  <a:lnTo>
-                    <a:pt x="308592" y="332858"/>
-                  </a:lnTo>
-                  <a:lnTo>
-                    <a:pt x="342880" y="327111"/>
-                  </a:lnTo>
-                  <a:lnTo>
-                    <a:pt x="377168" y="321329"/>
-                  </a:lnTo>
-                  <a:lnTo>
-                    <a:pt x="411456" y="315514"/>
-                  </a:lnTo>
-                  <a:lnTo>
-                    <a:pt x="445744" y="309664"/>
-                  </a:lnTo>
-                  <a:lnTo>
-                    <a:pt x="480032" y="303781"/>
-                  </a:lnTo>
-                  <a:lnTo>
-                    <a:pt x="514320" y="297862"/>
-                  </a:lnTo>
-                  <a:lnTo>
-                    <a:pt x="548609" y="291909"/>
-                  </a:lnTo>
-                  <a:lnTo>
-                    <a:pt x="582897" y="285921"/>
-                  </a:lnTo>
-                  <a:lnTo>
-                    <a:pt x="617185" y="279898"/>
-                  </a:lnTo>
-                  <a:lnTo>
-                    <a:pt x="651473" y="273839"/>
-                  </a:lnTo>
-                  <a:lnTo>
-                    <a:pt x="685761" y="267745"/>
-                  </a:lnTo>
-                  <a:lnTo>
-                    <a:pt x="720049" y="261615"/>
-                  </a:lnTo>
-                  <a:lnTo>
-                    <a:pt x="754337" y="255450"/>
-                  </a:lnTo>
-                  <a:lnTo>
-                    <a:pt x="788625" y="249248"/>
-                  </a:lnTo>
-                  <a:lnTo>
-                    <a:pt x="822913" y="243009"/>
-                  </a:lnTo>
-                  <a:lnTo>
-                    <a:pt x="857201" y="236734"/>
-                  </a:lnTo>
-                  <a:lnTo>
-                    <a:pt x="891489" y="230422"/>
-                  </a:lnTo>
-                  <a:lnTo>
-                    <a:pt x="925777" y="224073"/>
-                  </a:lnTo>
-                  <a:lnTo>
-                    <a:pt x="960065" y="217687"/>
-                  </a:lnTo>
-                  <a:lnTo>
-                    <a:pt x="994353" y="211264"/>
-                  </a:lnTo>
-                  <a:lnTo>
-                    <a:pt x="1028641" y="204802"/>
-                  </a:lnTo>
-                  <a:lnTo>
-                    <a:pt x="1062930" y="198303"/>
-                  </a:lnTo>
-                  <a:lnTo>
-                    <a:pt x="1097218" y="191766"/>
-                  </a:lnTo>
-                  <a:lnTo>
-                    <a:pt x="1131506" y="185190"/>
-                  </a:lnTo>
-                  <a:lnTo>
-                    <a:pt x="1165794" y="178576"/>
-                  </a:lnTo>
-                  <a:lnTo>
-                    <a:pt x="1200082" y="171923"/>
-                  </a:lnTo>
-                  <a:lnTo>
-                    <a:pt x="1234370" y="165231"/>
-                  </a:lnTo>
-                  <a:lnTo>
-                    <a:pt x="1268658" y="158500"/>
-                  </a:lnTo>
-                  <a:lnTo>
-                    <a:pt x="1302946" y="151729"/>
-                  </a:lnTo>
-                  <a:lnTo>
-                    <a:pt x="1337234" y="144918"/>
-                  </a:lnTo>
-                  <a:lnTo>
-                    <a:pt x="1371522" y="138068"/>
-                  </a:lnTo>
-                  <a:lnTo>
-                    <a:pt x="1405810" y="131177"/>
-                  </a:lnTo>
-                  <a:lnTo>
-                    <a:pt x="1440098" y="124246"/>
-                  </a:lnTo>
-                  <a:lnTo>
-                    <a:pt x="1474386" y="117274"/>
-                  </a:lnTo>
-                  <a:lnTo>
-                    <a:pt x="1508674" y="110262"/>
-                  </a:lnTo>
-                  <a:lnTo>
-                    <a:pt x="1542962" y="103208"/>
-                  </a:lnTo>
-                  <a:lnTo>
-                    <a:pt x="1577251" y="96113"/>
-                  </a:lnTo>
-                  <a:lnTo>
-                    <a:pt x="1611539" y="88976"/>
-                  </a:lnTo>
-                  <a:lnTo>
-                    <a:pt x="1645827" y="81797"/>
-                  </a:lnTo>
-                  <a:lnTo>
-                    <a:pt x="1680115" y="74577"/>
-                  </a:lnTo>
-                  <a:lnTo>
-                    <a:pt x="1714403" y="67314"/>
-                  </a:lnTo>
-                  <a:lnTo>
-                    <a:pt x="1748691" y="60008"/>
-                  </a:lnTo>
-                  <a:lnTo>
-                    <a:pt x="1782979" y="52660"/>
-                  </a:lnTo>
-                  <a:lnTo>
-                    <a:pt x="1817267" y="45268"/>
-                  </a:lnTo>
-                  <a:lnTo>
-                    <a:pt x="1851555" y="37833"/>
-                  </a:lnTo>
-                  <a:lnTo>
-                    <a:pt x="1885843" y="30355"/>
-                  </a:lnTo>
-                  <a:lnTo>
-                    <a:pt x="1920131" y="22832"/>
-                  </a:lnTo>
-                  <a:lnTo>
-                    <a:pt x="1954419" y="15266"/>
-                  </a:lnTo>
-                  <a:lnTo>
-                    <a:pt x="1988707" y="7655"/>
+                    <a:pt x="34288" y="302113"/>
+                  </a:lnTo>
+                  <a:lnTo>
+                    <a:pt x="68576" y="297550"/>
+                  </a:lnTo>
+                  <a:lnTo>
+                    <a:pt x="102864" y="292967"/>
+                  </a:lnTo>
+                  <a:lnTo>
+                    <a:pt x="137152" y="288363"/>
+                  </a:lnTo>
+                  <a:lnTo>
+                    <a:pt x="171440" y="283738"/>
+                  </a:lnTo>
+                  <a:lnTo>
+                    <a:pt x="205728" y="279092"/>
+                  </a:lnTo>
+                  <a:lnTo>
+                    <a:pt x="240016" y="274425"/>
+                  </a:lnTo>
+                  <a:lnTo>
+                    <a:pt x="274304" y="269737"/>
+                  </a:lnTo>
+                  <a:lnTo>
+                    <a:pt x="308592" y="265027"/>
+                  </a:lnTo>
+                  <a:lnTo>
+                    <a:pt x="342880" y="260295"/>
+                  </a:lnTo>
+                  <a:lnTo>
+                    <a:pt x="377168" y="255542"/>
+                  </a:lnTo>
+                  <a:lnTo>
+                    <a:pt x="411456" y="250768"/>
+                  </a:lnTo>
+                  <a:lnTo>
+                    <a:pt x="445744" y="245971"/>
+                  </a:lnTo>
+                  <a:lnTo>
+                    <a:pt x="480032" y="241153"/>
+                  </a:lnTo>
+                  <a:lnTo>
+                    <a:pt x="514320" y="236313"/>
+                  </a:lnTo>
+                  <a:lnTo>
+                    <a:pt x="548609" y="231451"/>
+                  </a:lnTo>
+                  <a:lnTo>
+                    <a:pt x="582897" y="226566"/>
+                  </a:lnTo>
+                  <a:lnTo>
+                    <a:pt x="617185" y="221659"/>
+                  </a:lnTo>
+                  <a:lnTo>
+                    <a:pt x="651473" y="216730"/>
+                  </a:lnTo>
+                  <a:lnTo>
+                    <a:pt x="685761" y="211779"/>
+                  </a:lnTo>
+                  <a:lnTo>
+                    <a:pt x="720049" y="206805"/>
+                  </a:lnTo>
+                  <a:lnTo>
+                    <a:pt x="754337" y="201808"/>
+                  </a:lnTo>
+                  <a:lnTo>
+                    <a:pt x="788625" y="196788"/>
+                  </a:lnTo>
+                  <a:lnTo>
+                    <a:pt x="822913" y="191745"/>
+                  </a:lnTo>
+                  <a:lnTo>
+                    <a:pt x="857201" y="186680"/>
+                  </a:lnTo>
+                  <a:lnTo>
+                    <a:pt x="891489" y="181591"/>
+                  </a:lnTo>
+                  <a:lnTo>
+                    <a:pt x="925777" y="176480"/>
+                  </a:lnTo>
+                  <a:lnTo>
+                    <a:pt x="960065" y="171344"/>
+                  </a:lnTo>
+                  <a:lnTo>
+                    <a:pt x="994353" y="166186"/>
+                  </a:lnTo>
+                  <a:lnTo>
+                    <a:pt x="1028641" y="161004"/>
+                  </a:lnTo>
+                  <a:lnTo>
+                    <a:pt x="1062930" y="155798"/>
+                  </a:lnTo>
+                  <a:lnTo>
+                    <a:pt x="1097218" y="150569"/>
+                  </a:lnTo>
+                  <a:lnTo>
+                    <a:pt x="1131506" y="145316"/>
+                  </a:lnTo>
+                  <a:lnTo>
+                    <a:pt x="1165794" y="140038"/>
+                  </a:lnTo>
+                  <a:lnTo>
+                    <a:pt x="1200082" y="134737"/>
+                  </a:lnTo>
+                  <a:lnTo>
+                    <a:pt x="1234370" y="129412"/>
+                  </a:lnTo>
+                  <a:lnTo>
+                    <a:pt x="1268658" y="124062"/>
+                  </a:lnTo>
+                  <a:lnTo>
+                    <a:pt x="1302946" y="118688"/>
+                  </a:lnTo>
+                  <a:lnTo>
+                    <a:pt x="1337234" y="113289"/>
+                  </a:lnTo>
+                  <a:lnTo>
+                    <a:pt x="1371522" y="107866"/>
+                  </a:lnTo>
+                  <a:lnTo>
+                    <a:pt x="1405810" y="102418"/>
+                  </a:lnTo>
+                  <a:lnTo>
+                    <a:pt x="1440098" y="96946"/>
+                  </a:lnTo>
+                  <a:lnTo>
+                    <a:pt x="1474386" y="91448"/>
+                  </a:lnTo>
+                  <a:lnTo>
+                    <a:pt x="1508674" y="85925"/>
+                  </a:lnTo>
+                  <a:lnTo>
+                    <a:pt x="1542962" y="80378"/>
+                  </a:lnTo>
+                  <a:lnTo>
+                    <a:pt x="1577251" y="74804"/>
+                  </a:lnTo>
+                  <a:lnTo>
+                    <a:pt x="1611539" y="69206"/>
+                  </a:lnTo>
+                  <a:lnTo>
+                    <a:pt x="1645827" y="63582"/>
+                  </a:lnTo>
+                  <a:lnTo>
+                    <a:pt x="1680115" y="57932"/>
+                  </a:lnTo>
+                  <a:lnTo>
+                    <a:pt x="1714403" y="52257"/>
+                  </a:lnTo>
+                  <a:lnTo>
+                    <a:pt x="1748691" y="46555"/>
+                  </a:lnTo>
+                  <a:lnTo>
+                    <a:pt x="1782979" y="40828"/>
+                  </a:lnTo>
+                  <a:lnTo>
+                    <a:pt x="1817267" y="35075"/>
+                  </a:lnTo>
+                  <a:lnTo>
+                    <a:pt x="1851555" y="29295"/>
+                  </a:lnTo>
+                  <a:lnTo>
+                    <a:pt x="1885843" y="23489"/>
+                  </a:lnTo>
+                  <a:lnTo>
+                    <a:pt x="1920131" y="17657"/>
+                  </a:lnTo>
+                  <a:lnTo>
+                    <a:pt x="1954419" y="11798"/>
+                  </a:lnTo>
+                  <a:lnTo>
+                    <a:pt x="1988707" y="5912"/>
                   </a:lnTo>
                   <a:lnTo>
                     <a:pt x="2022995" y="0"/>
@@ -9748,7 +9748,7 @@
           </p:nvSpPr>
           <p:spPr>
             <a:xfrm>
-              <a:off x="503004" y="5730940"/>
+              <a:off x="503004" y="5725553"/>
               <a:ext cx="141274" cy="72786"/>
             </a:xfrm>
             <a:prstGeom prst="rect">
@@ -9791,7 +9791,7 @@
           </p:nvSpPr>
           <p:spPr>
             <a:xfrm>
-              <a:off x="503004" y="5159367"/>
+              <a:off x="503004" y="5157225"/>
               <a:ext cx="141274" cy="72786"/>
             </a:xfrm>
             <a:prstGeom prst="rect">
@@ -9834,7 +9834,7 @@
           </p:nvSpPr>
           <p:spPr>
             <a:xfrm>
-              <a:off x="503004" y="4587794"/>
+              <a:off x="503004" y="4588897"/>
               <a:ext cx="141274" cy="72786"/>
             </a:xfrm>
             <a:prstGeom prst="rect">
@@ -9877,7 +9877,7 @@
           </p:nvSpPr>
           <p:spPr>
             <a:xfrm>
-              <a:off x="503004" y="4016221"/>
+              <a:off x="503004" y="4020569"/>
               <a:ext cx="141274" cy="72786"/>
             </a:xfrm>
             <a:prstGeom prst="rect">
@@ -9920,7 +9920,7 @@
           </p:nvSpPr>
           <p:spPr>
             <a:xfrm>
-              <a:off x="669584" y="5767333"/>
+              <a:off x="669584" y="5761946"/>
               <a:ext cx="31631" cy="0"/>
             </a:xfrm>
             <a:custGeom>
@@ -9960,7 +9960,7 @@
           </p:nvSpPr>
           <p:spPr>
             <a:xfrm>
-              <a:off x="669584" y="5195760"/>
+              <a:off x="669584" y="5193618"/>
               <a:ext cx="31631" cy="0"/>
             </a:xfrm>
             <a:custGeom>
@@ -10000,7 +10000,7 @@
           </p:nvSpPr>
           <p:spPr>
             <a:xfrm>
-              <a:off x="669584" y="4624187"/>
+              <a:off x="669584" y="4625290"/>
               <a:ext cx="31631" cy="0"/>
             </a:xfrm>
             <a:custGeom>
@@ -10040,7 +10040,7 @@
           </p:nvSpPr>
           <p:spPr>
             <a:xfrm>
-              <a:off x="669584" y="4052614"/>
+              <a:off x="669584" y="4056962"/>
               <a:ext cx="31631" cy="0"/>
             </a:xfrm>
             <a:custGeom>
@@ -10120,7 +10120,7 @@
           </p:nvSpPr>
           <p:spPr>
             <a:xfrm>
-              <a:off x="713603" y="5771981"/>
+              <a:off x="713616" y="5771981"/>
               <a:ext cx="0" cy="31631"/>
             </a:xfrm>
             <a:custGeom>
@@ -10160,7 +10160,7 @@
           </p:nvSpPr>
           <p:spPr>
             <a:xfrm>
-              <a:off x="1266189" y="5771981"/>
+              <a:off x="1266154" y="5771981"/>
               <a:ext cx="0" cy="31631"/>
             </a:xfrm>
             <a:custGeom>
@@ -10200,7 +10200,7 @@
           </p:nvSpPr>
           <p:spPr>
             <a:xfrm>
-              <a:off x="1818775" y="5771981"/>
+              <a:off x="1818692" y="5771981"/>
               <a:ext cx="0" cy="31631"/>
             </a:xfrm>
             <a:custGeom>
@@ -10240,7 +10240,7 @@
           </p:nvSpPr>
           <p:spPr>
             <a:xfrm>
-              <a:off x="2371361" y="5771981"/>
+              <a:off x="2371231" y="5771981"/>
               <a:ext cx="0" cy="31631"/>
             </a:xfrm>
             <a:custGeom>
@@ -10280,7 +10280,7 @@
           </p:nvSpPr>
           <p:spPr>
             <a:xfrm>
-              <a:off x="2923947" y="5771981"/>
+              <a:off x="2923769" y="5771981"/>
               <a:ext cx="0" cy="31631"/>
             </a:xfrm>
             <a:custGeom>
@@ -10320,7 +10320,7 @@
           </p:nvSpPr>
           <p:spPr>
             <a:xfrm>
-              <a:off x="626049" y="5828917"/>
+              <a:off x="626062" y="5828917"/>
               <a:ext cx="175107" cy="72786"/>
             </a:xfrm>
             <a:prstGeom prst="rect">
@@ -10363,7 +10363,7 @@
           </p:nvSpPr>
           <p:spPr>
             <a:xfrm>
-              <a:off x="1178635" y="5828917"/>
+              <a:off x="1178600" y="5828917"/>
               <a:ext cx="175107" cy="72786"/>
             </a:xfrm>
             <a:prstGeom prst="rect">
@@ -10406,7 +10406,7 @@
           </p:nvSpPr>
           <p:spPr>
             <a:xfrm>
-              <a:off x="1748138" y="5828917"/>
+              <a:off x="1748055" y="5828917"/>
               <a:ext cx="141274" cy="72786"/>
             </a:xfrm>
             <a:prstGeom prst="rect">
@@ -10449,7 +10449,7 @@
           </p:nvSpPr>
           <p:spPr>
             <a:xfrm>
-              <a:off x="2300724" y="5828917"/>
+              <a:off x="2300593" y="5828917"/>
               <a:ext cx="141274" cy="72786"/>
             </a:xfrm>
             <a:prstGeom prst="rect">
@@ -10492,7 +10492,7 @@
           </p:nvSpPr>
           <p:spPr>
             <a:xfrm>
-              <a:off x="2853310" y="5828917"/>
+              <a:off x="2853131" y="5828917"/>
               <a:ext cx="141274" cy="72786"/>
             </a:xfrm>
             <a:prstGeom prst="rect">
@@ -10621,8 +10621,8 @@
           </p:nvSpPr>
           <p:spPr>
             <a:xfrm>
-              <a:off x="827418" y="3742392"/>
-              <a:ext cx="993758" cy="637203"/>
+              <a:off x="823166" y="3742392"/>
+              <a:ext cx="1002262" cy="637203"/>
             </a:xfrm>
             <a:prstGeom prst="rect">
               <a:avLst/>
@@ -10647,7 +10647,7 @@
           </p:nvSpPr>
           <p:spPr>
             <a:xfrm>
-              <a:off x="890681" y="3817633"/>
+              <a:off x="886429" y="3817633"/>
               <a:ext cx="704910" cy="81838"/>
             </a:xfrm>
             <a:prstGeom prst="rect">
@@ -10690,7 +10690,7 @@
           </p:nvSpPr>
           <p:spPr>
             <a:xfrm>
-              <a:off x="890681" y="3974713"/>
+              <a:off x="886429" y="3974713"/>
               <a:ext cx="113872" cy="113872"/>
             </a:xfrm>
             <a:prstGeom prst="rect">
@@ -10716,7 +10716,7 @@
           </p:nvSpPr>
           <p:spPr>
             <a:xfrm>
-              <a:off x="902068" y="4031650"/>
+              <a:off x="897816" y="4031650"/>
               <a:ext cx="91098" cy="0"/>
             </a:xfrm>
             <a:custGeom>
@@ -10756,7 +10756,7 @@
           </p:nvSpPr>
           <p:spPr>
             <a:xfrm>
-              <a:off x="890681" y="4088586"/>
+              <a:off x="886429" y="4088586"/>
               <a:ext cx="113872" cy="113872"/>
             </a:xfrm>
             <a:prstGeom prst="rect">
@@ -10782,7 +10782,7 @@
           </p:nvSpPr>
           <p:spPr>
             <a:xfrm>
-              <a:off x="902068" y="4145523"/>
+              <a:off x="897816" y="4145523"/>
               <a:ext cx="91098" cy="0"/>
             </a:xfrm>
             <a:custGeom>
@@ -10822,7 +10822,7 @@
           </p:nvSpPr>
           <p:spPr>
             <a:xfrm>
-              <a:off x="890681" y="4202459"/>
+              <a:off x="886429" y="4202459"/>
               <a:ext cx="113872" cy="113872"/>
             </a:xfrm>
             <a:prstGeom prst="rect">
@@ -10848,7 +10848,7 @@
           </p:nvSpPr>
           <p:spPr>
             <a:xfrm>
-              <a:off x="902068" y="4259396"/>
+              <a:off x="897816" y="4259396"/>
               <a:ext cx="91098" cy="0"/>
             </a:xfrm>
             <a:custGeom>
@@ -10888,7 +10888,7 @@
           </p:nvSpPr>
           <p:spPr>
             <a:xfrm>
-              <a:off x="1067817" y="3990730"/>
+              <a:off x="1063565" y="3990730"/>
               <a:ext cx="603138" cy="81838"/>
             </a:xfrm>
             <a:prstGeom prst="rect">
@@ -10931,7 +10931,7 @@
           </p:nvSpPr>
           <p:spPr>
             <a:xfrm>
-              <a:off x="1067817" y="4104603"/>
+              <a:off x="1063565" y="4104603"/>
               <a:ext cx="634959" cy="81838"/>
             </a:xfrm>
             <a:prstGeom prst="rect">
@@ -10974,8 +10974,8 @@
           </p:nvSpPr>
           <p:spPr>
             <a:xfrm>
-              <a:off x="1067817" y="4218476"/>
-              <a:ext cx="690097" cy="81838"/>
+              <a:off x="1063565" y="4218476"/>
+              <a:ext cx="698601" cy="81838"/>
             </a:xfrm>
             <a:prstGeom prst="rect">
               <a:avLst/>
@@ -11004,7 +11004,7 @@
                   <a:latin typeface="Arial"/>
                   <a:cs typeface="Arial"/>
                 </a:rPr>
-                <a:t>1,114 visits/yr</a:t>
+                <a:t>1,163 visits/yr</a:t>
               </a:r>
             </a:p>
           </p:txBody>
@@ -11090,7 +11090,7 @@
                   <a:latin typeface="Arial"/>
                   <a:cs typeface="Arial"/>
                 </a:rPr>
-                <a:t>one SD of effort multiplies annual visits by 7.7</a:t>
+                <a:t>one SD of effort multiplies annual visits by 7.9</a:t>
               </a:r>
             </a:p>
           </p:txBody>
@@ -11259,7 +11259,7 @@
           <p:spPr>
             <a:xfrm>
               <a:off x="4597190" y="3862397"/>
-              <a:ext cx="1123511" cy="215440"/>
+              <a:ext cx="1122386" cy="215440"/>
             </a:xfrm>
             <a:prstGeom prst="rect">
               <a:avLst/>
@@ -11285,7 +11285,7 @@
           <p:spPr>
             <a:xfrm>
               <a:off x="4597190" y="4254106"/>
-              <a:ext cx="1038247" cy="215440"/>
+              <a:ext cx="1044216" cy="215440"/>
             </a:xfrm>
             <a:prstGeom prst="rect">
               <a:avLst/>
@@ -11311,7 +11311,7 @@
           <p:spPr>
             <a:xfrm>
               <a:off x="4597190" y="4645816"/>
-              <a:ext cx="1674282" cy="215440"/>
+              <a:ext cx="1664023" cy="215440"/>
             </a:xfrm>
             <a:prstGeom prst="rect">
               <a:avLst/>
@@ -11337,7 +11337,7 @@
           <p:spPr>
             <a:xfrm>
               <a:off x="4597190" y="5037525"/>
-              <a:ext cx="1020224" cy="215440"/>
+              <a:ext cx="1022564" cy="215440"/>
             </a:xfrm>
             <a:prstGeom prst="rect">
               <a:avLst/>
@@ -11363,7 +11363,7 @@
           <p:spPr>
             <a:xfrm>
               <a:off x="4597190" y="5429235"/>
-              <a:ext cx="1051820" cy="215440"/>
+              <a:ext cx="1070944" cy="215440"/>
             </a:xfrm>
             <a:prstGeom prst="rect">
               <a:avLst/>
@@ -11388,7 +11388,7 @@
           </p:nvSpPr>
           <p:spPr>
             <a:xfrm>
-              <a:off x="5765948" y="3933312"/>
+              <a:off x="5764822" y="3933312"/>
               <a:ext cx="251368" cy="73609"/>
             </a:xfrm>
             <a:prstGeom prst="rect">
@@ -11431,7 +11431,7 @@
           </p:nvSpPr>
           <p:spPr>
             <a:xfrm>
-              <a:off x="5680684" y="4325022"/>
+              <a:off x="5686653" y="4325022"/>
               <a:ext cx="251368" cy="73609"/>
             </a:xfrm>
             <a:prstGeom prst="rect">
@@ -11474,7 +11474,7 @@
           </p:nvSpPr>
           <p:spPr>
             <a:xfrm>
-              <a:off x="6316719" y="4716731"/>
+              <a:off x="6306460" y="4716731"/>
               <a:ext cx="251368" cy="73609"/>
             </a:xfrm>
             <a:prstGeom prst="rect">
@@ -11504,7 +11504,7 @@
                   <a:latin typeface="Arial"/>
                   <a:cs typeface="Arial"/>
                 </a:rPr>
-                <a:t>x2.23</a:t>
+                <a:t>x2.22</a:t>
               </a:r>
             </a:p>
           </p:txBody>
@@ -11517,7 +11517,7 @@
           </p:nvSpPr>
           <p:spPr>
             <a:xfrm>
-              <a:off x="5662661" y="5108441"/>
+              <a:off x="5665001" y="5108441"/>
               <a:ext cx="251368" cy="73609"/>
             </a:xfrm>
             <a:prstGeom prst="rect">
@@ -11560,7 +11560,7 @@
           </p:nvSpPr>
           <p:spPr>
             <a:xfrm>
-              <a:off x="5694257" y="5500150"/>
+              <a:off x="5713381" y="5500150"/>
               <a:ext cx="251368" cy="73609"/>
             </a:xfrm>
             <a:prstGeom prst="rect">
@@ -11590,7 +11590,7 @@
                   <a:latin typeface="Arial"/>
                   <a:cs typeface="Arial"/>
                 </a:rPr>
-                <a:t>x1.40</a:t>
+                <a:t>x1.43</a:t>
               </a:r>
             </a:p>
           </p:txBody>
@@ -12434,7 +12434,7 @@
           <p:spPr>
             <a:xfrm>
               <a:off x="4496040" y="3563655"/>
-              <a:ext cx="2277587" cy="83576"/>
+              <a:ext cx="2245126" cy="83576"/>
             </a:xfrm>
             <a:prstGeom prst="rect">
               <a:avLst/>
@@ -12463,7 +12463,7 @@
                   <a:latin typeface="Arial"/>
                   <a:cs typeface="Arial"/>
                 </a:rPr>
-                <a:t> the hazard by 2.23 - more than either driver</a:t>
+                <a:t>the hazard by 2.22 - more than either driver</a:t>
               </a:r>
             </a:p>
           </p:txBody>
